--- a/slides/team-decks/Week3-Tue-chezborgar.pptx
+++ b/slides/team-decks/Week3-Tue-chezborgar.pptx
@@ -13,6 +13,9 @@
     <p:sldId id="261" r:id="rId13"/>
     <p:sldId id="262" r:id="rId14"/>
     <p:sldId id="263" r:id="rId15"/>
+    <p:sldId id="264" r:id="rId16"/>
+    <p:sldId id="265" r:id="rId17"/>
+    <p:sldId id="266" r:id="rId18"/>
   </p:sldIdLst>
   <p:sldSz cx="12191695" cy="6858000" type="screen4x3"/>
   <p:notesSz cx="6858000" cy="9144000"/>
@@ -789,7 +792,7 @@
           <a:lstStyle/>
           <a:p>
             <a:r>
-              <a:t>Section header — the team's own slides go after this one.</a:t>
+              <a:t>Emily Tai's individually graded section. Their reflection lives in their own lane on the team FigJam canvas.</a:t>
             </a:r>
           </a:p>
         </p:txBody>
@@ -815,6 +818,216 @@
 </file>
 
 <file path=ppt/notesSlides/notesSlide6.xml><?xml version="1.0" encoding="utf-8"?>
+<p:notes xmlns:a="http://schemas.openxmlformats.org/drawingml/2006/main" xmlns:p="http://schemas.openxmlformats.org/presentationml/2006/main" xmlns:r="http://schemas.openxmlformats.org/officeDocument/2006/relationships">
+  <p:cSld>
+    <p:spTree>
+      <p:nvGrpSpPr>
+        <p:cNvPr id="1" name=""/>
+        <p:cNvGrpSpPr/>
+        <p:nvPr/>
+      </p:nvGrpSpPr>
+      <p:grpSpPr>
+        <a:xfrm>
+          <a:off x="0" y="0"/>
+          <a:ext cx="0" cy="0"/>
+          <a:chOff x="0" y="0"/>
+          <a:chExt cx="0" cy="0"/>
+        </a:xfrm>
+      </p:grpSpPr>
+      <p:sp>
+        <p:nvSpPr>
+          <p:cNvPr id="2" name="Slide Image Placeholder 1"/>
+          <p:cNvSpPr>
+            <a:spLocks noGrp="1"/>
+          </p:cNvSpPr>
+          <p:nvPr>
+            <p:ph type="sldImg" idx="2"/>
+          </p:nvPr>
+        </p:nvSpPr>
+        <p:spPr/>
+      </p:sp>
+      <p:sp>
+        <p:nvSpPr>
+          <p:cNvPr id="3" name="Notes Placeholder 2"/>
+          <p:cNvSpPr>
+            <a:spLocks noGrp="1"/>
+          </p:cNvSpPr>
+          <p:nvPr>
+            <p:ph type="body" idx="3" sz="quarter"/>
+          </p:nvPr>
+        </p:nvSpPr>
+        <p:spPr/>
+        <p:txBody>
+          <a:bodyPr/>
+          <a:lstStyle/>
+          <a:p>
+            <a:r>
+              <a:t>Kylie Cheung's individually graded section. Their reflection lives in their own lane on the team FigJam canvas.</a:t>
+            </a:r>
+          </a:p>
+        </p:txBody>
+      </p:sp>
+      <p:sp>
+        <p:nvSpPr>
+          <p:cNvPr id="4" name="Slide Number Placeholder 3"/>
+          <p:cNvSpPr>
+            <a:spLocks noGrp="1"/>
+          </p:cNvSpPr>
+          <p:nvPr>
+            <p:ph type="sldNum" idx="5" sz="quarter"/>
+          </p:nvPr>
+        </p:nvSpPr>
+        <p:spPr/>
+      </p:sp>
+    </p:spTree>
+  </p:cSld>
+  <p:clrMapOvr>
+    <a:masterClrMapping/>
+  </p:clrMapOvr>
+</p:notes>
+</file>
+
+<file path=ppt/notesSlides/notesSlide7.xml><?xml version="1.0" encoding="utf-8"?>
+<p:notes xmlns:a="http://schemas.openxmlformats.org/drawingml/2006/main" xmlns:p="http://schemas.openxmlformats.org/presentationml/2006/main" xmlns:r="http://schemas.openxmlformats.org/officeDocument/2006/relationships">
+  <p:cSld>
+    <p:spTree>
+      <p:nvGrpSpPr>
+        <p:cNvPr id="1" name=""/>
+        <p:cNvGrpSpPr/>
+        <p:nvPr/>
+      </p:nvGrpSpPr>
+      <p:grpSpPr>
+        <a:xfrm>
+          <a:off x="0" y="0"/>
+          <a:ext cx="0" cy="0"/>
+          <a:chOff x="0" y="0"/>
+          <a:chExt cx="0" cy="0"/>
+        </a:xfrm>
+      </p:grpSpPr>
+      <p:sp>
+        <p:nvSpPr>
+          <p:cNvPr id="2" name="Slide Image Placeholder 1"/>
+          <p:cNvSpPr>
+            <a:spLocks noGrp="1"/>
+          </p:cNvSpPr>
+          <p:nvPr>
+            <p:ph type="sldImg" idx="2"/>
+          </p:nvPr>
+        </p:nvSpPr>
+        <p:spPr/>
+      </p:sp>
+      <p:sp>
+        <p:nvSpPr>
+          <p:cNvPr id="3" name="Notes Placeholder 2"/>
+          <p:cNvSpPr>
+            <a:spLocks noGrp="1"/>
+          </p:cNvSpPr>
+          <p:nvPr>
+            <p:ph type="body" idx="3" sz="quarter"/>
+          </p:nvPr>
+        </p:nvSpPr>
+        <p:spPr/>
+        <p:txBody>
+          <a:bodyPr/>
+          <a:lstStyle/>
+          <a:p>
+            <a:r>
+              <a:t>Aria Sharma's individually graded section. Their reflection lives in their own lane on the team FigJam canvas.</a:t>
+            </a:r>
+          </a:p>
+        </p:txBody>
+      </p:sp>
+      <p:sp>
+        <p:nvSpPr>
+          <p:cNvPr id="4" name="Slide Number Placeholder 3"/>
+          <p:cNvSpPr>
+            <a:spLocks noGrp="1"/>
+          </p:cNvSpPr>
+          <p:nvPr>
+            <p:ph type="sldNum" idx="5" sz="quarter"/>
+          </p:nvPr>
+        </p:nvSpPr>
+        <p:spPr/>
+      </p:sp>
+    </p:spTree>
+  </p:cSld>
+  <p:clrMapOvr>
+    <a:masterClrMapping/>
+  </p:clrMapOvr>
+</p:notes>
+</file>
+
+<file path=ppt/notesSlides/notesSlide8.xml><?xml version="1.0" encoding="utf-8"?>
+<p:notes xmlns:a="http://schemas.openxmlformats.org/drawingml/2006/main" xmlns:p="http://schemas.openxmlformats.org/presentationml/2006/main" xmlns:r="http://schemas.openxmlformats.org/officeDocument/2006/relationships">
+  <p:cSld>
+    <p:spTree>
+      <p:nvGrpSpPr>
+        <p:cNvPr id="1" name=""/>
+        <p:cNvGrpSpPr/>
+        <p:nvPr/>
+      </p:nvGrpSpPr>
+      <p:grpSpPr>
+        <a:xfrm>
+          <a:off x="0" y="0"/>
+          <a:ext cx="0" cy="0"/>
+          <a:chOff x="0" y="0"/>
+          <a:chExt cx="0" cy="0"/>
+        </a:xfrm>
+      </p:grpSpPr>
+      <p:sp>
+        <p:nvSpPr>
+          <p:cNvPr id="2" name="Slide Image Placeholder 1"/>
+          <p:cNvSpPr>
+            <a:spLocks noGrp="1"/>
+          </p:cNvSpPr>
+          <p:nvPr>
+            <p:ph type="sldImg" idx="2"/>
+          </p:nvPr>
+        </p:nvSpPr>
+        <p:spPr/>
+      </p:sp>
+      <p:sp>
+        <p:nvSpPr>
+          <p:cNvPr id="3" name="Notes Placeholder 2"/>
+          <p:cNvSpPr>
+            <a:spLocks noGrp="1"/>
+          </p:cNvSpPr>
+          <p:nvPr>
+            <p:ph type="body" idx="3" sz="quarter"/>
+          </p:nvPr>
+        </p:nvSpPr>
+        <p:spPr/>
+        <p:txBody>
+          <a:bodyPr/>
+          <a:lstStyle/>
+          <a:p>
+            <a:r>
+              <a:t>Section header — the team's own slides go after this one.</a:t>
+            </a:r>
+          </a:p>
+        </p:txBody>
+      </p:sp>
+      <p:sp>
+        <p:nvSpPr>
+          <p:cNvPr id="4" name="Slide Number Placeholder 3"/>
+          <p:cNvSpPr>
+            <a:spLocks noGrp="1"/>
+          </p:cNvSpPr>
+          <p:nvPr>
+            <p:ph type="sldNum" idx="5" sz="quarter"/>
+          </p:nvPr>
+        </p:nvSpPr>
+        <p:spPr/>
+      </p:sp>
+    </p:spTree>
+  </p:cSld>
+  <p:clrMapOvr>
+    <a:masterClrMapping/>
+  </p:clrMapOvr>
+</p:notes>
+</file>
+
+<file path=ppt/notesSlides/notesSlide9.xml><?xml version="1.0" encoding="utf-8"?>
 <p:notes xmlns:a="http://schemas.openxmlformats.org/drawingml/2006/main" xmlns:p="http://schemas.openxmlformats.org/presentationml/2006/main" xmlns:r="http://schemas.openxmlformats.org/officeDocument/2006/relationships">
   <p:cSld>
     <p:spTree>
@@ -4129,6 +4342,679 @@
 </p:sld>
 </file>
 
+<file path=ppt/slides/slide10.xml><?xml version="1.0" encoding="utf-8"?>
+<p:sld xmlns:a="http://schemas.openxmlformats.org/drawingml/2006/main" xmlns:p="http://schemas.openxmlformats.org/presentationml/2006/main" xmlns:r="http://schemas.openxmlformats.org/officeDocument/2006/relationships">
+  <p:cSld>
+    <p:bg>
+      <p:bgPr>
+        <a:solidFill>
+          <a:srgbClr val="0B0E14"/>
+        </a:solidFill>
+        <a:effectLst/>
+      </p:bgPr>
+    </p:bg>
+    <p:spTree>
+      <p:nvGrpSpPr>
+        <p:cNvPr id="1" name=""/>
+        <p:cNvGrpSpPr/>
+        <p:nvPr/>
+      </p:nvGrpSpPr>
+      <p:grpSpPr/>
+      <p:sp>
+        <p:nvSpPr>
+          <p:cNvPr id="2" name="Rectangle 1"/>
+          <p:cNvSpPr/>
+          <p:nvPr/>
+        </p:nvSpPr>
+        <p:spPr>
+          <a:xfrm>
+            <a:off x="0" y="0"/>
+            <a:ext cx="256032" cy="6858000"/>
+          </a:xfrm>
+          <a:prstGeom prst="rect">
+            <a:avLst/>
+          </a:prstGeom>
+          <a:solidFill>
+            <a:srgbClr val="00FF41"/>
+          </a:solidFill>
+          <a:ln>
+            <a:noFill/>
+          </a:ln>
+          <a:effectLst/>
+        </p:spPr>
+        <p:style>
+          <a:lnRef idx="1">
+            <a:schemeClr val="accent1"/>
+          </a:lnRef>
+          <a:fillRef idx="3">
+            <a:schemeClr val="accent1"/>
+          </a:fillRef>
+          <a:effectRef idx="2">
+            <a:schemeClr val="accent1"/>
+          </a:effectRef>
+          <a:fontRef idx="minor">
+            <a:schemeClr val="lt1"/>
+          </a:fontRef>
+        </p:style>
+        <p:txBody>
+          <a:bodyPr rtlCol="0" anchor="ctr"/>
+          <a:lstStyle/>
+          <a:p>
+            <a:pPr algn="ctr"/>
+          </a:p>
+        </p:txBody>
+      </p:sp>
+      <p:sp>
+        <p:nvSpPr>
+          <p:cNvPr id="3" name="TextBox 2"/>
+          <p:cNvSpPr txBox="1"/>
+          <p:nvPr/>
+        </p:nvSpPr>
+        <p:spPr>
+          <a:xfrm>
+            <a:off x="822960" y="1417320"/>
+            <a:ext cx="2743200" cy="1097280"/>
+          </a:xfrm>
+          <a:prstGeom prst="rect">
+            <a:avLst/>
+          </a:prstGeom>
+          <a:noFill/>
+        </p:spPr>
+        <p:txBody>
+          <a:bodyPr wrap="square" anchor="t">
+            <a:spAutoFit/>
+          </a:bodyPr>
+          <a:lstStyle/>
+          <a:p>
+            <a:pPr algn="l">
+              <a:lnSpc>
+                <a:spcPct val="100000"/>
+              </a:lnSpc>
+            </a:pPr>
+            <a:r>
+              <a:rPr sz="6400" b="1">
+                <a:solidFill>
+                  <a:srgbClr val="00FF41"/>
+                </a:solidFill>
+                <a:latin typeface="Courier New"/>
+              </a:rPr>
+              <a:t>05</a:t>
+            </a:r>
+          </a:p>
+        </p:txBody>
+      </p:sp>
+      <p:sp>
+        <p:nvSpPr>
+          <p:cNvPr id="4" name="TextBox 3"/>
+          <p:cNvSpPr txBox="1"/>
+          <p:nvPr/>
+        </p:nvSpPr>
+        <p:spPr>
+          <a:xfrm>
+            <a:off x="841248" y="2487168"/>
+            <a:ext cx="10424160" cy="457200"/>
+          </a:xfrm>
+          <a:prstGeom prst="rect">
+            <a:avLst/>
+          </a:prstGeom>
+          <a:noFill/>
+        </p:spPr>
+        <p:txBody>
+          <a:bodyPr wrap="square" anchor="t">
+            <a:spAutoFit/>
+          </a:bodyPr>
+          <a:lstStyle/>
+          <a:p>
+            <a:pPr algn="l">
+              <a:lnSpc>
+                <a:spcPct val="100000"/>
+              </a:lnSpc>
+            </a:pPr>
+            <a:r>
+              <a:rPr sz="1500" b="1">
+                <a:solidFill>
+                  <a:srgbClr val="00FF41"/>
+                </a:solidFill>
+                <a:latin typeface="Courier New"/>
+              </a:rPr>
+              <a:t>SO WHAT</a:t>
+            </a:r>
+          </a:p>
+        </p:txBody>
+      </p:sp>
+      <p:sp>
+        <p:nvSpPr>
+          <p:cNvPr id="5" name="TextBox 4"/>
+          <p:cNvSpPr txBox="1"/>
+          <p:nvPr/>
+        </p:nvSpPr>
+        <p:spPr>
+          <a:xfrm>
+            <a:off x="804672" y="2971800"/>
+            <a:ext cx="10607040" cy="1097280"/>
+          </a:xfrm>
+          <a:prstGeom prst="rect">
+            <a:avLst/>
+          </a:prstGeom>
+          <a:noFill/>
+        </p:spPr>
+        <p:txBody>
+          <a:bodyPr wrap="square" anchor="t">
+            <a:spAutoFit/>
+          </a:bodyPr>
+          <a:lstStyle/>
+          <a:p>
+            <a:pPr algn="l">
+              <a:lnSpc>
+                <a:spcPct val="103000"/>
+              </a:lnSpc>
+            </a:pPr>
+            <a:r>
+              <a:rPr sz="3800" b="1">
+                <a:solidFill>
+                  <a:srgbClr val="F5F7FA"/>
+                </a:solidFill>
+                <a:latin typeface="Arial"/>
+              </a:rPr>
+              <a:t>Our next design brief</a:t>
+            </a:r>
+          </a:p>
+        </p:txBody>
+      </p:sp>
+      <p:sp>
+        <p:nvSpPr>
+          <p:cNvPr id="6" name="TextBox 5"/>
+          <p:cNvSpPr txBox="1"/>
+          <p:nvPr/>
+        </p:nvSpPr>
+        <p:spPr>
+          <a:xfrm>
+            <a:off x="841248" y="4224528"/>
+            <a:ext cx="10424160" cy="1737360"/>
+          </a:xfrm>
+          <a:prstGeom prst="rect">
+            <a:avLst/>
+          </a:prstGeom>
+          <a:noFill/>
+        </p:spPr>
+        <p:txBody>
+          <a:bodyPr wrap="square" anchor="t">
+            <a:spAutoFit/>
+          </a:bodyPr>
+          <a:lstStyle/>
+          <a:p>
+            <a:pPr algn="l">
+              <a:lnSpc>
+                <a:spcPct val="128000"/>
+              </a:lnSpc>
+            </a:pPr>
+            <a:r>
+              <a:rPr sz="1700" b="1">
+                <a:solidFill>
+                  <a:srgbClr val="00FF41"/>
+                </a:solidFill>
+                <a:latin typeface="Arial"/>
+              </a:rPr>
+              <a:t>→  </a:t>
+            </a:r>
+            <a:r>
+              <a:rPr sz="1700" b="0">
+                <a:solidFill>
+                  <a:srgbClr val="8A94A6"/>
+                </a:solidFill>
+                <a:latin typeface="Arial"/>
+              </a:rPr>
+              <a:t>Verification is a beginning, not a verdict.</a:t>
+            </a:r>
+          </a:p>
+          <a:p>
+            <a:pPr algn="l">
+              <a:lnSpc>
+                <a:spcPct val="128000"/>
+              </a:lnSpc>
+            </a:pPr>
+            <a:r>
+              <a:rPr sz="1700" b="1">
+                <a:solidFill>
+                  <a:srgbClr val="00FF41"/>
+                </a:solidFill>
+                <a:latin typeface="Arial"/>
+              </a:rPr>
+              <a:t>→  </a:t>
+            </a:r>
+            <a:r>
+              <a:rPr sz="1700" b="0">
+                <a:solidFill>
+                  <a:srgbClr val="8A94A6"/>
+                </a:solidFill>
+                <a:latin typeface="Arial"/>
+              </a:rPr>
+              <a:t>What OTHER design could actually achieve this value?</a:t>
+            </a:r>
+          </a:p>
+          <a:p>
+            <a:pPr algn="l">
+              <a:lnSpc>
+                <a:spcPct val="128000"/>
+              </a:lnSpc>
+            </a:pPr>
+            <a:r>
+              <a:rPr sz="1700" b="1">
+                <a:solidFill>
+                  <a:srgbClr val="00FF41"/>
+                </a:solidFill>
+                <a:latin typeface="Arial"/>
+              </a:rPr>
+              <a:t>→  </a:t>
+            </a:r>
+            <a:r>
+              <a:rPr sz="1700" b="0">
+                <a:solidFill>
+                  <a:srgbClr val="8A94A6"/>
+                </a:solidFill>
+                <a:latin typeface="Arial"/>
+              </a:rPr>
+              <a:t>What should the next cycle discover? (You carry this into Wednesday.)</a:t>
+            </a:r>
+          </a:p>
+        </p:txBody>
+      </p:sp>
+      <p:sp>
+        <p:nvSpPr>
+          <p:cNvPr id="7" name="TextBox 6"/>
+          <p:cNvSpPr txBox="1"/>
+          <p:nvPr/>
+        </p:nvSpPr>
+        <p:spPr>
+          <a:xfrm>
+            <a:off x="640080" y="6355080"/>
+            <a:ext cx="10972800" cy="365760"/>
+          </a:xfrm>
+          <a:prstGeom prst="rect">
+            <a:avLst/>
+          </a:prstGeom>
+          <a:noFill/>
+        </p:spPr>
+        <p:txBody>
+          <a:bodyPr wrap="square" anchor="t">
+            <a:spAutoFit/>
+          </a:bodyPr>
+          <a:lstStyle/>
+          <a:p>
+            <a:pPr algn="l">
+              <a:lnSpc>
+                <a:spcPct val="100000"/>
+              </a:lnSpc>
+            </a:pPr>
+            <a:r>
+              <a:rPr sz="1000" b="0">
+                <a:solidFill>
+                  <a:srgbClr val="5A6474"/>
+                </a:solidFill>
+                <a:latin typeface="Courier New"/>
+              </a:rPr>
+              <a:t>Value Verification · TECHIE 1121 · Cornell Tech · Tue Jul 28</a:t>
+            </a:r>
+          </a:p>
+        </p:txBody>
+      </p:sp>
+    </p:spTree>
+  </p:cSld>
+  <p:clrMapOvr>
+    <a:masterClrMapping/>
+  </p:clrMapOvr>
+</p:sld>
+</file>
+
+<file path=ppt/slides/slide11.xml><?xml version="1.0" encoding="utf-8"?>
+<p:sld xmlns:a="http://schemas.openxmlformats.org/drawingml/2006/main" xmlns:p="http://schemas.openxmlformats.org/presentationml/2006/main" xmlns:r="http://schemas.openxmlformats.org/officeDocument/2006/relationships">
+  <p:cSld>
+    <p:bg>
+      <p:bgPr>
+        <a:solidFill>
+          <a:srgbClr val="0B0E14"/>
+        </a:solidFill>
+        <a:effectLst/>
+      </p:bgPr>
+    </p:bg>
+    <p:spTree>
+      <p:nvGrpSpPr>
+        <p:cNvPr id="1" name=""/>
+        <p:cNvGrpSpPr/>
+        <p:nvPr/>
+      </p:nvGrpSpPr>
+      <p:grpSpPr/>
+      <p:sp>
+        <p:nvSpPr>
+          <p:cNvPr id="2" name="TextBox 1"/>
+          <p:cNvSpPr txBox="1"/>
+          <p:nvPr/>
+        </p:nvSpPr>
+        <p:spPr>
+          <a:xfrm>
+            <a:off x="640080" y="502920"/>
+            <a:ext cx="10058400" cy="365760"/>
+          </a:xfrm>
+          <a:prstGeom prst="rect">
+            <a:avLst/>
+          </a:prstGeom>
+          <a:noFill/>
+        </p:spPr>
+        <p:txBody>
+          <a:bodyPr wrap="square" anchor="t">
+            <a:spAutoFit/>
+          </a:bodyPr>
+          <a:lstStyle/>
+          <a:p>
+            <a:pPr algn="l">
+              <a:lnSpc>
+                <a:spcPct val="100000"/>
+              </a:lnSpc>
+            </a:pPr>
+            <a:r>
+              <a:rPr sz="1300" b="1">
+                <a:solidFill>
+                  <a:srgbClr val="00FF41"/>
+                </a:solidFill>
+                <a:latin typeface="Courier New"/>
+              </a:rPr>
+              <a:t>SOURCES</a:t>
+            </a:r>
+          </a:p>
+        </p:txBody>
+      </p:sp>
+      <p:sp>
+        <p:nvSpPr>
+          <p:cNvPr id="3" name="Rectangle 2"/>
+          <p:cNvSpPr/>
+          <p:nvPr/>
+        </p:nvSpPr>
+        <p:spPr>
+          <a:xfrm>
+            <a:off x="640080" y="932688"/>
+            <a:ext cx="822960" cy="73152"/>
+          </a:xfrm>
+          <a:prstGeom prst="rect">
+            <a:avLst/>
+          </a:prstGeom>
+          <a:solidFill>
+            <a:srgbClr val="00FF41"/>
+          </a:solidFill>
+          <a:ln>
+            <a:noFill/>
+          </a:ln>
+          <a:effectLst/>
+        </p:spPr>
+        <p:style>
+          <a:lnRef idx="1">
+            <a:schemeClr val="accent1"/>
+          </a:lnRef>
+          <a:fillRef idx="3">
+            <a:schemeClr val="accent1"/>
+          </a:fillRef>
+          <a:effectRef idx="2">
+            <a:schemeClr val="accent1"/>
+          </a:effectRef>
+          <a:fontRef idx="minor">
+            <a:schemeClr val="lt1"/>
+          </a:fontRef>
+        </p:style>
+        <p:txBody>
+          <a:bodyPr rtlCol="0" anchor="ctr"/>
+          <a:lstStyle/>
+          <a:p>
+            <a:pPr algn="ctr"/>
+          </a:p>
+        </p:txBody>
+      </p:sp>
+      <p:sp>
+        <p:nvSpPr>
+          <p:cNvPr id="4" name="TextBox 3"/>
+          <p:cNvSpPr txBox="1"/>
+          <p:nvPr/>
+        </p:nvSpPr>
+        <p:spPr>
+          <a:xfrm>
+            <a:off x="640080" y="1188720"/>
+            <a:ext cx="10972800" cy="914400"/>
+          </a:xfrm>
+          <a:prstGeom prst="rect">
+            <a:avLst/>
+          </a:prstGeom>
+          <a:noFill/>
+        </p:spPr>
+        <p:txBody>
+          <a:bodyPr wrap="square" anchor="t">
+            <a:spAutoFit/>
+          </a:bodyPr>
+          <a:lstStyle/>
+          <a:p>
+            <a:pPr algn="l">
+              <a:lnSpc>
+                <a:spcPct val="100000"/>
+              </a:lnSpc>
+            </a:pPr>
+            <a:r>
+              <a:rPr sz="3200" b="1">
+                <a:solidFill>
+                  <a:srgbClr val="F5F7FA"/>
+                </a:solidFill>
+                <a:latin typeface="Arial"/>
+              </a:rPr>
+              <a:t>What we read</a:t>
+            </a:r>
+          </a:p>
+        </p:txBody>
+      </p:sp>
+      <p:sp>
+        <p:nvSpPr>
+          <p:cNvPr id="5" name="TextBox 4"/>
+          <p:cNvSpPr txBox="1"/>
+          <p:nvPr/>
+        </p:nvSpPr>
+        <p:spPr>
+          <a:xfrm>
+            <a:off x="658368" y="2377440"/>
+            <a:ext cx="10881360" cy="3108960"/>
+          </a:xfrm>
+          <a:prstGeom prst="rect">
+            <a:avLst/>
+          </a:prstGeom>
+          <a:noFill/>
+        </p:spPr>
+        <p:txBody>
+          <a:bodyPr wrap="square" anchor="t">
+            <a:spAutoFit/>
+          </a:bodyPr>
+          <a:lstStyle/>
+          <a:p>
+            <a:pPr algn="l">
+              <a:lnSpc>
+                <a:spcPct val="145000"/>
+              </a:lnSpc>
+            </a:pPr>
+            <a:r>
+              <a:rPr sz="1700" b="1">
+                <a:solidFill>
+                  <a:srgbClr val="00FF41"/>
+                </a:solidFill>
+                <a:latin typeface="Arial"/>
+              </a:rPr>
+              <a:t>•  </a:t>
+            </a:r>
+            <a:r>
+              <a:rPr sz="1700" b="0">
+                <a:solidFill>
+                  <a:srgbClr val="8A94A6"/>
+                </a:solidFill>
+                <a:latin typeface="Arial"/>
+              </a:rPr>
+              <a:t>Author, Year. Title. Where it appeared.  —  what it found</a:t>
+            </a:r>
+          </a:p>
+          <a:p>
+            <a:pPr algn="l">
+              <a:lnSpc>
+                <a:spcPct val="145000"/>
+              </a:lnSpc>
+            </a:pPr>
+            <a:r>
+              <a:rPr sz="1700" b="1">
+                <a:solidFill>
+                  <a:srgbClr val="00FF41"/>
+                </a:solidFill>
+                <a:latin typeface="Arial"/>
+              </a:rPr>
+              <a:t>•  </a:t>
+            </a:r>
+            <a:r>
+              <a:rPr sz="1700" b="0">
+                <a:solidFill>
+                  <a:srgbClr val="8A94A6"/>
+                </a:solidFill>
+                <a:latin typeface="Arial"/>
+              </a:rPr>
+              <a:t>Author, Year. Title. Where it appeared.  —  what it found</a:t>
+            </a:r>
+          </a:p>
+          <a:p>
+            <a:pPr algn="l">
+              <a:lnSpc>
+                <a:spcPct val="145000"/>
+              </a:lnSpc>
+            </a:pPr>
+            <a:r>
+              <a:rPr sz="1700" b="1">
+                <a:solidFill>
+                  <a:srgbClr val="00FF41"/>
+                </a:solidFill>
+                <a:latin typeface="Arial"/>
+              </a:rPr>
+              <a:t>•  </a:t>
+            </a:r>
+            <a:r>
+              <a:rPr sz="1700" b="0">
+                <a:solidFill>
+                  <a:srgbClr val="8A94A6"/>
+                </a:solidFill>
+                <a:latin typeface="Arial"/>
+              </a:rPr>
+              <a:t>Author, Year. Title. Where it appeared.  —  what it found</a:t>
+            </a:r>
+          </a:p>
+          <a:p>
+            <a:pPr algn="l">
+              <a:lnSpc>
+                <a:spcPct val="145000"/>
+              </a:lnSpc>
+            </a:pPr>
+            <a:r>
+              <a:rPr sz="1700" b="1">
+                <a:solidFill>
+                  <a:srgbClr val="00FF41"/>
+                </a:solidFill>
+                <a:latin typeface="Arial"/>
+              </a:rPr>
+              <a:t>•  </a:t>
+            </a:r>
+            <a:r>
+              <a:rPr sz="1700" b="0">
+                <a:solidFill>
+                  <a:srgbClr val="8A94A6"/>
+                </a:solidFill>
+                <a:latin typeface="Arial"/>
+              </a:rPr>
+              <a:t>Author, Year. Title. Where it appeared.  —  what it found</a:t>
+            </a:r>
+          </a:p>
+        </p:txBody>
+      </p:sp>
+      <p:sp>
+        <p:nvSpPr>
+          <p:cNvPr id="6" name="TextBox 5"/>
+          <p:cNvSpPr txBox="1"/>
+          <p:nvPr/>
+        </p:nvSpPr>
+        <p:spPr>
+          <a:xfrm>
+            <a:off x="658368" y="5715000"/>
+            <a:ext cx="10881360" cy="365760"/>
+          </a:xfrm>
+          <a:prstGeom prst="rect">
+            <a:avLst/>
+          </a:prstGeom>
+          <a:noFill/>
+        </p:spPr>
+        <p:txBody>
+          <a:bodyPr wrap="square" anchor="t">
+            <a:spAutoFit/>
+          </a:bodyPr>
+          <a:lstStyle/>
+          <a:p>
+            <a:pPr algn="l">
+              <a:lnSpc>
+                <a:spcPct val="100000"/>
+              </a:lnSpc>
+            </a:pPr>
+            <a:r>
+              <a:rPr sz="1300" b="0">
+                <a:solidFill>
+                  <a:srgbClr val="5A6474"/>
+                </a:solidFill>
+                <a:latin typeface="Courier New"/>
+              </a:rPr>
+              <a:t>Real papers only — never invent a citation.</a:t>
+            </a:r>
+          </a:p>
+        </p:txBody>
+      </p:sp>
+      <p:sp>
+        <p:nvSpPr>
+          <p:cNvPr id="7" name="TextBox 6"/>
+          <p:cNvSpPr txBox="1"/>
+          <p:nvPr/>
+        </p:nvSpPr>
+        <p:spPr>
+          <a:xfrm>
+            <a:off x="640080" y="6355080"/>
+            <a:ext cx="10972800" cy="365760"/>
+          </a:xfrm>
+          <a:prstGeom prst="rect">
+            <a:avLst/>
+          </a:prstGeom>
+          <a:noFill/>
+        </p:spPr>
+        <p:txBody>
+          <a:bodyPr wrap="square" anchor="t">
+            <a:spAutoFit/>
+          </a:bodyPr>
+          <a:lstStyle/>
+          <a:p>
+            <a:pPr algn="l">
+              <a:lnSpc>
+                <a:spcPct val="100000"/>
+              </a:lnSpc>
+            </a:pPr>
+            <a:r>
+              <a:rPr sz="1000" b="0">
+                <a:solidFill>
+                  <a:srgbClr val="5A6474"/>
+                </a:solidFill>
+                <a:latin typeface="Courier New"/>
+              </a:rPr>
+              <a:t>Value Verification · TECHIE 1121 · Cornell Tech · Tue Jul 28</a:t>
+            </a:r>
+          </a:p>
+        </p:txBody>
+      </p:sp>
+    </p:spTree>
+  </p:cSld>
+  <p:clrMapOvr>
+    <a:masterClrMapping/>
+  </p:clrMapOvr>
+</p:sld>
+</file>
+
 <file path=ppt/slides/slide2.xml><?xml version="1.0" encoding="utf-8"?>
 <p:sld xmlns:a="http://schemas.openxmlformats.org/drawingml/2006/main" xmlns:p="http://schemas.openxmlformats.org/presentationml/2006/main" xmlns:r="http://schemas.openxmlformats.org/officeDocument/2006/relationships">
   <p:cSld>
@@ -4337,7 +5223,7 @@
                 </a:solidFill>
                 <a:latin typeface="Arial"/>
               </a:rPr>
-              <a:t>Add your own slides AFTER each header. Don't delete the headers.</a:t>
+              <a:t>Sections 01, 02, 04, 05 are the TEAM's. Section 03 has one named slide per person — that one is graded individually.</a:t>
             </a:r>
           </a:p>
           <a:p>
@@ -4362,7 +5248,7 @@
                 </a:solidFill>
                 <a:latin typeface="Arial"/>
               </a:rPr>
-              <a:t>Evidence beats assertion: screenshots, numbers, quotes from what you actually observed.</a:t>
+              <a:t>Add your own slides AFTER each header. Don't delete the headers.</a:t>
             </a:r>
           </a:p>
           <a:p>
@@ -4387,7 +5273,57 @@
                 </a:solidFill>
                 <a:latin typeface="Arial"/>
               </a:rPr>
+              <a:t>Evidence beats assertion: screenshots, numbers, quotes from what you actually observed.</a:t>
+            </a:r>
+          </a:p>
+          <a:p>
+            <a:pPr algn="l">
+              <a:lnSpc>
+                <a:spcPct val="130000"/>
+              </a:lnSpc>
+            </a:pPr>
+            <a:r>
+              <a:rPr sz="1900" b="1">
+                <a:solidFill>
+                  <a:srgbClr val="00FF41"/>
+                </a:solidFill>
+                <a:latin typeface="Arial"/>
+              </a:rPr>
+              <a:t>•  </a:t>
+            </a:r>
+            <a:r>
+              <a:rPr sz="1900" b="0">
+                <a:solidFill>
+                  <a:srgbClr val="F5F7FA"/>
+                </a:solidFill>
+                <a:latin typeface="Arial"/>
+              </a:rPr>
               <a:t>Real citations only — if you can't find the paper, leave the claim out.</a:t>
+            </a:r>
+          </a:p>
+          <a:p>
+            <a:pPr algn="l">
+              <a:lnSpc>
+                <a:spcPct val="130000"/>
+              </a:lnSpc>
+            </a:pPr>
+            <a:r>
+              <a:rPr sz="1900" b="1">
+                <a:solidFill>
+                  <a:srgbClr val="00FF41"/>
+                </a:solidFill>
+                <a:latin typeface="Arial"/>
+              </a:rPr>
+              <a:t>•  </a:t>
+            </a:r>
+            <a:r>
+              <a:rPr sz="1900" b="0">
+                <a:solidFill>
+                  <a:srgbClr val="F5F7FA"/>
+                </a:solidFill>
+                <a:latin typeface="Arial"/>
+              </a:rPr>
+              <a:t>Your reflection is NOT a document — it goes in your own lane on the team FigJam canvas.</a:t>
             </a:r>
           </a:p>
           <a:p>
@@ -5334,7 +6270,7 @@
                 </a:solidFill>
                 <a:latin typeface="Arial"/>
               </a:rPr>
-              <a:t>What WORKS in the current prototype — with evidence.</a:t>
+              <a:t>Each team member presents their OWN slide — the named slides that follow.</a:t>
             </a:r>
           </a:p>
           <a:p>
@@ -5359,7 +6295,7 @@
                 </a:solidFill>
                 <a:latin typeface="Arial"/>
               </a:rPr>
-              <a:t>What does NOT work — with evidence. An evidenced 'it doesn't' beats a hopeful 'it does'.</a:t>
+              <a:t>What WORKS and what does NOT — with evidence. An evidenced 'it doesn't' beats a hopeful 'it does'.</a:t>
             </a:r>
           </a:p>
           <a:p>
@@ -5456,14 +6392,53 @@
       <p:grpSpPr/>
       <p:sp>
         <p:nvSpPr>
-          <p:cNvPr id="2" name="Rectangle 1"/>
+          <p:cNvPr id="2" name="TextBox 1"/>
+          <p:cNvSpPr txBox="1"/>
+          <p:nvPr/>
+        </p:nvSpPr>
+        <p:spPr>
+          <a:xfrm>
+            <a:off x="640080" y="502920"/>
+            <a:ext cx="10058400" cy="365760"/>
+          </a:xfrm>
+          <a:prstGeom prst="rect">
+            <a:avLst/>
+          </a:prstGeom>
+          <a:noFill/>
+        </p:spPr>
+        <p:txBody>
+          <a:bodyPr wrap="square" anchor="t">
+            <a:spAutoFit/>
+          </a:bodyPr>
+          <a:lstStyle/>
+          <a:p>
+            <a:pPr algn="l">
+              <a:lnSpc>
+                <a:spcPct val="100000"/>
+              </a:lnSpc>
+            </a:pPr>
+            <a:r>
+              <a:rPr sz="1300" b="1">
+                <a:solidFill>
+                  <a:srgbClr val="00FF41"/>
+                </a:solidFill>
+                <a:latin typeface="Courier New"/>
+              </a:rPr>
+              <a:t>03.1  ·  YOUR SECTION (graded individually)</a:t>
+            </a:r>
+          </a:p>
+        </p:txBody>
+      </p:sp>
+      <p:sp>
+        <p:nvSpPr>
+          <p:cNvPr id="3" name="Rectangle 2"/>
           <p:cNvSpPr/>
           <p:nvPr/>
         </p:nvSpPr>
         <p:spPr>
           <a:xfrm>
-            <a:off x="0" y="0"/>
-            <a:ext cx="256032" cy="6858000"/>
+            <a:off x="640080" y="932688"/>
+            <a:ext cx="822960" cy="73152"/>
           </a:xfrm>
           <a:prstGeom prst="rect">
             <a:avLst/>
@@ -5500,14 +6475,14 @@
       </p:sp>
       <p:sp>
         <p:nvSpPr>
-          <p:cNvPr id="3" name="TextBox 2"/>
+          <p:cNvPr id="4" name="TextBox 3"/>
           <p:cNvSpPr txBox="1"/>
           <p:nvPr/>
         </p:nvSpPr>
         <p:spPr>
           <a:xfrm>
-            <a:off x="822960" y="1417320"/>
-            <a:ext cx="2743200" cy="1097280"/>
+            <a:off x="640080" y="1170432"/>
+            <a:ext cx="10972800" cy="914400"/>
           </a:xfrm>
           <a:prstGeom prst="rect">
             <a:avLst/>
@@ -5526,27 +6501,27 @@
               </a:lnSpc>
             </a:pPr>
             <a:r>
-              <a:rPr sz="6400" b="1">
-                <a:solidFill>
-                  <a:srgbClr val="00FF41"/>
-                </a:solidFill>
-                <a:latin typeface="Courier New"/>
-              </a:rPr>
-              <a:t>04</a:t>
-            </a:r>
-          </a:p>
-        </p:txBody>
-      </p:sp>
-      <p:sp>
-        <p:nvSpPr>
-          <p:cNvPr id="4" name="TextBox 3"/>
+              <a:rPr sz="3600" b="1">
+                <a:solidFill>
+                  <a:srgbClr val="F5F7FA"/>
+                </a:solidFill>
+                <a:latin typeface="Arial"/>
+              </a:rPr>
+              <a:t>Emily Tai</a:t>
+            </a:r>
+          </a:p>
+        </p:txBody>
+      </p:sp>
+      <p:sp>
+        <p:nvSpPr>
+          <p:cNvPr id="5" name="TextBox 4"/>
           <p:cNvSpPr txBox="1"/>
           <p:nvPr/>
         </p:nvSpPr>
         <p:spPr>
           <a:xfrm>
-            <a:off x="841248" y="2487168"/>
-            <a:ext cx="10424160" cy="457200"/>
+            <a:off x="658368" y="2286000"/>
+            <a:ext cx="10881360" cy="2834640"/>
           </a:xfrm>
           <a:prstGeom prst="rect">
             <a:avLst/>
@@ -5555,6 +6530,175 @@
         </p:spPr>
         <p:txBody>
           <a:bodyPr wrap="square" anchor="t">
+            <a:spAutoFit/>
+          </a:bodyPr>
+          <a:lstStyle/>
+          <a:p>
+            <a:pPr algn="l">
+              <a:lnSpc>
+                <a:spcPct val="134000"/>
+              </a:lnSpc>
+            </a:pPr>
+            <a:r>
+              <a:rPr sz="1900" b="1">
+                <a:solidFill>
+                  <a:srgbClr val="00FF41"/>
+                </a:solidFill>
+                <a:latin typeface="Arial"/>
+              </a:rPr>
+              <a:t>→  </a:t>
+            </a:r>
+            <a:r>
+              <a:rPr sz="1900" b="0">
+                <a:solidFill>
+                  <a:srgbClr val="F5F7FA"/>
+                </a:solidFill>
+                <a:latin typeface="Arial"/>
+              </a:rPr>
+              <a:t>The lens + method I ran, and why our reading demanded it</a:t>
+            </a:r>
+          </a:p>
+          <a:p>
+            <a:pPr algn="l">
+              <a:lnSpc>
+                <a:spcPct val="134000"/>
+              </a:lnSpc>
+            </a:pPr>
+            <a:r>
+              <a:rPr sz="1900" b="1">
+                <a:solidFill>
+                  <a:srgbClr val="00FF41"/>
+                </a:solidFill>
+                <a:latin typeface="Arial"/>
+              </a:rPr>
+              <a:t>→  </a:t>
+            </a:r>
+            <a:r>
+              <a:rPr sz="1900" b="0">
+                <a:solidFill>
+                  <a:srgbClr val="F5F7FA"/>
+                </a:solidFill>
+                <a:latin typeface="Arial"/>
+              </a:rPr>
+              <a:t>My evidence - what I actually observed or measured</a:t>
+            </a:r>
+          </a:p>
+          <a:p>
+            <a:pPr algn="l">
+              <a:lnSpc>
+                <a:spcPct val="134000"/>
+              </a:lnSpc>
+            </a:pPr>
+            <a:r>
+              <a:rPr sz="1900" b="1">
+                <a:solidFill>
+                  <a:srgbClr val="00FF41"/>
+                </a:solidFill>
+                <a:latin typeface="Arial"/>
+              </a:rPr>
+              <a:t>→  </a:t>
+            </a:r>
+            <a:r>
+              <a:rPr sz="1900" b="0">
+                <a:solidFill>
+                  <a:srgbClr val="F5F7FA"/>
+                </a:solidFill>
+                <a:latin typeface="Arial"/>
+              </a:rPr>
+              <a:t>What this says WORKS - and what does NOT</a:t>
+            </a:r>
+          </a:p>
+          <a:p>
+            <a:pPr algn="l">
+              <a:lnSpc>
+                <a:spcPct val="134000"/>
+              </a:lnSpc>
+            </a:pPr>
+            <a:r>
+              <a:rPr sz="1900" b="1">
+                <a:solidFill>
+                  <a:srgbClr val="00FF41"/>
+                </a:solidFill>
+                <a:latin typeface="Arial"/>
+              </a:rPr>
+              <a:t>→  </a:t>
+            </a:r>
+            <a:r>
+              <a:rPr sz="1900" b="0">
+                <a:solidFill>
+                  <a:srgbClr val="F5F7FA"/>
+                </a:solidFill>
+                <a:latin typeface="Arial"/>
+              </a:rPr>
+              <a:t>The paper I found (real citation) and what it changes</a:t>
+            </a:r>
+          </a:p>
+        </p:txBody>
+      </p:sp>
+      <p:sp>
+        <p:nvSpPr>
+          <p:cNvPr id="6" name="Rounded Rectangle 5"/>
+          <p:cNvSpPr/>
+          <p:nvPr/>
+        </p:nvSpPr>
+        <p:spPr>
+          <a:xfrm>
+            <a:off x="640080" y="5440680"/>
+            <a:ext cx="10881360" cy="658368"/>
+          </a:xfrm>
+          <a:prstGeom prst="roundRect">
+            <a:avLst/>
+          </a:prstGeom>
+          <a:solidFill>
+            <a:srgbClr val="151B26"/>
+          </a:solidFill>
+          <a:ln w="19050">
+            <a:solidFill>
+              <a:srgbClr val="00FF41"/>
+            </a:solidFill>
+          </a:ln>
+          <a:effectLst/>
+        </p:spPr>
+        <p:style>
+          <a:lnRef idx="1">
+            <a:schemeClr val="accent1"/>
+          </a:lnRef>
+          <a:fillRef idx="3">
+            <a:schemeClr val="accent1"/>
+          </a:fillRef>
+          <a:effectRef idx="2">
+            <a:schemeClr val="accent1"/>
+          </a:effectRef>
+          <a:fontRef idx="minor">
+            <a:schemeClr val="lt1"/>
+          </a:fontRef>
+        </p:style>
+        <p:txBody>
+          <a:bodyPr rtlCol="0" anchor="ctr"/>
+          <a:lstStyle/>
+          <a:p>
+            <a:pPr algn="ctr"/>
+          </a:p>
+        </p:txBody>
+      </p:sp>
+      <p:sp>
+        <p:nvSpPr>
+          <p:cNvPr id="7" name="TextBox 6"/>
+          <p:cNvSpPr txBox="1"/>
+          <p:nvPr/>
+        </p:nvSpPr>
+        <p:spPr>
+          <a:xfrm>
+            <a:off x="914400" y="5440680"/>
+            <a:ext cx="10332720" cy="658368"/>
+          </a:xfrm>
+          <a:prstGeom prst="rect">
+            <a:avLst/>
+          </a:prstGeom>
+          <a:noFill/>
+        </p:spPr>
+        <p:txBody>
+          <a:bodyPr wrap="square" anchor="ctr">
             <a:spAutoFit/>
           </a:bodyPr>
           <a:lstStyle/>
@@ -5565,157 +6709,29 @@
               </a:lnSpc>
             </a:pPr>
             <a:r>
+              <a:rPr sz="1600" b="1">
+                <a:solidFill>
+                  <a:srgbClr val="00FF41"/>
+                </a:solidFill>
+                <a:latin typeface="Arial"/>
+              </a:rPr>
+              <a:t>▸  </a:t>
+            </a:r>
+            <a:r>
               <a:rPr sz="1500" b="1">
                 <a:solidFill>
-                  <a:srgbClr val="00FF41"/>
-                </a:solidFill>
-                <a:latin typeface="Courier New"/>
-              </a:rPr>
-              <a:t>PART 3 — OUTLOOK</a:t>
-            </a:r>
-          </a:p>
-        </p:txBody>
-      </p:sp>
-      <p:sp>
-        <p:nvSpPr>
-          <p:cNvPr id="5" name="TextBox 4"/>
-          <p:cNvSpPr txBox="1"/>
-          <p:nvPr/>
-        </p:nvSpPr>
-        <p:spPr>
-          <a:xfrm>
-            <a:off x="804672" y="2971800"/>
-            <a:ext cx="10607040" cy="1097280"/>
-          </a:xfrm>
-          <a:prstGeom prst="rect">
-            <a:avLst/>
-          </a:prstGeom>
-          <a:noFill/>
-        </p:spPr>
-        <p:txBody>
-          <a:bodyPr wrap="square" anchor="t">
-            <a:spAutoFit/>
-          </a:bodyPr>
-          <a:lstStyle/>
-          <a:p>
-            <a:pPr algn="l">
-              <a:lnSpc>
-                <a:spcPct val="103000"/>
-              </a:lnSpc>
-            </a:pPr>
-            <a:r>
-              <a:rPr sz="3800" b="1">
-                <a:solidFill>
                   <a:srgbClr val="F5F7FA"/>
                 </a:solidFill>
                 <a:latin typeface="Arial"/>
               </a:rPr>
-              <a:t>What related research has already found</a:t>
-            </a:r>
-          </a:p>
-        </p:txBody>
-      </p:sp>
-      <p:sp>
-        <p:nvSpPr>
-          <p:cNvPr id="6" name="TextBox 5"/>
-          <p:cNvSpPr txBox="1"/>
-          <p:nvPr/>
-        </p:nvSpPr>
-        <p:spPr>
-          <a:xfrm>
-            <a:off x="841248" y="4224528"/>
-            <a:ext cx="10424160" cy="1737360"/>
-          </a:xfrm>
-          <a:prstGeom prst="rect">
-            <a:avLst/>
-          </a:prstGeom>
-          <a:noFill/>
-        </p:spPr>
-        <p:txBody>
-          <a:bodyPr wrap="square" anchor="t">
-            <a:spAutoFit/>
-          </a:bodyPr>
-          <a:lstStyle/>
-          <a:p>
-            <a:pPr algn="l">
-              <a:lnSpc>
-                <a:spcPct val="128000"/>
-              </a:lnSpc>
-            </a:pPr>
-            <a:r>
-              <a:rPr sz="1700" b="1">
-                <a:solidFill>
-                  <a:srgbClr val="00FF41"/>
-                </a:solidFill>
-                <a:latin typeface="Arial"/>
-              </a:rPr>
-              <a:t>→  </a:t>
-            </a:r>
-            <a:r>
-              <a:rPr sz="1700" b="0">
-                <a:solidFill>
-                  <a:srgbClr val="8A94A6"/>
-                </a:solidFill>
-                <a:latin typeface="Arial"/>
-              </a:rPr>
-              <a:t>What have others tried in order to move this value?</a:t>
-            </a:r>
-          </a:p>
-          <a:p>
-            <a:pPr algn="l">
-              <a:lnSpc>
-                <a:spcPct val="128000"/>
-              </a:lnSpc>
-            </a:pPr>
-            <a:r>
-              <a:rPr sz="1700" b="1">
-                <a:solidFill>
-                  <a:srgbClr val="00FF41"/>
-                </a:solidFill>
-                <a:latin typeface="Arial"/>
-              </a:rPr>
-              <a:t>→  </a:t>
-            </a:r>
-            <a:r>
-              <a:rPr sz="1700" b="0">
-                <a:solidFill>
-                  <a:srgbClr val="8A94A6"/>
-                </a:solidFill>
-                <a:latin typeface="Arial"/>
-              </a:rPr>
-              <a:t>What worked — and what failed?</a:t>
-            </a:r>
-          </a:p>
-          <a:p>
-            <a:pPr algn="l">
-              <a:lnSpc>
-                <a:spcPct val="128000"/>
-              </a:lnSpc>
-            </a:pPr>
-            <a:r>
-              <a:rPr sz="1700" b="1">
-                <a:solidFill>
-                  <a:srgbClr val="00FF41"/>
-                </a:solidFill>
-                <a:latin typeface="Arial"/>
-              </a:rPr>
-              <a:t>→  </a:t>
-            </a:r>
-            <a:r>
-              <a:rPr sz="1700" b="0">
-                <a:solidFill>
-                  <a:srgbClr val="8A94A6"/>
-                </a:solidFill>
-                <a:latin typeface="Arial"/>
-              </a:rPr>
-              <a:t>2–3 REAL sources. Never invent a citation.</a:t>
-            </a:r>
-          </a:p>
-        </p:txBody>
-      </p:sp>
-      <p:sp>
-        <p:nvSpPr>
-          <p:cNvPr id="7" name="TextBox 6"/>
+              <a:t>This slide is yours. Add more slides behind it if you need them - keep your name on them.</a:t>
+            </a:r>
+          </a:p>
+        </p:txBody>
+      </p:sp>
+      <p:sp>
+        <p:nvSpPr>
+          <p:cNvPr id="8" name="TextBox 7"/>
           <p:cNvSpPr txBox="1"/>
           <p:nvPr/>
         </p:nvSpPr>
@@ -5780,14 +6796,53 @@
       <p:grpSpPr/>
       <p:sp>
         <p:nvSpPr>
-          <p:cNvPr id="2" name="Rectangle 1"/>
+          <p:cNvPr id="2" name="TextBox 1"/>
+          <p:cNvSpPr txBox="1"/>
+          <p:nvPr/>
+        </p:nvSpPr>
+        <p:spPr>
+          <a:xfrm>
+            <a:off x="640080" y="502920"/>
+            <a:ext cx="10058400" cy="365760"/>
+          </a:xfrm>
+          <a:prstGeom prst="rect">
+            <a:avLst/>
+          </a:prstGeom>
+          <a:noFill/>
+        </p:spPr>
+        <p:txBody>
+          <a:bodyPr wrap="square" anchor="t">
+            <a:spAutoFit/>
+          </a:bodyPr>
+          <a:lstStyle/>
+          <a:p>
+            <a:pPr algn="l">
+              <a:lnSpc>
+                <a:spcPct val="100000"/>
+              </a:lnSpc>
+            </a:pPr>
+            <a:r>
+              <a:rPr sz="1300" b="1">
+                <a:solidFill>
+                  <a:srgbClr val="00FF41"/>
+                </a:solidFill>
+                <a:latin typeface="Courier New"/>
+              </a:rPr>
+              <a:t>03.2  ·  YOUR SECTION (graded individually)</a:t>
+            </a:r>
+          </a:p>
+        </p:txBody>
+      </p:sp>
+      <p:sp>
+        <p:nvSpPr>
+          <p:cNvPr id="3" name="Rectangle 2"/>
           <p:cNvSpPr/>
           <p:nvPr/>
         </p:nvSpPr>
         <p:spPr>
           <a:xfrm>
-            <a:off x="0" y="0"/>
-            <a:ext cx="256032" cy="6858000"/>
+            <a:off x="640080" y="932688"/>
+            <a:ext cx="822960" cy="73152"/>
           </a:xfrm>
           <a:prstGeom prst="rect">
             <a:avLst/>
@@ -5824,14 +6879,14 @@
       </p:sp>
       <p:sp>
         <p:nvSpPr>
-          <p:cNvPr id="3" name="TextBox 2"/>
+          <p:cNvPr id="4" name="TextBox 3"/>
           <p:cNvSpPr txBox="1"/>
           <p:nvPr/>
         </p:nvSpPr>
         <p:spPr>
           <a:xfrm>
-            <a:off x="822960" y="1417320"/>
-            <a:ext cx="2743200" cy="1097280"/>
+            <a:off x="640080" y="1170432"/>
+            <a:ext cx="10972800" cy="914400"/>
           </a:xfrm>
           <a:prstGeom prst="rect">
             <a:avLst/>
@@ -5850,27 +6905,27 @@
               </a:lnSpc>
             </a:pPr>
             <a:r>
-              <a:rPr sz="6400" b="1">
-                <a:solidFill>
-                  <a:srgbClr val="00FF41"/>
-                </a:solidFill>
-                <a:latin typeface="Courier New"/>
-              </a:rPr>
-              <a:t>05</a:t>
-            </a:r>
-          </a:p>
-        </p:txBody>
-      </p:sp>
-      <p:sp>
-        <p:nvSpPr>
-          <p:cNvPr id="4" name="TextBox 3"/>
+              <a:rPr sz="3600" b="1">
+                <a:solidFill>
+                  <a:srgbClr val="F5F7FA"/>
+                </a:solidFill>
+                <a:latin typeface="Arial"/>
+              </a:rPr>
+              <a:t>Kylie Cheung</a:t>
+            </a:r>
+          </a:p>
+        </p:txBody>
+      </p:sp>
+      <p:sp>
+        <p:nvSpPr>
+          <p:cNvPr id="5" name="TextBox 4"/>
           <p:cNvSpPr txBox="1"/>
           <p:nvPr/>
         </p:nvSpPr>
         <p:spPr>
           <a:xfrm>
-            <a:off x="841248" y="2487168"/>
-            <a:ext cx="10424160" cy="457200"/>
+            <a:off x="658368" y="2286000"/>
+            <a:ext cx="10881360" cy="2834640"/>
           </a:xfrm>
           <a:prstGeom prst="rect">
             <a:avLst/>
@@ -5879,6 +6934,175 @@
         </p:spPr>
         <p:txBody>
           <a:bodyPr wrap="square" anchor="t">
+            <a:spAutoFit/>
+          </a:bodyPr>
+          <a:lstStyle/>
+          <a:p>
+            <a:pPr algn="l">
+              <a:lnSpc>
+                <a:spcPct val="134000"/>
+              </a:lnSpc>
+            </a:pPr>
+            <a:r>
+              <a:rPr sz="1900" b="1">
+                <a:solidFill>
+                  <a:srgbClr val="00FF41"/>
+                </a:solidFill>
+                <a:latin typeface="Arial"/>
+              </a:rPr>
+              <a:t>→  </a:t>
+            </a:r>
+            <a:r>
+              <a:rPr sz="1900" b="0">
+                <a:solidFill>
+                  <a:srgbClr val="F5F7FA"/>
+                </a:solidFill>
+                <a:latin typeface="Arial"/>
+              </a:rPr>
+              <a:t>The lens + method I ran, and why our reading demanded it</a:t>
+            </a:r>
+          </a:p>
+          <a:p>
+            <a:pPr algn="l">
+              <a:lnSpc>
+                <a:spcPct val="134000"/>
+              </a:lnSpc>
+            </a:pPr>
+            <a:r>
+              <a:rPr sz="1900" b="1">
+                <a:solidFill>
+                  <a:srgbClr val="00FF41"/>
+                </a:solidFill>
+                <a:latin typeface="Arial"/>
+              </a:rPr>
+              <a:t>→  </a:t>
+            </a:r>
+            <a:r>
+              <a:rPr sz="1900" b="0">
+                <a:solidFill>
+                  <a:srgbClr val="F5F7FA"/>
+                </a:solidFill>
+                <a:latin typeface="Arial"/>
+              </a:rPr>
+              <a:t>My evidence - what I actually observed or measured</a:t>
+            </a:r>
+          </a:p>
+          <a:p>
+            <a:pPr algn="l">
+              <a:lnSpc>
+                <a:spcPct val="134000"/>
+              </a:lnSpc>
+            </a:pPr>
+            <a:r>
+              <a:rPr sz="1900" b="1">
+                <a:solidFill>
+                  <a:srgbClr val="00FF41"/>
+                </a:solidFill>
+                <a:latin typeface="Arial"/>
+              </a:rPr>
+              <a:t>→  </a:t>
+            </a:r>
+            <a:r>
+              <a:rPr sz="1900" b="0">
+                <a:solidFill>
+                  <a:srgbClr val="F5F7FA"/>
+                </a:solidFill>
+                <a:latin typeface="Arial"/>
+              </a:rPr>
+              <a:t>What this says WORKS - and what does NOT</a:t>
+            </a:r>
+          </a:p>
+          <a:p>
+            <a:pPr algn="l">
+              <a:lnSpc>
+                <a:spcPct val="134000"/>
+              </a:lnSpc>
+            </a:pPr>
+            <a:r>
+              <a:rPr sz="1900" b="1">
+                <a:solidFill>
+                  <a:srgbClr val="00FF41"/>
+                </a:solidFill>
+                <a:latin typeface="Arial"/>
+              </a:rPr>
+              <a:t>→  </a:t>
+            </a:r>
+            <a:r>
+              <a:rPr sz="1900" b="0">
+                <a:solidFill>
+                  <a:srgbClr val="F5F7FA"/>
+                </a:solidFill>
+                <a:latin typeface="Arial"/>
+              </a:rPr>
+              <a:t>The paper I found (real citation) and what it changes</a:t>
+            </a:r>
+          </a:p>
+        </p:txBody>
+      </p:sp>
+      <p:sp>
+        <p:nvSpPr>
+          <p:cNvPr id="6" name="Rounded Rectangle 5"/>
+          <p:cNvSpPr/>
+          <p:nvPr/>
+        </p:nvSpPr>
+        <p:spPr>
+          <a:xfrm>
+            <a:off x="640080" y="5440680"/>
+            <a:ext cx="10881360" cy="658368"/>
+          </a:xfrm>
+          <a:prstGeom prst="roundRect">
+            <a:avLst/>
+          </a:prstGeom>
+          <a:solidFill>
+            <a:srgbClr val="151B26"/>
+          </a:solidFill>
+          <a:ln w="19050">
+            <a:solidFill>
+              <a:srgbClr val="00FF41"/>
+            </a:solidFill>
+          </a:ln>
+          <a:effectLst/>
+        </p:spPr>
+        <p:style>
+          <a:lnRef idx="1">
+            <a:schemeClr val="accent1"/>
+          </a:lnRef>
+          <a:fillRef idx="3">
+            <a:schemeClr val="accent1"/>
+          </a:fillRef>
+          <a:effectRef idx="2">
+            <a:schemeClr val="accent1"/>
+          </a:effectRef>
+          <a:fontRef idx="minor">
+            <a:schemeClr val="lt1"/>
+          </a:fontRef>
+        </p:style>
+        <p:txBody>
+          <a:bodyPr rtlCol="0" anchor="ctr"/>
+          <a:lstStyle/>
+          <a:p>
+            <a:pPr algn="ctr"/>
+          </a:p>
+        </p:txBody>
+      </p:sp>
+      <p:sp>
+        <p:nvSpPr>
+          <p:cNvPr id="7" name="TextBox 6"/>
+          <p:cNvSpPr txBox="1"/>
+          <p:nvPr/>
+        </p:nvSpPr>
+        <p:spPr>
+          <a:xfrm>
+            <a:off x="914400" y="5440680"/>
+            <a:ext cx="10332720" cy="658368"/>
+          </a:xfrm>
+          <a:prstGeom prst="rect">
+            <a:avLst/>
+          </a:prstGeom>
+          <a:noFill/>
+        </p:spPr>
+        <p:txBody>
+          <a:bodyPr wrap="square" anchor="ctr">
             <a:spAutoFit/>
           </a:bodyPr>
           <a:lstStyle/>
@@ -5889,157 +7113,29 @@
               </a:lnSpc>
             </a:pPr>
             <a:r>
+              <a:rPr sz="1600" b="1">
+                <a:solidFill>
+                  <a:srgbClr val="00FF41"/>
+                </a:solidFill>
+                <a:latin typeface="Arial"/>
+              </a:rPr>
+              <a:t>▸  </a:t>
+            </a:r>
+            <a:r>
               <a:rPr sz="1500" b="1">
                 <a:solidFill>
-                  <a:srgbClr val="00FF41"/>
-                </a:solidFill>
-                <a:latin typeface="Courier New"/>
-              </a:rPr>
-              <a:t>SO WHAT</a:t>
-            </a:r>
-          </a:p>
-        </p:txBody>
-      </p:sp>
-      <p:sp>
-        <p:nvSpPr>
-          <p:cNvPr id="5" name="TextBox 4"/>
-          <p:cNvSpPr txBox="1"/>
-          <p:nvPr/>
-        </p:nvSpPr>
-        <p:spPr>
-          <a:xfrm>
-            <a:off x="804672" y="2971800"/>
-            <a:ext cx="10607040" cy="1097280"/>
-          </a:xfrm>
-          <a:prstGeom prst="rect">
-            <a:avLst/>
-          </a:prstGeom>
-          <a:noFill/>
-        </p:spPr>
-        <p:txBody>
-          <a:bodyPr wrap="square" anchor="t">
-            <a:spAutoFit/>
-          </a:bodyPr>
-          <a:lstStyle/>
-          <a:p>
-            <a:pPr algn="l">
-              <a:lnSpc>
-                <a:spcPct val="103000"/>
-              </a:lnSpc>
-            </a:pPr>
-            <a:r>
-              <a:rPr sz="3800" b="1">
-                <a:solidFill>
                   <a:srgbClr val="F5F7FA"/>
                 </a:solidFill>
                 <a:latin typeface="Arial"/>
               </a:rPr>
-              <a:t>Our next design brief</a:t>
-            </a:r>
-          </a:p>
-        </p:txBody>
-      </p:sp>
-      <p:sp>
-        <p:nvSpPr>
-          <p:cNvPr id="6" name="TextBox 5"/>
-          <p:cNvSpPr txBox="1"/>
-          <p:nvPr/>
-        </p:nvSpPr>
-        <p:spPr>
-          <a:xfrm>
-            <a:off x="841248" y="4224528"/>
-            <a:ext cx="10424160" cy="1737360"/>
-          </a:xfrm>
-          <a:prstGeom prst="rect">
-            <a:avLst/>
-          </a:prstGeom>
-          <a:noFill/>
-        </p:spPr>
-        <p:txBody>
-          <a:bodyPr wrap="square" anchor="t">
-            <a:spAutoFit/>
-          </a:bodyPr>
-          <a:lstStyle/>
-          <a:p>
-            <a:pPr algn="l">
-              <a:lnSpc>
-                <a:spcPct val="128000"/>
-              </a:lnSpc>
-            </a:pPr>
-            <a:r>
-              <a:rPr sz="1700" b="1">
-                <a:solidFill>
-                  <a:srgbClr val="00FF41"/>
-                </a:solidFill>
-                <a:latin typeface="Arial"/>
-              </a:rPr>
-              <a:t>→  </a:t>
-            </a:r>
-            <a:r>
-              <a:rPr sz="1700" b="0">
-                <a:solidFill>
-                  <a:srgbClr val="8A94A6"/>
-                </a:solidFill>
-                <a:latin typeface="Arial"/>
-              </a:rPr>
-              <a:t>Verification is a beginning, not a verdict.</a:t>
-            </a:r>
-          </a:p>
-          <a:p>
-            <a:pPr algn="l">
-              <a:lnSpc>
-                <a:spcPct val="128000"/>
-              </a:lnSpc>
-            </a:pPr>
-            <a:r>
-              <a:rPr sz="1700" b="1">
-                <a:solidFill>
-                  <a:srgbClr val="00FF41"/>
-                </a:solidFill>
-                <a:latin typeface="Arial"/>
-              </a:rPr>
-              <a:t>→  </a:t>
-            </a:r>
-            <a:r>
-              <a:rPr sz="1700" b="0">
-                <a:solidFill>
-                  <a:srgbClr val="8A94A6"/>
-                </a:solidFill>
-                <a:latin typeface="Arial"/>
-              </a:rPr>
-              <a:t>What OTHER design could actually achieve this value?</a:t>
-            </a:r>
-          </a:p>
-          <a:p>
-            <a:pPr algn="l">
-              <a:lnSpc>
-                <a:spcPct val="128000"/>
-              </a:lnSpc>
-            </a:pPr>
-            <a:r>
-              <a:rPr sz="1700" b="1">
-                <a:solidFill>
-                  <a:srgbClr val="00FF41"/>
-                </a:solidFill>
-                <a:latin typeface="Arial"/>
-              </a:rPr>
-              <a:t>→  </a:t>
-            </a:r>
-            <a:r>
-              <a:rPr sz="1700" b="0">
-                <a:solidFill>
-                  <a:srgbClr val="8A94A6"/>
-                </a:solidFill>
-                <a:latin typeface="Arial"/>
-              </a:rPr>
-              <a:t>What should the next cycle discover? (You carry this into Wednesday.)</a:t>
-            </a:r>
-          </a:p>
-        </p:txBody>
-      </p:sp>
-      <p:sp>
-        <p:nvSpPr>
-          <p:cNvPr id="7" name="TextBox 6"/>
+              <a:t>This slide is yours. Add more slides behind it if you need them - keep your name on them.</a:t>
+            </a:r>
+          </a:p>
+        </p:txBody>
+      </p:sp>
+      <p:sp>
+        <p:nvSpPr>
+          <p:cNvPr id="8" name="TextBox 7"/>
           <p:cNvSpPr txBox="1"/>
           <p:nvPr/>
         </p:nvSpPr>
@@ -6136,7 +7232,7 @@
                 </a:solidFill>
                 <a:latin typeface="Courier New"/>
               </a:rPr>
-              <a:t>SOURCES</a:t>
+              <a:t>03.3  ·  YOUR SECTION (graded individually)</a:t>
             </a:r>
           </a:p>
         </p:txBody>
@@ -6193,7 +7289,7 @@
         </p:nvSpPr>
         <p:spPr>
           <a:xfrm>
-            <a:off x="640080" y="1188720"/>
+            <a:off x="640080" y="1170432"/>
             <a:ext cx="10972800" cy="914400"/>
           </a:xfrm>
           <a:prstGeom prst="rect">
@@ -6213,13 +7309,13 @@
               </a:lnSpc>
             </a:pPr>
             <a:r>
-              <a:rPr sz="3200" b="1">
+              <a:rPr sz="3600" b="1">
                 <a:solidFill>
                   <a:srgbClr val="F5F7FA"/>
                 </a:solidFill>
                 <a:latin typeface="Arial"/>
               </a:rPr>
-              <a:t>What we read</a:t>
+              <a:t>Aria Sharma</a:t>
             </a:r>
           </a:p>
         </p:txBody>
@@ -6232,8 +7328,8 @@
         </p:nvSpPr>
         <p:spPr>
           <a:xfrm>
-            <a:off x="658368" y="2377440"/>
-            <a:ext cx="10881360" cy="3108960"/>
+            <a:off x="658368" y="2286000"/>
+            <a:ext cx="10881360" cy="2834640"/>
           </a:xfrm>
           <a:prstGeom prst="rect">
             <a:avLst/>
@@ -6248,115 +7344,161 @@
           <a:p>
             <a:pPr algn="l">
               <a:lnSpc>
-                <a:spcPct val="145000"/>
+                <a:spcPct val="134000"/>
               </a:lnSpc>
             </a:pPr>
             <a:r>
-              <a:rPr sz="1700" b="1">
+              <a:rPr sz="1900" b="1">
                 <a:solidFill>
                   <a:srgbClr val="00FF41"/>
                 </a:solidFill>
                 <a:latin typeface="Arial"/>
               </a:rPr>
-              <a:t>•  </a:t>
-            </a:r>
-            <a:r>
-              <a:rPr sz="1700" b="0">
-                <a:solidFill>
-                  <a:srgbClr val="8A94A6"/>
-                </a:solidFill>
-                <a:latin typeface="Arial"/>
-              </a:rPr>
-              <a:t>Author, Year. Title. Where it appeared.  —  what it found</a:t>
+              <a:t>→  </a:t>
+            </a:r>
+            <a:r>
+              <a:rPr sz="1900" b="0">
+                <a:solidFill>
+                  <a:srgbClr val="F5F7FA"/>
+                </a:solidFill>
+                <a:latin typeface="Arial"/>
+              </a:rPr>
+              <a:t>The lens + method I ran, and why our reading demanded it</a:t>
             </a:r>
           </a:p>
           <a:p>
             <a:pPr algn="l">
               <a:lnSpc>
-                <a:spcPct val="145000"/>
+                <a:spcPct val="134000"/>
               </a:lnSpc>
             </a:pPr>
             <a:r>
-              <a:rPr sz="1700" b="1">
+              <a:rPr sz="1900" b="1">
                 <a:solidFill>
                   <a:srgbClr val="00FF41"/>
                 </a:solidFill>
                 <a:latin typeface="Arial"/>
               </a:rPr>
-              <a:t>•  </a:t>
-            </a:r>
-            <a:r>
-              <a:rPr sz="1700" b="0">
-                <a:solidFill>
-                  <a:srgbClr val="8A94A6"/>
-                </a:solidFill>
-                <a:latin typeface="Arial"/>
-              </a:rPr>
-              <a:t>Author, Year. Title. Where it appeared.  —  what it found</a:t>
+              <a:t>→  </a:t>
+            </a:r>
+            <a:r>
+              <a:rPr sz="1900" b="0">
+                <a:solidFill>
+                  <a:srgbClr val="F5F7FA"/>
+                </a:solidFill>
+                <a:latin typeface="Arial"/>
+              </a:rPr>
+              <a:t>My evidence - what I actually observed or measured</a:t>
             </a:r>
           </a:p>
           <a:p>
             <a:pPr algn="l">
               <a:lnSpc>
-                <a:spcPct val="145000"/>
+                <a:spcPct val="134000"/>
               </a:lnSpc>
             </a:pPr>
             <a:r>
-              <a:rPr sz="1700" b="1">
+              <a:rPr sz="1900" b="1">
                 <a:solidFill>
                   <a:srgbClr val="00FF41"/>
                 </a:solidFill>
                 <a:latin typeface="Arial"/>
               </a:rPr>
-              <a:t>•  </a:t>
-            </a:r>
-            <a:r>
-              <a:rPr sz="1700" b="0">
-                <a:solidFill>
-                  <a:srgbClr val="8A94A6"/>
-                </a:solidFill>
-                <a:latin typeface="Arial"/>
-              </a:rPr>
-              <a:t>Author, Year. Title. Where it appeared.  —  what it found</a:t>
+              <a:t>→  </a:t>
+            </a:r>
+            <a:r>
+              <a:rPr sz="1900" b="0">
+                <a:solidFill>
+                  <a:srgbClr val="F5F7FA"/>
+                </a:solidFill>
+                <a:latin typeface="Arial"/>
+              </a:rPr>
+              <a:t>What this says WORKS - and what does NOT</a:t>
             </a:r>
           </a:p>
           <a:p>
             <a:pPr algn="l">
               <a:lnSpc>
-                <a:spcPct val="145000"/>
+                <a:spcPct val="134000"/>
               </a:lnSpc>
             </a:pPr>
             <a:r>
-              <a:rPr sz="1700" b="1">
+              <a:rPr sz="1900" b="1">
                 <a:solidFill>
                   <a:srgbClr val="00FF41"/>
                 </a:solidFill>
                 <a:latin typeface="Arial"/>
               </a:rPr>
-              <a:t>•  </a:t>
-            </a:r>
-            <a:r>
-              <a:rPr sz="1700" b="0">
-                <a:solidFill>
-                  <a:srgbClr val="8A94A6"/>
-                </a:solidFill>
-                <a:latin typeface="Arial"/>
-              </a:rPr>
-              <a:t>Author, Year. Title. Where it appeared.  —  what it found</a:t>
-            </a:r>
-          </a:p>
-        </p:txBody>
-      </p:sp>
-      <p:sp>
-        <p:nvSpPr>
-          <p:cNvPr id="6" name="TextBox 5"/>
+              <a:t>→  </a:t>
+            </a:r>
+            <a:r>
+              <a:rPr sz="1900" b="0">
+                <a:solidFill>
+                  <a:srgbClr val="F5F7FA"/>
+                </a:solidFill>
+                <a:latin typeface="Arial"/>
+              </a:rPr>
+              <a:t>The paper I found (real citation) and what it changes</a:t>
+            </a:r>
+          </a:p>
+        </p:txBody>
+      </p:sp>
+      <p:sp>
+        <p:nvSpPr>
+          <p:cNvPr id="6" name="Rounded Rectangle 5"/>
+          <p:cNvSpPr/>
+          <p:nvPr/>
+        </p:nvSpPr>
+        <p:spPr>
+          <a:xfrm>
+            <a:off x="640080" y="5440680"/>
+            <a:ext cx="10881360" cy="658368"/>
+          </a:xfrm>
+          <a:prstGeom prst="roundRect">
+            <a:avLst/>
+          </a:prstGeom>
+          <a:solidFill>
+            <a:srgbClr val="151B26"/>
+          </a:solidFill>
+          <a:ln w="19050">
+            <a:solidFill>
+              <a:srgbClr val="00FF41"/>
+            </a:solidFill>
+          </a:ln>
+          <a:effectLst/>
+        </p:spPr>
+        <p:style>
+          <a:lnRef idx="1">
+            <a:schemeClr val="accent1"/>
+          </a:lnRef>
+          <a:fillRef idx="3">
+            <a:schemeClr val="accent1"/>
+          </a:fillRef>
+          <a:effectRef idx="2">
+            <a:schemeClr val="accent1"/>
+          </a:effectRef>
+          <a:fontRef idx="minor">
+            <a:schemeClr val="lt1"/>
+          </a:fontRef>
+        </p:style>
+        <p:txBody>
+          <a:bodyPr rtlCol="0" anchor="ctr"/>
+          <a:lstStyle/>
+          <a:p>
+            <a:pPr algn="ctr"/>
+          </a:p>
+        </p:txBody>
+      </p:sp>
+      <p:sp>
+        <p:nvSpPr>
+          <p:cNvPr id="7" name="TextBox 6"/>
           <p:cNvSpPr txBox="1"/>
           <p:nvPr/>
         </p:nvSpPr>
         <p:spPr>
           <a:xfrm>
-            <a:off x="658368" y="5715000"/>
-            <a:ext cx="10881360" cy="365760"/>
+            <a:off x="914400" y="5440680"/>
+            <a:ext cx="10332720" cy="658368"/>
           </a:xfrm>
           <a:prstGeom prst="rect">
             <a:avLst/>
@@ -6364,7 +7506,7 @@
           <a:noFill/>
         </p:spPr>
         <p:txBody>
-          <a:bodyPr wrap="square" anchor="t">
+          <a:bodyPr wrap="square" anchor="ctr">
             <a:spAutoFit/>
           </a:bodyPr>
           <a:lstStyle/>
@@ -6375,13 +7517,346 @@
               </a:lnSpc>
             </a:pPr>
             <a:r>
-              <a:rPr sz="1300" b="0">
+              <a:rPr sz="1600" b="1">
+                <a:solidFill>
+                  <a:srgbClr val="00FF41"/>
+                </a:solidFill>
+                <a:latin typeface="Arial"/>
+              </a:rPr>
+              <a:t>▸  </a:t>
+            </a:r>
+            <a:r>
+              <a:rPr sz="1500" b="1">
+                <a:solidFill>
+                  <a:srgbClr val="F5F7FA"/>
+                </a:solidFill>
+                <a:latin typeface="Arial"/>
+              </a:rPr>
+              <a:t>This slide is yours. Add more slides behind it if you need them - keep your name on them.</a:t>
+            </a:r>
+          </a:p>
+        </p:txBody>
+      </p:sp>
+      <p:sp>
+        <p:nvSpPr>
+          <p:cNvPr id="8" name="TextBox 7"/>
+          <p:cNvSpPr txBox="1"/>
+          <p:nvPr/>
+        </p:nvSpPr>
+        <p:spPr>
+          <a:xfrm>
+            <a:off x="640080" y="6355080"/>
+            <a:ext cx="10972800" cy="365760"/>
+          </a:xfrm>
+          <a:prstGeom prst="rect">
+            <a:avLst/>
+          </a:prstGeom>
+          <a:noFill/>
+        </p:spPr>
+        <p:txBody>
+          <a:bodyPr wrap="square" anchor="t">
+            <a:spAutoFit/>
+          </a:bodyPr>
+          <a:lstStyle/>
+          <a:p>
+            <a:pPr algn="l">
+              <a:lnSpc>
+                <a:spcPct val="100000"/>
+              </a:lnSpc>
+            </a:pPr>
+            <a:r>
+              <a:rPr sz="1000" b="0">
                 <a:solidFill>
                   <a:srgbClr val="5A6474"/>
                 </a:solidFill>
                 <a:latin typeface="Courier New"/>
               </a:rPr>
-              <a:t>Real papers only — never invent a citation.</a:t>
+              <a:t>Value Verification · TECHIE 1121 · Cornell Tech · Tue Jul 28</a:t>
+            </a:r>
+          </a:p>
+        </p:txBody>
+      </p:sp>
+    </p:spTree>
+  </p:cSld>
+  <p:clrMapOvr>
+    <a:masterClrMapping/>
+  </p:clrMapOvr>
+</p:sld>
+</file>
+
+<file path=ppt/slides/slide9.xml><?xml version="1.0" encoding="utf-8"?>
+<p:sld xmlns:a="http://schemas.openxmlformats.org/drawingml/2006/main" xmlns:p="http://schemas.openxmlformats.org/presentationml/2006/main" xmlns:r="http://schemas.openxmlformats.org/officeDocument/2006/relationships">
+  <p:cSld>
+    <p:bg>
+      <p:bgPr>
+        <a:solidFill>
+          <a:srgbClr val="0B0E14"/>
+        </a:solidFill>
+        <a:effectLst/>
+      </p:bgPr>
+    </p:bg>
+    <p:spTree>
+      <p:nvGrpSpPr>
+        <p:cNvPr id="1" name=""/>
+        <p:cNvGrpSpPr/>
+        <p:nvPr/>
+      </p:nvGrpSpPr>
+      <p:grpSpPr/>
+      <p:sp>
+        <p:nvSpPr>
+          <p:cNvPr id="2" name="Rectangle 1"/>
+          <p:cNvSpPr/>
+          <p:nvPr/>
+        </p:nvSpPr>
+        <p:spPr>
+          <a:xfrm>
+            <a:off x="0" y="0"/>
+            <a:ext cx="256032" cy="6858000"/>
+          </a:xfrm>
+          <a:prstGeom prst="rect">
+            <a:avLst/>
+          </a:prstGeom>
+          <a:solidFill>
+            <a:srgbClr val="00FF41"/>
+          </a:solidFill>
+          <a:ln>
+            <a:noFill/>
+          </a:ln>
+          <a:effectLst/>
+        </p:spPr>
+        <p:style>
+          <a:lnRef idx="1">
+            <a:schemeClr val="accent1"/>
+          </a:lnRef>
+          <a:fillRef idx="3">
+            <a:schemeClr val="accent1"/>
+          </a:fillRef>
+          <a:effectRef idx="2">
+            <a:schemeClr val="accent1"/>
+          </a:effectRef>
+          <a:fontRef idx="minor">
+            <a:schemeClr val="lt1"/>
+          </a:fontRef>
+        </p:style>
+        <p:txBody>
+          <a:bodyPr rtlCol="0" anchor="ctr"/>
+          <a:lstStyle/>
+          <a:p>
+            <a:pPr algn="ctr"/>
+          </a:p>
+        </p:txBody>
+      </p:sp>
+      <p:sp>
+        <p:nvSpPr>
+          <p:cNvPr id="3" name="TextBox 2"/>
+          <p:cNvSpPr txBox="1"/>
+          <p:nvPr/>
+        </p:nvSpPr>
+        <p:spPr>
+          <a:xfrm>
+            <a:off x="822960" y="1417320"/>
+            <a:ext cx="2743200" cy="1097280"/>
+          </a:xfrm>
+          <a:prstGeom prst="rect">
+            <a:avLst/>
+          </a:prstGeom>
+          <a:noFill/>
+        </p:spPr>
+        <p:txBody>
+          <a:bodyPr wrap="square" anchor="t">
+            <a:spAutoFit/>
+          </a:bodyPr>
+          <a:lstStyle/>
+          <a:p>
+            <a:pPr algn="l">
+              <a:lnSpc>
+                <a:spcPct val="100000"/>
+              </a:lnSpc>
+            </a:pPr>
+            <a:r>
+              <a:rPr sz="6400" b="1">
+                <a:solidFill>
+                  <a:srgbClr val="00FF41"/>
+                </a:solidFill>
+                <a:latin typeface="Courier New"/>
+              </a:rPr>
+              <a:t>04</a:t>
+            </a:r>
+          </a:p>
+        </p:txBody>
+      </p:sp>
+      <p:sp>
+        <p:nvSpPr>
+          <p:cNvPr id="4" name="TextBox 3"/>
+          <p:cNvSpPr txBox="1"/>
+          <p:nvPr/>
+        </p:nvSpPr>
+        <p:spPr>
+          <a:xfrm>
+            <a:off x="841248" y="2487168"/>
+            <a:ext cx="10424160" cy="457200"/>
+          </a:xfrm>
+          <a:prstGeom prst="rect">
+            <a:avLst/>
+          </a:prstGeom>
+          <a:noFill/>
+        </p:spPr>
+        <p:txBody>
+          <a:bodyPr wrap="square" anchor="t">
+            <a:spAutoFit/>
+          </a:bodyPr>
+          <a:lstStyle/>
+          <a:p>
+            <a:pPr algn="l">
+              <a:lnSpc>
+                <a:spcPct val="100000"/>
+              </a:lnSpc>
+            </a:pPr>
+            <a:r>
+              <a:rPr sz="1500" b="1">
+                <a:solidFill>
+                  <a:srgbClr val="00FF41"/>
+                </a:solidFill>
+                <a:latin typeface="Courier New"/>
+              </a:rPr>
+              <a:t>PART 3 — OUTLOOK</a:t>
+            </a:r>
+          </a:p>
+        </p:txBody>
+      </p:sp>
+      <p:sp>
+        <p:nvSpPr>
+          <p:cNvPr id="5" name="TextBox 4"/>
+          <p:cNvSpPr txBox="1"/>
+          <p:nvPr/>
+        </p:nvSpPr>
+        <p:spPr>
+          <a:xfrm>
+            <a:off x="804672" y="2971800"/>
+            <a:ext cx="10607040" cy="1097280"/>
+          </a:xfrm>
+          <a:prstGeom prst="rect">
+            <a:avLst/>
+          </a:prstGeom>
+          <a:noFill/>
+        </p:spPr>
+        <p:txBody>
+          <a:bodyPr wrap="square" anchor="t">
+            <a:spAutoFit/>
+          </a:bodyPr>
+          <a:lstStyle/>
+          <a:p>
+            <a:pPr algn="l">
+              <a:lnSpc>
+                <a:spcPct val="103000"/>
+              </a:lnSpc>
+            </a:pPr>
+            <a:r>
+              <a:rPr sz="3800" b="1">
+                <a:solidFill>
+                  <a:srgbClr val="F5F7FA"/>
+                </a:solidFill>
+                <a:latin typeface="Arial"/>
+              </a:rPr>
+              <a:t>What related research has already found</a:t>
+            </a:r>
+          </a:p>
+        </p:txBody>
+      </p:sp>
+      <p:sp>
+        <p:nvSpPr>
+          <p:cNvPr id="6" name="TextBox 5"/>
+          <p:cNvSpPr txBox="1"/>
+          <p:nvPr/>
+        </p:nvSpPr>
+        <p:spPr>
+          <a:xfrm>
+            <a:off x="841248" y="4224528"/>
+            <a:ext cx="10424160" cy="1737360"/>
+          </a:xfrm>
+          <a:prstGeom prst="rect">
+            <a:avLst/>
+          </a:prstGeom>
+          <a:noFill/>
+        </p:spPr>
+        <p:txBody>
+          <a:bodyPr wrap="square" anchor="t">
+            <a:spAutoFit/>
+          </a:bodyPr>
+          <a:lstStyle/>
+          <a:p>
+            <a:pPr algn="l">
+              <a:lnSpc>
+                <a:spcPct val="128000"/>
+              </a:lnSpc>
+            </a:pPr>
+            <a:r>
+              <a:rPr sz="1700" b="1">
+                <a:solidFill>
+                  <a:srgbClr val="00FF41"/>
+                </a:solidFill>
+                <a:latin typeface="Arial"/>
+              </a:rPr>
+              <a:t>→  </a:t>
+            </a:r>
+            <a:r>
+              <a:rPr sz="1700" b="0">
+                <a:solidFill>
+                  <a:srgbClr val="8A94A6"/>
+                </a:solidFill>
+                <a:latin typeface="Arial"/>
+              </a:rPr>
+              <a:t>What have others tried in order to move this value?</a:t>
+            </a:r>
+          </a:p>
+          <a:p>
+            <a:pPr algn="l">
+              <a:lnSpc>
+                <a:spcPct val="128000"/>
+              </a:lnSpc>
+            </a:pPr>
+            <a:r>
+              <a:rPr sz="1700" b="1">
+                <a:solidFill>
+                  <a:srgbClr val="00FF41"/>
+                </a:solidFill>
+                <a:latin typeface="Arial"/>
+              </a:rPr>
+              <a:t>→  </a:t>
+            </a:r>
+            <a:r>
+              <a:rPr sz="1700" b="0">
+                <a:solidFill>
+                  <a:srgbClr val="8A94A6"/>
+                </a:solidFill>
+                <a:latin typeface="Arial"/>
+              </a:rPr>
+              <a:t>What worked — and what failed?</a:t>
+            </a:r>
+          </a:p>
+          <a:p>
+            <a:pPr algn="l">
+              <a:lnSpc>
+                <a:spcPct val="128000"/>
+              </a:lnSpc>
+            </a:pPr>
+            <a:r>
+              <a:rPr sz="1700" b="1">
+                <a:solidFill>
+                  <a:srgbClr val="00FF41"/>
+                </a:solidFill>
+                <a:latin typeface="Arial"/>
+              </a:rPr>
+              <a:t>→  </a:t>
+            </a:r>
+            <a:r>
+              <a:rPr sz="1700" b="0">
+                <a:solidFill>
+                  <a:srgbClr val="8A94A6"/>
+                </a:solidFill>
+                <a:latin typeface="Arial"/>
+              </a:rPr>
+              <a:t>2–3 REAL sources. Never invent a citation.</a:t>
             </a:r>
           </a:p>
         </p:txBody>

--- a/slides/team-decks/Week3-Tue-chezborgar.pptx
+++ b/slides/team-decks/Week3-Tue-chezborgar.pptx
@@ -512,7 +512,7 @@
           <a:lstStyle/>
           <a:p>
             <a:r>
-              <a:t>Title slide. Confirm the value and the member list before presenting.</a:t>
+              <a:t>Team name = the value you carry into the final. Confirm the value + members before presenting.</a:t>
             </a:r>
           </a:p>
         </p:txBody>
@@ -4138,7 +4138,7 @@
         </p:nvSpPr>
         <p:spPr>
           <a:xfrm>
-            <a:off x="822960" y="1600200"/>
+            <a:off x="822960" y="1554480"/>
             <a:ext cx="10515600" cy="457200"/>
           </a:xfrm>
           <a:prstGeom prst="rect">
@@ -4177,7 +4177,7 @@
         </p:nvSpPr>
         <p:spPr>
           <a:xfrm>
-            <a:off x="804672" y="2148840"/>
+            <a:off x="804672" y="2103120"/>
             <a:ext cx="10607040" cy="1737360"/>
           </a:xfrm>
           <a:prstGeom prst="rect">
@@ -4199,11 +4199,11 @@
             <a:r>
               <a:rPr sz="4600" b="1">
                 <a:solidFill>
-                  <a:srgbClr val="F5F7FA"/>
-                </a:solidFill>
-                <a:latin typeface="Arial"/>
-              </a:rPr>
-              <a:t>Chezborgar</a:t>
+                  <a:srgbClr val="8A94A6"/>
+                </a:solidFill>
+                <a:latin typeface="Arial"/>
+              </a:rPr>
+              <a:t>[ name your team after your value ]</a:t>
             </a:r>
           </a:p>
         </p:txBody>
@@ -4255,8 +4255,8 @@
         </p:nvSpPr>
         <p:spPr>
           <a:xfrm>
-            <a:off x="841248" y="4526280"/>
-            <a:ext cx="10424160" cy="548640"/>
+            <a:off x="841248" y="4434840"/>
+            <a:ext cx="10424160" cy="457200"/>
           </a:xfrm>
           <a:prstGeom prst="rect">
             <a:avLst/>
@@ -4275,22 +4275,13 @@
               </a:lnSpc>
             </a:pPr>
             <a:r>
-              <a:rPr sz="1800" b="0">
-                <a:solidFill>
-                  <a:srgbClr val="F5F7FA"/>
-                </a:solidFill>
-                <a:latin typeface="Arial"/>
-              </a:rPr>
-              <a:t>The value we're carrying:  </a:t>
-            </a:r>
-            <a:r>
-              <a:rPr sz="1800" b="1">
-                <a:solidFill>
-                  <a:srgbClr val="8A94A6"/>
-                </a:solidFill>
-                <a:latin typeface="Arial"/>
-              </a:rPr>
-              <a:t>[ fill in ]</a:t>
+              <a:rPr sz="1300" b="0">
+                <a:solidFill>
+                  <a:srgbClr val="5A6474"/>
+                </a:solidFill>
+                <a:latin typeface="Courier New"/>
+              </a:rPr>
+              <a:t>GitHub team: Chezborgar</a:t>
             </a:r>
           </a:p>
         </p:txBody>

--- a/slides/team-decks/Week3-Tue-chezborgar.pptx
+++ b/slides/team-decks/Week3-Tue-chezborgar.pptx
@@ -4555,7 +4555,7 @@
                 </a:solidFill>
                 <a:latin typeface="Arial"/>
               </a:rPr>
-              <a:t>Verification is a beginning, not a verdict.</a:t>
+              <a:t>Verification opens the next design - it doesn't just grade this one.</a:t>
             </a:r>
           </a:p>
           <a:p>

--- a/slides/team-decks/Week3-Tue-chezborgar.pptx
+++ b/slides/team-decks/Week3-Tue-chezborgar.pptx
@@ -4164,7 +4164,7 @@
                 </a:solidFill>
                 <a:latin typeface="Courier New"/>
               </a:rPr>
-              <a:t>VALUE VERIFICATION · TEAM RESEARCH DECK</a:t>
+              <a:t>VALUE-CENTERED USER RESEARCH DECK</a:t>
             </a:r>
           </a:p>
         </p:txBody>
@@ -4199,11 +4199,11 @@
             <a:r>
               <a:rPr sz="4600" b="1">
                 <a:solidFill>
-                  <a:srgbClr val="8A94A6"/>
-                </a:solidFill>
-                <a:latin typeface="Arial"/>
-              </a:rPr>
-              <a:t>[ name your team after your value ]</a:t>
+                  <a:srgbClr val="F5F7FA"/>
+                </a:solidFill>
+                <a:latin typeface="Arial"/>
+              </a:rPr>
+              <a:t>The Sustainability &amp; Trust Team</a:t>
             </a:r>
           </a:p>
         </p:txBody>
@@ -4255,8 +4255,8 @@
         </p:nvSpPr>
         <p:spPr>
           <a:xfrm>
-            <a:off x="841248" y="4434840"/>
-            <a:ext cx="10424160" cy="457200"/>
+            <a:off x="841248" y="4206240"/>
+            <a:ext cx="10607040" cy="457200"/>
           </a:xfrm>
           <a:prstGeom prst="rect">
             <a:avLst/>
@@ -4275,6 +4275,54 @@
               </a:lnSpc>
             </a:pPr>
             <a:r>
+              <a:rPr sz="1500" b="1">
+                <a:solidFill>
+                  <a:srgbClr val="00FF41"/>
+                </a:solidFill>
+                <a:latin typeface="Courier New"/>
+              </a:rPr>
+              <a:t>Project 2:  </a:t>
+            </a:r>
+            <a:r>
+              <a:rPr sz="1500" b="0">
+                <a:solidFill>
+                  <a:srgbClr val="8A94A6"/>
+                </a:solidFill>
+                <a:latin typeface="Arial"/>
+              </a:rPr>
+              <a:t>Borrow Board - borrow instead of buy, for college students</a:t>
+            </a:r>
+          </a:p>
+        </p:txBody>
+      </p:sp>
+      <p:sp>
+        <p:nvSpPr>
+          <p:cNvPr id="7" name="TextBox 6"/>
+          <p:cNvSpPr txBox="1"/>
+          <p:nvPr/>
+        </p:nvSpPr>
+        <p:spPr>
+          <a:xfrm>
+            <a:off x="841248" y="4709160"/>
+            <a:ext cx="10424160" cy="457200"/>
+          </a:xfrm>
+          <a:prstGeom prst="rect">
+            <a:avLst/>
+          </a:prstGeom>
+          <a:noFill/>
+        </p:spPr>
+        <p:txBody>
+          <a:bodyPr wrap="square" anchor="t">
+            <a:spAutoFit/>
+          </a:bodyPr>
+          <a:lstStyle/>
+          <a:p>
+            <a:pPr algn="l">
+              <a:lnSpc>
+                <a:spcPct val="100000"/>
+              </a:lnSpc>
+            </a:pPr>
+            <a:r>
               <a:rPr sz="1300" b="0">
                 <a:solidFill>
                   <a:srgbClr val="5A6474"/>
@@ -4288,7 +4336,7 @@
       </p:sp>
       <p:sp>
         <p:nvSpPr>
-          <p:cNvPr id="7" name="TextBox 6"/>
+          <p:cNvPr id="8" name="TextBox 7"/>
           <p:cNvSpPr txBox="1"/>
           <p:nvPr/>
         </p:nvSpPr>
@@ -5526,7 +5574,7 @@
                 </a:solidFill>
                 <a:latin typeface="Courier New"/>
               </a:rPr>
-              <a:t>THE VALUE &amp; THE READING</a:t>
+              <a:t>THE VALUE &amp; HOW WE DEFINE IT</a:t>
             </a:r>
           </a:p>
         </p:txBody>
@@ -5565,7 +5613,7 @@
                 </a:solidFill>
                 <a:latin typeface="Arial"/>
               </a:rPr>
-              <a:t>What we claimed — and which reading we built for</a:t>
+              <a:t>What we claimed — and how we operationalize it</a:t>
             </a:r>
           </a:p>
         </p:txBody>
@@ -5638,7 +5686,7 @@
                 </a:solidFill>
                 <a:latin typeface="Arial"/>
               </a:rPr>
-              <a:t>Which reading of the value did we actually design for? (e.g. privacy as control vs. security vs. contextual integrity)</a:t>
+              <a:t>How do we operationalize / define the value? (e.g. privacy as control vs. security vs. contextual integrity)</a:t>
             </a:r>
           </a:p>
           <a:p>
@@ -5663,7 +5711,7 @@
                 </a:solidFill>
                 <a:latin typeface="Arial"/>
               </a:rPr>
-              <a:t>Operationalized: if it's present, users will DO ___ / UNDERSTAND ___ / FEEL ___.</a:t>
+              <a:t>If it's present, users will DO ___ / UNDERSTAND ___ / FEEL ___.</a:t>
             </a:r>
           </a:p>
         </p:txBody>

--- a/slides/team-decks/Week3-Tue-chezborgar.pptx
+++ b/slides/team-decks/Week3-Tue-chezborgar.pptx
@@ -15,7 +15,6 @@
     <p:sldId id="263" r:id="rId15"/>
     <p:sldId id="264" r:id="rId16"/>
     <p:sldId id="265" r:id="rId17"/>
-    <p:sldId id="266" r:id="rId18"/>
   </p:sldIdLst>
   <p:sldSz cx="12191695" cy="6858000" type="screen4x3"/>
   <p:notesSz cx="6858000" cy="9144000"/>
@@ -792,7 +791,7 @@
           <a:lstStyle/>
           <a:p>
             <a:r>
-              <a:t>Emily Tai's individually graded section. Their reflection lives in their own lane on the team FigJam canvas.</a:t>
+              <a:t>Emily Tai's individual contribution: the design intervention they researched. Reflection lives in their own FigJam lane.</a:t>
             </a:r>
           </a:p>
         </p:txBody>
@@ -862,7 +861,7 @@
           <a:lstStyle/>
           <a:p>
             <a:r>
-              <a:t>Kylie Cheung's individually graded section. Their reflection lives in their own lane on the team FigJam canvas.</a:t>
+              <a:t>Kylie Cheung's individual contribution: the design intervention they researched. Reflection lives in their own FigJam lane.</a:t>
             </a:r>
           </a:p>
         </p:txBody>
@@ -932,7 +931,7 @@
           <a:lstStyle/>
           <a:p>
             <a:r>
-              <a:t>Aria Sharma's individually graded section. Their reflection lives in their own lane on the team FigJam canvas.</a:t>
+              <a:t>Aria Sharma's individual contribution: the design intervention they researched. Reflection lives in their own FigJam lane.</a:t>
             </a:r>
           </a:p>
         </p:txBody>
@@ -958,76 +957,6 @@
 </file>
 
 <file path=ppt/notesSlides/notesSlide8.xml><?xml version="1.0" encoding="utf-8"?>
-<p:notes xmlns:a="http://schemas.openxmlformats.org/drawingml/2006/main" xmlns:p="http://schemas.openxmlformats.org/presentationml/2006/main" xmlns:r="http://schemas.openxmlformats.org/officeDocument/2006/relationships">
-  <p:cSld>
-    <p:spTree>
-      <p:nvGrpSpPr>
-        <p:cNvPr id="1" name=""/>
-        <p:cNvGrpSpPr/>
-        <p:nvPr/>
-      </p:nvGrpSpPr>
-      <p:grpSpPr>
-        <a:xfrm>
-          <a:off x="0" y="0"/>
-          <a:ext cx="0" cy="0"/>
-          <a:chOff x="0" y="0"/>
-          <a:chExt cx="0" cy="0"/>
-        </a:xfrm>
-      </p:grpSpPr>
-      <p:sp>
-        <p:nvSpPr>
-          <p:cNvPr id="2" name="Slide Image Placeholder 1"/>
-          <p:cNvSpPr>
-            <a:spLocks noGrp="1"/>
-          </p:cNvSpPr>
-          <p:nvPr>
-            <p:ph type="sldImg" idx="2"/>
-          </p:nvPr>
-        </p:nvSpPr>
-        <p:spPr/>
-      </p:sp>
-      <p:sp>
-        <p:nvSpPr>
-          <p:cNvPr id="3" name="Notes Placeholder 2"/>
-          <p:cNvSpPr>
-            <a:spLocks noGrp="1"/>
-          </p:cNvSpPr>
-          <p:nvPr>
-            <p:ph type="body" idx="3" sz="quarter"/>
-          </p:nvPr>
-        </p:nvSpPr>
-        <p:spPr/>
-        <p:txBody>
-          <a:bodyPr/>
-          <a:lstStyle/>
-          <a:p>
-            <a:r>
-              <a:t>Section header — the team's own slides go after this one.</a:t>
-            </a:r>
-          </a:p>
-        </p:txBody>
-      </p:sp>
-      <p:sp>
-        <p:nvSpPr>
-          <p:cNvPr id="4" name="Slide Number Placeholder 3"/>
-          <p:cNvSpPr>
-            <a:spLocks noGrp="1"/>
-          </p:cNvSpPr>
-          <p:nvPr>
-            <p:ph type="sldNum" idx="5" sz="quarter"/>
-          </p:nvPr>
-        </p:nvSpPr>
-        <p:spPr/>
-      </p:sp>
-    </p:spTree>
-  </p:cSld>
-  <p:clrMapOvr>
-    <a:masterClrMapping/>
-  </p:clrMapOvr>
-</p:notes>
-</file>
-
-<file path=ppt/notesSlides/notesSlide9.xml><?xml version="1.0" encoding="utf-8"?>
 <p:notes xmlns:a="http://schemas.openxmlformats.org/drawingml/2006/main" xmlns:p="http://schemas.openxmlformats.org/presentationml/2006/main" xmlns:r="http://schemas.openxmlformats.org/officeDocument/2006/relationships">
   <p:cSld>
     <p:spTree>
@@ -4401,330 +4330,6 @@
       <p:grpSpPr/>
       <p:sp>
         <p:nvSpPr>
-          <p:cNvPr id="2" name="Rectangle 1"/>
-          <p:cNvSpPr/>
-          <p:nvPr/>
-        </p:nvSpPr>
-        <p:spPr>
-          <a:xfrm>
-            <a:off x="0" y="0"/>
-            <a:ext cx="256032" cy="6858000"/>
-          </a:xfrm>
-          <a:prstGeom prst="rect">
-            <a:avLst/>
-          </a:prstGeom>
-          <a:solidFill>
-            <a:srgbClr val="00FF41"/>
-          </a:solidFill>
-          <a:ln>
-            <a:noFill/>
-          </a:ln>
-          <a:effectLst/>
-        </p:spPr>
-        <p:style>
-          <a:lnRef idx="1">
-            <a:schemeClr val="accent1"/>
-          </a:lnRef>
-          <a:fillRef idx="3">
-            <a:schemeClr val="accent1"/>
-          </a:fillRef>
-          <a:effectRef idx="2">
-            <a:schemeClr val="accent1"/>
-          </a:effectRef>
-          <a:fontRef idx="minor">
-            <a:schemeClr val="lt1"/>
-          </a:fontRef>
-        </p:style>
-        <p:txBody>
-          <a:bodyPr rtlCol="0" anchor="ctr"/>
-          <a:lstStyle/>
-          <a:p>
-            <a:pPr algn="ctr"/>
-          </a:p>
-        </p:txBody>
-      </p:sp>
-      <p:sp>
-        <p:nvSpPr>
-          <p:cNvPr id="3" name="TextBox 2"/>
-          <p:cNvSpPr txBox="1"/>
-          <p:nvPr/>
-        </p:nvSpPr>
-        <p:spPr>
-          <a:xfrm>
-            <a:off x="822960" y="1417320"/>
-            <a:ext cx="2743200" cy="1097280"/>
-          </a:xfrm>
-          <a:prstGeom prst="rect">
-            <a:avLst/>
-          </a:prstGeom>
-          <a:noFill/>
-        </p:spPr>
-        <p:txBody>
-          <a:bodyPr wrap="square" anchor="t">
-            <a:spAutoFit/>
-          </a:bodyPr>
-          <a:lstStyle/>
-          <a:p>
-            <a:pPr algn="l">
-              <a:lnSpc>
-                <a:spcPct val="100000"/>
-              </a:lnSpc>
-            </a:pPr>
-            <a:r>
-              <a:rPr sz="6400" b="1">
-                <a:solidFill>
-                  <a:srgbClr val="00FF41"/>
-                </a:solidFill>
-                <a:latin typeface="Courier New"/>
-              </a:rPr>
-              <a:t>05</a:t>
-            </a:r>
-          </a:p>
-        </p:txBody>
-      </p:sp>
-      <p:sp>
-        <p:nvSpPr>
-          <p:cNvPr id="4" name="TextBox 3"/>
-          <p:cNvSpPr txBox="1"/>
-          <p:nvPr/>
-        </p:nvSpPr>
-        <p:spPr>
-          <a:xfrm>
-            <a:off x="841248" y="2487168"/>
-            <a:ext cx="10424160" cy="457200"/>
-          </a:xfrm>
-          <a:prstGeom prst="rect">
-            <a:avLst/>
-          </a:prstGeom>
-          <a:noFill/>
-        </p:spPr>
-        <p:txBody>
-          <a:bodyPr wrap="square" anchor="t">
-            <a:spAutoFit/>
-          </a:bodyPr>
-          <a:lstStyle/>
-          <a:p>
-            <a:pPr algn="l">
-              <a:lnSpc>
-                <a:spcPct val="100000"/>
-              </a:lnSpc>
-            </a:pPr>
-            <a:r>
-              <a:rPr sz="1500" b="1">
-                <a:solidFill>
-                  <a:srgbClr val="00FF41"/>
-                </a:solidFill>
-                <a:latin typeface="Courier New"/>
-              </a:rPr>
-              <a:t>SO WHAT</a:t>
-            </a:r>
-          </a:p>
-        </p:txBody>
-      </p:sp>
-      <p:sp>
-        <p:nvSpPr>
-          <p:cNvPr id="5" name="TextBox 4"/>
-          <p:cNvSpPr txBox="1"/>
-          <p:nvPr/>
-        </p:nvSpPr>
-        <p:spPr>
-          <a:xfrm>
-            <a:off x="804672" y="2971800"/>
-            <a:ext cx="10607040" cy="1097280"/>
-          </a:xfrm>
-          <a:prstGeom prst="rect">
-            <a:avLst/>
-          </a:prstGeom>
-          <a:noFill/>
-        </p:spPr>
-        <p:txBody>
-          <a:bodyPr wrap="square" anchor="t">
-            <a:spAutoFit/>
-          </a:bodyPr>
-          <a:lstStyle/>
-          <a:p>
-            <a:pPr algn="l">
-              <a:lnSpc>
-                <a:spcPct val="103000"/>
-              </a:lnSpc>
-            </a:pPr>
-            <a:r>
-              <a:rPr sz="3800" b="1">
-                <a:solidFill>
-                  <a:srgbClr val="F5F7FA"/>
-                </a:solidFill>
-                <a:latin typeface="Arial"/>
-              </a:rPr>
-              <a:t>Our next design brief</a:t>
-            </a:r>
-          </a:p>
-        </p:txBody>
-      </p:sp>
-      <p:sp>
-        <p:nvSpPr>
-          <p:cNvPr id="6" name="TextBox 5"/>
-          <p:cNvSpPr txBox="1"/>
-          <p:nvPr/>
-        </p:nvSpPr>
-        <p:spPr>
-          <a:xfrm>
-            <a:off x="841248" y="4224528"/>
-            <a:ext cx="10424160" cy="1737360"/>
-          </a:xfrm>
-          <a:prstGeom prst="rect">
-            <a:avLst/>
-          </a:prstGeom>
-          <a:noFill/>
-        </p:spPr>
-        <p:txBody>
-          <a:bodyPr wrap="square" anchor="t">
-            <a:spAutoFit/>
-          </a:bodyPr>
-          <a:lstStyle/>
-          <a:p>
-            <a:pPr algn="l">
-              <a:lnSpc>
-                <a:spcPct val="128000"/>
-              </a:lnSpc>
-            </a:pPr>
-            <a:r>
-              <a:rPr sz="1700" b="1">
-                <a:solidFill>
-                  <a:srgbClr val="00FF41"/>
-                </a:solidFill>
-                <a:latin typeface="Arial"/>
-              </a:rPr>
-              <a:t>→  </a:t>
-            </a:r>
-            <a:r>
-              <a:rPr sz="1700" b="0">
-                <a:solidFill>
-                  <a:srgbClr val="8A94A6"/>
-                </a:solidFill>
-                <a:latin typeface="Arial"/>
-              </a:rPr>
-              <a:t>Verification opens the next design - it doesn't just grade this one.</a:t>
-            </a:r>
-          </a:p>
-          <a:p>
-            <a:pPr algn="l">
-              <a:lnSpc>
-                <a:spcPct val="128000"/>
-              </a:lnSpc>
-            </a:pPr>
-            <a:r>
-              <a:rPr sz="1700" b="1">
-                <a:solidFill>
-                  <a:srgbClr val="00FF41"/>
-                </a:solidFill>
-                <a:latin typeface="Arial"/>
-              </a:rPr>
-              <a:t>→  </a:t>
-            </a:r>
-            <a:r>
-              <a:rPr sz="1700" b="0">
-                <a:solidFill>
-                  <a:srgbClr val="8A94A6"/>
-                </a:solidFill>
-                <a:latin typeface="Arial"/>
-              </a:rPr>
-              <a:t>What OTHER design could actually achieve this value?</a:t>
-            </a:r>
-          </a:p>
-          <a:p>
-            <a:pPr algn="l">
-              <a:lnSpc>
-                <a:spcPct val="128000"/>
-              </a:lnSpc>
-            </a:pPr>
-            <a:r>
-              <a:rPr sz="1700" b="1">
-                <a:solidFill>
-                  <a:srgbClr val="00FF41"/>
-                </a:solidFill>
-                <a:latin typeface="Arial"/>
-              </a:rPr>
-              <a:t>→  </a:t>
-            </a:r>
-            <a:r>
-              <a:rPr sz="1700" b="0">
-                <a:solidFill>
-                  <a:srgbClr val="8A94A6"/>
-                </a:solidFill>
-                <a:latin typeface="Arial"/>
-              </a:rPr>
-              <a:t>What should the next cycle discover? (You carry this into Wednesday.)</a:t>
-            </a:r>
-          </a:p>
-        </p:txBody>
-      </p:sp>
-      <p:sp>
-        <p:nvSpPr>
-          <p:cNvPr id="7" name="TextBox 6"/>
-          <p:cNvSpPr txBox="1"/>
-          <p:nvPr/>
-        </p:nvSpPr>
-        <p:spPr>
-          <a:xfrm>
-            <a:off x="640080" y="6355080"/>
-            <a:ext cx="10972800" cy="365760"/>
-          </a:xfrm>
-          <a:prstGeom prst="rect">
-            <a:avLst/>
-          </a:prstGeom>
-          <a:noFill/>
-        </p:spPr>
-        <p:txBody>
-          <a:bodyPr wrap="square" anchor="t">
-            <a:spAutoFit/>
-          </a:bodyPr>
-          <a:lstStyle/>
-          <a:p>
-            <a:pPr algn="l">
-              <a:lnSpc>
-                <a:spcPct val="100000"/>
-              </a:lnSpc>
-            </a:pPr>
-            <a:r>
-              <a:rPr sz="1000" b="0">
-                <a:solidFill>
-                  <a:srgbClr val="5A6474"/>
-                </a:solidFill>
-                <a:latin typeface="Courier New"/>
-              </a:rPr>
-              <a:t>Value Verification · TECHIE 1121 · Cornell Tech · Tue Jul 28</a:t>
-            </a:r>
-          </a:p>
-        </p:txBody>
-      </p:sp>
-    </p:spTree>
-  </p:cSld>
-  <p:clrMapOvr>
-    <a:masterClrMapping/>
-  </p:clrMapOvr>
-</p:sld>
-</file>
-
-<file path=ppt/slides/slide11.xml><?xml version="1.0" encoding="utf-8"?>
-<p:sld xmlns:a="http://schemas.openxmlformats.org/drawingml/2006/main" xmlns:p="http://schemas.openxmlformats.org/presentationml/2006/main" xmlns:r="http://schemas.openxmlformats.org/officeDocument/2006/relationships">
-  <p:cSld>
-    <p:bg>
-      <p:bgPr>
-        <a:solidFill>
-          <a:srgbClr val="0B0E14"/>
-        </a:solidFill>
-        <a:effectLst/>
-      </p:bgPr>
-    </p:bg>
-    <p:spTree>
-      <p:nvGrpSpPr>
-        <p:cNvPr id="1" name=""/>
-        <p:cNvGrpSpPr/>
-        <p:nvPr/>
-      </p:nvGrpSpPr>
-      <p:grpSpPr/>
-      <p:sp>
-        <p:nvSpPr>
           <p:cNvPr id="2" name="TextBox 1"/>
           <p:cNvSpPr txBox="1"/>
           <p:nvPr/>
@@ -5237,7 +4842,7 @@
                 </a:solidFill>
                 <a:latin typeface="Arial"/>
               </a:rPr>
-              <a:t>Five section headers follow — they are the spine of your talk.</a:t>
+              <a:t>Four section headers follow — they are the spine of your talk.</a:t>
             </a:r>
           </a:p>
           <a:p>
@@ -5262,7 +4867,7 @@
                 </a:solidFill>
                 <a:latin typeface="Arial"/>
               </a:rPr>
-              <a:t>Sections 01, 02, 04, 05 are the TEAM's. Section 03 has one named slide per person — that one is graded individually.</a:t>
+              <a:t>Sections 01, 02, 04 are the TEAM's. Section 03 has one named slide per person — your individual contribution.</a:t>
             </a:r>
           </a:p>
           <a:p>
@@ -5312,7 +4917,7 @@
                 </a:solidFill>
                 <a:latin typeface="Arial"/>
               </a:rPr>
-              <a:t>Evidence beats assertion: screenshots, numbers, quotes from what you actually observed.</a:t>
+              <a:t>No time to run full tests today - so RESEARCH the method, and what interventions have actually moved this value.</a:t>
             </a:r>
           </a:p>
           <a:p>
@@ -5613,7 +5218,7 @@
                 </a:solidFill>
                 <a:latin typeface="Arial"/>
               </a:rPr>
-              <a:t>What we claimed — and how we operationalize it</a:t>
+              <a:t>Discovery - operationalize the value</a:t>
             </a:r>
           </a:p>
         </p:txBody>
@@ -5661,7 +5266,7 @@
                 </a:solidFill>
                 <a:latin typeface="Arial"/>
               </a:rPr>
-              <a:t>Our app, in one line — and the value it claims.</a:t>
+              <a:t>[ our app, in one line ]  -  and the value it claims.</a:t>
             </a:r>
           </a:p>
           <a:p>
@@ -5686,7 +5291,7 @@
                 </a:solidFill>
                 <a:latin typeface="Arial"/>
               </a:rPr>
-              <a:t>How do we operationalize / define the value? (e.g. privacy as control vs. security vs. contextual integrity)</a:t>
+              <a:t>How do we operationalize / define the value?  (privacy as control vs. security vs. contextual integrity)</a:t>
             </a:r>
           </a:p>
           <a:p>
@@ -5711,7 +5316,7 @@
                 </a:solidFill>
                 <a:latin typeface="Arial"/>
               </a:rPr>
-              <a:t>If it's present, users will DO ___ / UNDERSTAND ___ / FEEL ___.</a:t>
+              <a:t>If it is present, users will DO [ ___ ] / UNDERSTAND [ ___ ] / FEEL [ ___ ].</a:t>
             </a:r>
           </a:p>
         </p:txBody>
@@ -5898,7 +5503,7 @@
                 </a:solidFill>
                 <a:latin typeface="Courier New"/>
               </a:rPr>
-              <a:t>PART 1 — WAYS TO VERIFY</a:t>
+              <a:t>HOW WOULD WE VERIFY IT?</a:t>
             </a:r>
           </a:p>
         </p:txBody>
@@ -5937,7 +5542,7 @@
                 </a:solidFill>
                 <a:latin typeface="Arial"/>
               </a:rPr>
-              <a:t>How can this value be verified at all?</a:t>
+              <a:t>Pick a method per lens - we won't run them all today</a:t>
             </a:r>
           </a:p>
         </p:txBody>
@@ -5985,7 +5590,7 @@
                 </a:solidFill>
                 <a:latin typeface="Arial"/>
               </a:rPr>
-              <a:t>How have others measured this value? (Google Scholar + its AI search)</a:t>
+              <a:t>BEHAVIOR - do users ACT differently?  -&gt;  hard to test in class, so we RESEARCH it: [ method + what studies show ].</a:t>
             </a:r>
           </a:p>
           <a:p>
@@ -6010,7 +5615,7 @@
                 </a:solidFill>
                 <a:latin typeface="Arial"/>
               </a:rPr>
-              <a:t>Which method did we choose — and why does our reading demand it?</a:t>
+              <a:t>UNDERSTANDING - do they GRASP the value?  -&gt;  a quick check with fellow students is possible: [ method ].</a:t>
             </a:r>
           </a:p>
           <a:p>
@@ -6035,7 +5640,7 @@
                 </a:solidFill>
                 <a:latin typeface="Arial"/>
               </a:rPr>
-              <a:t>The instrument we borrowed: UEQ · an HRI/SDT scale · the slop detector · a task design.</a:t>
+              <a:t>AFFECT - do they FEEL differently?  -&gt;  a quick check with fellow students is possible: [ method ].</a:t>
             </a:r>
           </a:p>
         </p:txBody>
@@ -6222,7 +5827,7 @@
                 </a:solidFill>
                 <a:latin typeface="Courier New"/>
               </a:rPr>
-              <a:t>PART 2 — WHAT WE FOUND</a:t>
+              <a:t>DESIGN INTERVENTIONS THAT MOVED THIS VALUE</a:t>
             </a:r>
           </a:p>
         </p:txBody>
@@ -6261,7 +5866,7 @@
                 </a:solidFill>
                 <a:latin typeface="Arial"/>
               </a:rPr>
-              <a:t>Insights from our own verification</a:t>
+              <a:t>Research - what has actually worked? (each member owns a slide)</a:t>
             </a:r>
           </a:p>
         </p:txBody>
@@ -6309,7 +5914,7 @@
                 </a:solidFill>
                 <a:latin typeface="Arial"/>
               </a:rPr>
-              <a:t>Each team member presents their OWN slide — the named slides that follow.</a:t>
+              <a:t>Each member presents their OWN researched intervention - the named slides that follow.</a:t>
             </a:r>
           </a:p>
           <a:p>
@@ -6334,7 +5939,7 @@
                 </a:solidFill>
                 <a:latin typeface="Arial"/>
               </a:rPr>
-              <a:t>What WORKS and what does NOT — with evidence. An evidenced 'it doesn't' beats a hopeful 'it does'.</a:t>
+              <a:t>A real design intervention tried for this value, and its result: worked / mixed / failed.</a:t>
             </a:r>
           </a:p>
           <a:p>
@@ -6359,7 +5964,7 @@
                 </a:solidFill>
                 <a:latin typeface="Arial"/>
               </a:rPr>
-              <a:t>Across the lenses: behavior · understanding · affect — and which lenses did NOT fit this value.</a:t>
+              <a:t>Real sources only - never invent a citation.</a:t>
             </a:r>
           </a:p>
         </p:txBody>
@@ -6463,7 +6068,7 @@
                 </a:solidFill>
                 <a:latin typeface="Courier New"/>
               </a:rPr>
-              <a:t>03.1  ·  YOUR SECTION (graded individually)</a:t>
+              <a:t>03.1  ·  YOUR SLIDE (your individual contribution)</a:t>
             </a:r>
           </a:p>
         </p:txBody>
@@ -6594,7 +6199,7 @@
                 </a:solidFill>
                 <a:latin typeface="Arial"/>
               </a:rPr>
-              <a:t>The lens + method I ran, and why our reading demanded it</a:t>
+              <a:t>A design intervention someone tried to move THIS value - [ what they did ]</a:t>
             </a:r>
           </a:p>
           <a:p>
@@ -6619,7 +6224,7 @@
                 </a:solidFill>
                 <a:latin typeface="Arial"/>
               </a:rPr>
-              <a:t>My evidence - what I actually observed or measured</a:t>
+              <a:t>The result - [ worked / mixed / failed ] - and the real source [ author, year ]</a:t>
             </a:r>
           </a:p>
           <a:p>
@@ -6644,7 +6249,7 @@
                 </a:solidFill>
                 <a:latin typeface="Arial"/>
               </a:rPr>
-              <a:t>What this says WORKS - and what does NOT</a:t>
+              <a:t>How you'd test it - [ method ]  (behavior = research it; understanding/affect = quick student check)</a:t>
             </a:r>
           </a:p>
           <a:p>
@@ -6669,7 +6274,7 @@
                 </a:solidFill>
                 <a:latin typeface="Arial"/>
               </a:rPr>
-              <a:t>The paper I found (real citation) and what it changes</a:t>
+              <a:t>Does it support or challenge our design direction? - [ ___ ]</a:t>
             </a:r>
           </a:p>
         </p:txBody>
@@ -6867,7 +6472,7 @@
                 </a:solidFill>
                 <a:latin typeface="Courier New"/>
               </a:rPr>
-              <a:t>03.2  ·  YOUR SECTION (graded individually)</a:t>
+              <a:t>03.2  ·  YOUR SLIDE (your individual contribution)</a:t>
             </a:r>
           </a:p>
         </p:txBody>
@@ -6998,7 +6603,7 @@
                 </a:solidFill>
                 <a:latin typeface="Arial"/>
               </a:rPr>
-              <a:t>The lens + method I ran, and why our reading demanded it</a:t>
+              <a:t>A design intervention someone tried to move THIS value - [ what they did ]</a:t>
             </a:r>
           </a:p>
           <a:p>
@@ -7023,7 +6628,7 @@
                 </a:solidFill>
                 <a:latin typeface="Arial"/>
               </a:rPr>
-              <a:t>My evidence - what I actually observed or measured</a:t>
+              <a:t>The result - [ worked / mixed / failed ] - and the real source [ author, year ]</a:t>
             </a:r>
           </a:p>
           <a:p>
@@ -7048,7 +6653,7 @@
                 </a:solidFill>
                 <a:latin typeface="Arial"/>
               </a:rPr>
-              <a:t>What this says WORKS - and what does NOT</a:t>
+              <a:t>How you'd test it - [ method ]  (behavior = research it; understanding/affect = quick student check)</a:t>
             </a:r>
           </a:p>
           <a:p>
@@ -7073,7 +6678,7 @@
                 </a:solidFill>
                 <a:latin typeface="Arial"/>
               </a:rPr>
-              <a:t>The paper I found (real citation) and what it changes</a:t>
+              <a:t>Does it support or challenge our design direction? - [ ___ ]</a:t>
             </a:r>
           </a:p>
         </p:txBody>
@@ -7271,7 +6876,7 @@
                 </a:solidFill>
                 <a:latin typeface="Courier New"/>
               </a:rPr>
-              <a:t>03.3  ·  YOUR SECTION (graded individually)</a:t>
+              <a:t>03.3  ·  YOUR SLIDE (your individual contribution)</a:t>
             </a:r>
           </a:p>
         </p:txBody>
@@ -7402,7 +7007,7 @@
                 </a:solidFill>
                 <a:latin typeface="Arial"/>
               </a:rPr>
-              <a:t>The lens + method I ran, and why our reading demanded it</a:t>
+              <a:t>A design intervention someone tried to move THIS value - [ what they did ]</a:t>
             </a:r>
           </a:p>
           <a:p>
@@ -7427,7 +7032,7 @@
                 </a:solidFill>
                 <a:latin typeface="Arial"/>
               </a:rPr>
-              <a:t>My evidence - what I actually observed or measured</a:t>
+              <a:t>The result - [ worked / mixed / failed ] - and the real source [ author, year ]</a:t>
             </a:r>
           </a:p>
           <a:p>
@@ -7452,7 +7057,7 @@
                 </a:solidFill>
                 <a:latin typeface="Arial"/>
               </a:rPr>
-              <a:t>What this says WORKS - and what does NOT</a:t>
+              <a:t>How you'd test it - [ method ]  (behavior = research it; understanding/affect = quick student check)</a:t>
             </a:r>
           </a:p>
           <a:p>
@@ -7477,7 +7082,7 @@
                 </a:solidFill>
                 <a:latin typeface="Arial"/>
               </a:rPr>
-              <a:t>The paper I found (real citation) and what it changes</a:t>
+              <a:t>Does it support or challenge our design direction? - [ ___ ]</a:t>
             </a:r>
           </a:p>
         </p:txBody>
@@ -7758,7 +7363,7 @@
                 </a:solidFill>
                 <a:latin typeface="Courier New"/>
               </a:rPr>
-              <a:t>PART 3 — OUTLOOK</a:t>
+              <a:t>OUR DESIGN DIRECTIONS</a:t>
             </a:r>
           </a:p>
         </p:txBody>
@@ -7797,7 +7402,7 @@
                 </a:solidFill>
                 <a:latin typeface="Arial"/>
               </a:rPr>
-              <a:t>What related research has already found</a:t>
+              <a:t>Generative - where the evidence points (carry into Wednesday)</a:t>
             </a:r>
           </a:p>
         </p:txBody>
@@ -7845,7 +7450,7 @@
                 </a:solidFill>
                 <a:latin typeface="Arial"/>
               </a:rPr>
-              <a:t>What have others tried in order to move this value?</a:t>
+              <a:t>2-3 design directions our research points to.</a:t>
             </a:r>
           </a:p>
           <a:p>
@@ -7870,7 +7475,7 @@
                 </a:solidFill>
                 <a:latin typeface="Arial"/>
               </a:rPr>
-              <a:t>What worked — and what failed?</a:t>
+              <a:t>Which one has the strongest evidence behind it?</a:t>
             </a:r>
           </a:p>
           <a:p>
@@ -7895,7 +7500,7 @@
                 </a:solidFill>
                 <a:latin typeface="Arial"/>
               </a:rPr>
-              <a:t>2–3 REAL sources. Never invent a citation.</a:t>
+              <a:t>What would we still need to verify - and how?</a:t>
             </a:r>
           </a:p>
         </p:txBody>

--- a/slides/team-decks/Week3-Tue-chezborgar.pptx
+++ b/slides/team-decks/Week3-Tue-chezborgar.pptx
@@ -15,6 +15,7 @@
     <p:sldId id="263" r:id="rId15"/>
     <p:sldId id="264" r:id="rId16"/>
     <p:sldId id="265" r:id="rId17"/>
+    <p:sldId id="266" r:id="rId18"/>
   </p:sldIdLst>
   <p:sldSz cx="12191695" cy="6858000" type="screen4x3"/>
   <p:notesSz cx="6858000" cy="9144000"/>
@@ -791,7 +792,7 @@
           <a:lstStyle/>
           <a:p>
             <a:r>
-              <a:t>Emily Tai's individual contribution: the design intervention they researched. Reflection lives in their own FigJam lane.</a:t>
+              <a:t>Section header — the team's own slides go after this one.</a:t>
             </a:r>
           </a:p>
         </p:txBody>
@@ -861,7 +862,7 @@
           <a:lstStyle/>
           <a:p>
             <a:r>
-              <a:t>Kylie Cheung's individual contribution: the design intervention they researched. Reflection lives in their own FigJam lane.</a:t>
+              <a:t>Emily Tai's individual contribution: the real paper they found (AI academic search) and READ - not just an AI summary. Reflection lives in their own FigJam lane (block 06).</a:t>
             </a:r>
           </a:p>
         </p:txBody>
@@ -931,7 +932,7 @@
           <a:lstStyle/>
           <a:p>
             <a:r>
-              <a:t>Aria Sharma's individual contribution: the design intervention they researched. Reflection lives in their own FigJam lane.</a:t>
+              <a:t>Kylie Cheung's individual contribution: the real paper they found (AI academic search) and READ - not just an AI summary. Reflection lives in their own FigJam lane (block 06).</a:t>
             </a:r>
           </a:p>
         </p:txBody>
@@ -957,6 +958,76 @@
 </file>
 
 <file path=ppt/notesSlides/notesSlide8.xml><?xml version="1.0" encoding="utf-8"?>
+<p:notes xmlns:a="http://schemas.openxmlformats.org/drawingml/2006/main" xmlns:p="http://schemas.openxmlformats.org/presentationml/2006/main" xmlns:r="http://schemas.openxmlformats.org/officeDocument/2006/relationships">
+  <p:cSld>
+    <p:spTree>
+      <p:nvGrpSpPr>
+        <p:cNvPr id="1" name=""/>
+        <p:cNvGrpSpPr/>
+        <p:nvPr/>
+      </p:nvGrpSpPr>
+      <p:grpSpPr>
+        <a:xfrm>
+          <a:off x="0" y="0"/>
+          <a:ext cx="0" cy="0"/>
+          <a:chOff x="0" y="0"/>
+          <a:chExt cx="0" cy="0"/>
+        </a:xfrm>
+      </p:grpSpPr>
+      <p:sp>
+        <p:nvSpPr>
+          <p:cNvPr id="2" name="Slide Image Placeholder 1"/>
+          <p:cNvSpPr>
+            <a:spLocks noGrp="1"/>
+          </p:cNvSpPr>
+          <p:nvPr>
+            <p:ph type="sldImg" idx="2"/>
+          </p:nvPr>
+        </p:nvSpPr>
+        <p:spPr/>
+      </p:sp>
+      <p:sp>
+        <p:nvSpPr>
+          <p:cNvPr id="3" name="Notes Placeholder 2"/>
+          <p:cNvSpPr>
+            <a:spLocks noGrp="1"/>
+          </p:cNvSpPr>
+          <p:nvPr>
+            <p:ph type="body" idx="3" sz="quarter"/>
+          </p:nvPr>
+        </p:nvSpPr>
+        <p:spPr/>
+        <p:txBody>
+          <a:bodyPr/>
+          <a:lstStyle/>
+          <a:p>
+            <a:r>
+              <a:t>Aria Sharma's individual contribution: the real paper they found (AI academic search) and READ - not just an AI summary. Reflection lives in their own FigJam lane (block 06).</a:t>
+            </a:r>
+          </a:p>
+        </p:txBody>
+      </p:sp>
+      <p:sp>
+        <p:nvSpPr>
+          <p:cNvPr id="4" name="Slide Number Placeholder 3"/>
+          <p:cNvSpPr>
+            <a:spLocks noGrp="1"/>
+          </p:cNvSpPr>
+          <p:nvPr>
+            <p:ph type="sldNum" idx="5" sz="quarter"/>
+          </p:nvPr>
+        </p:nvSpPr>
+        <p:spPr/>
+      </p:sp>
+    </p:spTree>
+  </p:cSld>
+  <p:clrMapOvr>
+    <a:masterClrMapping/>
+  </p:clrMapOvr>
+</p:notes>
+</file>
+
+<file path=ppt/notesSlides/notesSlide9.xml><?xml version="1.0" encoding="utf-8"?>
 <p:notes xmlns:a="http://schemas.openxmlformats.org/drawingml/2006/main" xmlns:p="http://schemas.openxmlformats.org/presentationml/2006/main" xmlns:r="http://schemas.openxmlformats.org/officeDocument/2006/relationships">
   <p:cSld>
     <p:spTree>
@@ -4330,6 +4401,330 @@
       <p:grpSpPr/>
       <p:sp>
         <p:nvSpPr>
+          <p:cNvPr id="2" name="Rectangle 1"/>
+          <p:cNvSpPr/>
+          <p:nvPr/>
+        </p:nvSpPr>
+        <p:spPr>
+          <a:xfrm>
+            <a:off x="0" y="0"/>
+            <a:ext cx="256032" cy="6858000"/>
+          </a:xfrm>
+          <a:prstGeom prst="rect">
+            <a:avLst/>
+          </a:prstGeom>
+          <a:solidFill>
+            <a:srgbClr val="00FF41"/>
+          </a:solidFill>
+          <a:ln>
+            <a:noFill/>
+          </a:ln>
+          <a:effectLst/>
+        </p:spPr>
+        <p:style>
+          <a:lnRef idx="1">
+            <a:schemeClr val="accent1"/>
+          </a:lnRef>
+          <a:fillRef idx="3">
+            <a:schemeClr val="accent1"/>
+          </a:fillRef>
+          <a:effectRef idx="2">
+            <a:schemeClr val="accent1"/>
+          </a:effectRef>
+          <a:fontRef idx="minor">
+            <a:schemeClr val="lt1"/>
+          </a:fontRef>
+        </p:style>
+        <p:txBody>
+          <a:bodyPr rtlCol="0" anchor="ctr"/>
+          <a:lstStyle/>
+          <a:p>
+            <a:pPr algn="ctr"/>
+          </a:p>
+        </p:txBody>
+      </p:sp>
+      <p:sp>
+        <p:nvSpPr>
+          <p:cNvPr id="3" name="TextBox 2"/>
+          <p:cNvSpPr txBox="1"/>
+          <p:nvPr/>
+        </p:nvSpPr>
+        <p:spPr>
+          <a:xfrm>
+            <a:off x="822960" y="1417320"/>
+            <a:ext cx="2743200" cy="1097280"/>
+          </a:xfrm>
+          <a:prstGeom prst="rect">
+            <a:avLst/>
+          </a:prstGeom>
+          <a:noFill/>
+        </p:spPr>
+        <p:txBody>
+          <a:bodyPr wrap="square" anchor="t">
+            <a:spAutoFit/>
+          </a:bodyPr>
+          <a:lstStyle/>
+          <a:p>
+            <a:pPr algn="l">
+              <a:lnSpc>
+                <a:spcPct val="100000"/>
+              </a:lnSpc>
+            </a:pPr>
+            <a:r>
+              <a:rPr sz="6400" b="1">
+                <a:solidFill>
+                  <a:srgbClr val="00FF41"/>
+                </a:solidFill>
+                <a:latin typeface="Courier New"/>
+              </a:rPr>
+              <a:t>05</a:t>
+            </a:r>
+          </a:p>
+        </p:txBody>
+      </p:sp>
+      <p:sp>
+        <p:nvSpPr>
+          <p:cNvPr id="4" name="TextBox 3"/>
+          <p:cNvSpPr txBox="1"/>
+          <p:nvPr/>
+        </p:nvSpPr>
+        <p:spPr>
+          <a:xfrm>
+            <a:off x="841248" y="2487168"/>
+            <a:ext cx="10424160" cy="457200"/>
+          </a:xfrm>
+          <a:prstGeom prst="rect">
+            <a:avLst/>
+          </a:prstGeom>
+          <a:noFill/>
+        </p:spPr>
+        <p:txBody>
+          <a:bodyPr wrap="square" anchor="t">
+            <a:spAutoFit/>
+          </a:bodyPr>
+          <a:lstStyle/>
+          <a:p>
+            <a:pPr algn="l">
+              <a:lnSpc>
+                <a:spcPct val="100000"/>
+              </a:lnSpc>
+            </a:pPr>
+            <a:r>
+              <a:rPr sz="1500" b="1">
+                <a:solidFill>
+                  <a:srgbClr val="00FF41"/>
+                </a:solidFill>
+                <a:latin typeface="Courier New"/>
+              </a:rPr>
+              <a:t>SO WHAT - OUR NEXT DESIGN DIRECTION</a:t>
+            </a:r>
+          </a:p>
+        </p:txBody>
+      </p:sp>
+      <p:sp>
+        <p:nvSpPr>
+          <p:cNvPr id="5" name="TextBox 4"/>
+          <p:cNvSpPr txBox="1"/>
+          <p:nvPr/>
+        </p:nvSpPr>
+        <p:spPr>
+          <a:xfrm>
+            <a:off x="804672" y="2971800"/>
+            <a:ext cx="10607040" cy="1097280"/>
+          </a:xfrm>
+          <a:prstGeom prst="rect">
+            <a:avLst/>
+          </a:prstGeom>
+          <a:noFill/>
+        </p:spPr>
+        <p:txBody>
+          <a:bodyPr wrap="square" anchor="t">
+            <a:spAutoFit/>
+          </a:bodyPr>
+          <a:lstStyle/>
+          <a:p>
+            <a:pPr algn="l">
+              <a:lnSpc>
+                <a:spcPct val="103000"/>
+              </a:lnSpc>
+            </a:pPr>
+            <a:r>
+              <a:rPr sz="3800" b="1">
+                <a:solidFill>
+                  <a:srgbClr val="F5F7FA"/>
+                </a:solidFill>
+                <a:latin typeface="Arial"/>
+              </a:rPr>
+              <a:t>Verification opens the next design  ·  FigJam: 05  ·  carry into Wednesday</a:t>
+            </a:r>
+          </a:p>
+        </p:txBody>
+      </p:sp>
+      <p:sp>
+        <p:nvSpPr>
+          <p:cNvPr id="6" name="TextBox 5"/>
+          <p:cNvSpPr txBox="1"/>
+          <p:nvPr/>
+        </p:nvSpPr>
+        <p:spPr>
+          <a:xfrm>
+            <a:off x="841248" y="4224528"/>
+            <a:ext cx="10424160" cy="1737360"/>
+          </a:xfrm>
+          <a:prstGeom prst="rect">
+            <a:avLst/>
+          </a:prstGeom>
+          <a:noFill/>
+        </p:spPr>
+        <p:txBody>
+          <a:bodyPr wrap="square" anchor="t">
+            <a:spAutoFit/>
+          </a:bodyPr>
+          <a:lstStyle/>
+          <a:p>
+            <a:pPr algn="l">
+              <a:lnSpc>
+                <a:spcPct val="128000"/>
+              </a:lnSpc>
+            </a:pPr>
+            <a:r>
+              <a:rPr sz="1700" b="1">
+                <a:solidFill>
+                  <a:srgbClr val="00FF41"/>
+                </a:solidFill>
+                <a:latin typeface="Arial"/>
+              </a:rPr>
+              <a:t>→  </a:t>
+            </a:r>
+            <a:r>
+              <a:rPr sz="1700" b="0">
+                <a:solidFill>
+                  <a:srgbClr val="8A94A6"/>
+                </a:solidFill>
+                <a:latin typeface="Arial"/>
+              </a:rPr>
+              <a:t>If the design does NOT move the value, what WOULD?  Another design that could achieve it.</a:t>
+            </a:r>
+          </a:p>
+          <a:p>
+            <a:pPr algn="l">
+              <a:lnSpc>
+                <a:spcPct val="128000"/>
+              </a:lnSpc>
+            </a:pPr>
+            <a:r>
+              <a:rPr sz="1700" b="1">
+                <a:solidFill>
+                  <a:srgbClr val="00FF41"/>
+                </a:solidFill>
+                <a:latin typeface="Arial"/>
+              </a:rPr>
+              <a:t>→  </a:t>
+            </a:r>
+            <a:r>
+              <a:rPr sz="1700" b="0">
+                <a:solidFill>
+                  <a:srgbClr val="8A94A6"/>
+                </a:solidFill>
+                <a:latin typeface="Arial"/>
+              </a:rPr>
+              <a:t>What should the next cycle discover?</a:t>
+            </a:r>
+          </a:p>
+          <a:p>
+            <a:pPr algn="l">
+              <a:lnSpc>
+                <a:spcPct val="128000"/>
+              </a:lnSpc>
+            </a:pPr>
+            <a:r>
+              <a:rPr sz="1700" b="1">
+                <a:solidFill>
+                  <a:srgbClr val="00FF41"/>
+                </a:solidFill>
+                <a:latin typeface="Arial"/>
+              </a:rPr>
+              <a:t>→  </a:t>
+            </a:r>
+            <a:r>
+              <a:rPr sz="1700" b="0">
+                <a:solidFill>
+                  <a:srgbClr val="8A94A6"/>
+                </a:solidFill>
+                <a:latin typeface="Arial"/>
+              </a:rPr>
+              <a:t>2-3 directions the evidence points to - you carry these into Wednesday.</a:t>
+            </a:r>
+          </a:p>
+        </p:txBody>
+      </p:sp>
+      <p:sp>
+        <p:nvSpPr>
+          <p:cNvPr id="7" name="TextBox 6"/>
+          <p:cNvSpPr txBox="1"/>
+          <p:nvPr/>
+        </p:nvSpPr>
+        <p:spPr>
+          <a:xfrm>
+            <a:off x="640080" y="6355080"/>
+            <a:ext cx="10972800" cy="365760"/>
+          </a:xfrm>
+          <a:prstGeom prst="rect">
+            <a:avLst/>
+          </a:prstGeom>
+          <a:noFill/>
+        </p:spPr>
+        <p:txBody>
+          <a:bodyPr wrap="square" anchor="t">
+            <a:spAutoFit/>
+          </a:bodyPr>
+          <a:lstStyle/>
+          <a:p>
+            <a:pPr algn="l">
+              <a:lnSpc>
+                <a:spcPct val="100000"/>
+              </a:lnSpc>
+            </a:pPr>
+            <a:r>
+              <a:rPr sz="1000" b="0">
+                <a:solidFill>
+                  <a:srgbClr val="5A6474"/>
+                </a:solidFill>
+                <a:latin typeface="Courier New"/>
+              </a:rPr>
+              <a:t>Value Verification · TECHIE 1121 · Cornell Tech · Tue Jul 28</a:t>
+            </a:r>
+          </a:p>
+        </p:txBody>
+      </p:sp>
+    </p:spTree>
+  </p:cSld>
+  <p:clrMapOvr>
+    <a:masterClrMapping/>
+  </p:clrMapOvr>
+</p:sld>
+</file>
+
+<file path=ppt/slides/slide11.xml><?xml version="1.0" encoding="utf-8"?>
+<p:sld xmlns:a="http://schemas.openxmlformats.org/drawingml/2006/main" xmlns:p="http://schemas.openxmlformats.org/presentationml/2006/main" xmlns:r="http://schemas.openxmlformats.org/officeDocument/2006/relationships">
+  <p:cSld>
+    <p:bg>
+      <p:bgPr>
+        <a:solidFill>
+          <a:srgbClr val="0B0E14"/>
+        </a:solidFill>
+        <a:effectLst/>
+      </p:bgPr>
+    </p:bg>
+    <p:spTree>
+      <p:nvGrpSpPr>
+        <p:cNvPr id="1" name=""/>
+        <p:cNvGrpSpPr/>
+        <p:nvPr/>
+      </p:nvGrpSpPr>
+      <p:grpSpPr/>
+      <p:sp>
+        <p:nvSpPr>
           <p:cNvPr id="2" name="TextBox 1"/>
           <p:cNvSpPr txBox="1"/>
           <p:nvPr/>
@@ -4842,7 +5237,7 @@
                 </a:solidFill>
                 <a:latin typeface="Arial"/>
               </a:rPr>
-              <a:t>Four section headers follow — they are the spine of your talk.</a:t>
+              <a:t>Five section headers follow — they MIRROR the FigJam canvas blocks. The canvas is where you work it out; this deck is where you present it.</a:t>
             </a:r>
           </a:p>
           <a:p>
@@ -4867,7 +5262,7 @@
                 </a:solidFill>
                 <a:latin typeface="Arial"/>
               </a:rPr>
-              <a:t>Sections 01, 02, 04 are the TEAM's. Section 03 has one named slide per person — your individual contribution.</a:t>
+              <a:t>Sections 01, 02, 03, 05 are the TEAM's. Section 04 has one named slide per person — the paper you found and READ.</a:t>
             </a:r>
           </a:p>
           <a:p>
@@ -4917,7 +5312,7 @@
                 </a:solidFill>
                 <a:latin typeface="Arial"/>
               </a:rPr>
-              <a:t>No time to run full tests today - so RESEARCH the method, and what interventions have actually moved this value.</a:t>
+              <a:t>No full user study today — for '03 What we found', apply your metrics with a partner (speculating is fine).</a:t>
             </a:r>
           </a:p>
           <a:p>
@@ -4942,7 +5337,7 @@
                 </a:solidFill>
                 <a:latin typeface="Arial"/>
               </a:rPr>
-              <a:t>Real citations only — if you can't find the paper, leave the claim out.</a:t>
+              <a:t>Each person READS one real paper (not just an AI summary) — that's section 04 / the FigJam Outlook.</a:t>
             </a:r>
           </a:p>
           <a:p>
@@ -4967,7 +5362,32 @@
                 </a:solidFill>
                 <a:latin typeface="Arial"/>
               </a:rPr>
-              <a:t>Your reflection is NOT a document — it goes in your own lane on the team FigJam canvas.</a:t>
+              <a:t>Real citations only — if you can't find the paper, leave the claim out.</a:t>
+            </a:r>
+          </a:p>
+          <a:p>
+            <a:pPr algn="l">
+              <a:lnSpc>
+                <a:spcPct val="130000"/>
+              </a:lnSpc>
+            </a:pPr>
+            <a:r>
+              <a:rPr sz="1900" b="1">
+                <a:solidFill>
+                  <a:srgbClr val="00FF41"/>
+                </a:solidFill>
+                <a:latin typeface="Arial"/>
+              </a:rPr>
+              <a:t>•  </a:t>
+            </a:r>
+            <a:r>
+              <a:rPr sz="1900" b="0">
+                <a:solidFill>
+                  <a:srgbClr val="F5F7FA"/>
+                </a:solidFill>
+                <a:latin typeface="Arial"/>
+              </a:rPr>
+              <a:t>Your reflection is NOT in this deck — it goes in your own lane on the team FigJam canvas (block 06).</a:t>
             </a:r>
           </a:p>
           <a:p>
@@ -5218,7 +5638,7 @@
                 </a:solidFill>
                 <a:latin typeface="Arial"/>
               </a:rPr>
-              <a:t>Discovery - operationalize the value</a:t>
+              <a:t>Operationalize the value  ·  FigJam: Value Definition</a:t>
             </a:r>
           </a:p>
         </p:txBody>
@@ -5542,7 +5962,7 @@
                 </a:solidFill>
                 <a:latin typeface="Arial"/>
               </a:rPr>
-              <a:t>Pick a method per lens - we won't run them all today</a:t>
+              <a:t>A method per lens + how others measure it  ·  FigJam: Brainstorm 1-2-3 + 02</a:t>
             </a:r>
           </a:p>
         </p:txBody>
@@ -5590,7 +6010,7 @@
                 </a:solidFill>
                 <a:latin typeface="Arial"/>
               </a:rPr>
-              <a:t>BEHAVIOR - do users ACT differently?  -&gt;  hard to test in class, so we RESEARCH it: [ method + what studies show ].</a:t>
+              <a:t>BEHAVIOR - do users ACT differently?  -&gt;  [ method + metric ].</a:t>
             </a:r>
           </a:p>
           <a:p>
@@ -5615,7 +6035,7 @@
                 </a:solidFill>
                 <a:latin typeface="Arial"/>
               </a:rPr>
-              <a:t>UNDERSTANDING - do they GRASP the value?  -&gt;  a quick check with fellow students is possible: [ method ].</a:t>
+              <a:t>UNDERSTANDING - do they GRASP the value?  -&gt;  [ method + metric ].</a:t>
             </a:r>
           </a:p>
           <a:p>
@@ -5640,7 +6060,32 @@
                 </a:solidFill>
                 <a:latin typeface="Arial"/>
               </a:rPr>
-              <a:t>AFFECT - do they FEEL differently?  -&gt;  a quick check with fellow students is possible: [ method ].</a:t>
+              <a:t>AFFECT - do they FEEL differently?  -&gt;  [ method + metric ].</a:t>
+            </a:r>
+          </a:p>
+          <a:p>
+            <a:pPr algn="l">
+              <a:lnSpc>
+                <a:spcPct val="128000"/>
+              </a:lnSpc>
+            </a:pPr>
+            <a:r>
+              <a:rPr sz="1700" b="1">
+                <a:solidFill>
+                  <a:srgbClr val="00FF41"/>
+                </a:solidFill>
+                <a:latin typeface="Arial"/>
+              </a:rPr>
+              <a:t>→  </a:t>
+            </a:r>
+            <a:r>
+              <a:rPr sz="1700" b="0">
+                <a:solidFill>
+                  <a:srgbClr val="8A94A6"/>
+                </a:solidFill>
+                <a:latin typeface="Arial"/>
+              </a:rPr>
+              <a:t>How do OTHERS measure it, and which INSTRUMENT would we borrow?  (UEQ / HRI / METUX / slop)</a:t>
             </a:r>
           </a:p>
         </p:txBody>
@@ -5827,7 +6272,7 @@
                 </a:solidFill>
                 <a:latin typeface="Courier New"/>
               </a:rPr>
-              <a:t>DESIGN INTERVENTIONS THAT MOVED THIS VALUE</a:t>
+              <a:t>WHAT WE FOUND</a:t>
             </a:r>
           </a:p>
         </p:txBody>
@@ -5866,7 +6311,7 @@
                 </a:solidFill>
                 <a:latin typeface="Arial"/>
               </a:rPr>
-              <a:t>Research - what has actually worked? (each member owns a slide)</a:t>
+              <a:t>Run the check - speculate with a partner if needed  ·  FigJam: 03</a:t>
             </a:r>
           </a:p>
         </p:txBody>
@@ -5914,7 +6359,7 @@
                 </a:solidFill>
                 <a:latin typeface="Arial"/>
               </a:rPr>
-              <a:t>Each member presents their OWN researched intervention - the named slides that follow.</a:t>
+              <a:t>Apply your metrics with a partner - it is fine to SPECULATE today; real verification takes time.</a:t>
             </a:r>
           </a:p>
           <a:p>
@@ -5939,7 +6384,7 @@
                 </a:solidFill>
                 <a:latin typeface="Arial"/>
               </a:rPr>
-              <a:t>A real design intervention tried for this value, and its result: worked / mixed / failed.</a:t>
+              <a:t>BEHAVIOR: do they ACT differently?   UNDERSTANDING: do they GRASP it?   AFFECT: do they FEEL differently?</a:t>
             </a:r>
           </a:p>
           <a:p>
@@ -5964,7 +6409,7 @@
                 </a:solidFill>
                 <a:latin typeface="Arial"/>
               </a:rPr>
-              <a:t>Real sources only - never invent a citation.</a:t>
+              <a:t>Green = it works.  Red = it does not.  Does the design move the value - for whom, and who is left out?</a:t>
             </a:r>
           </a:p>
         </p:txBody>
@@ -6036,53 +6481,14 @@
       <p:grpSpPr/>
       <p:sp>
         <p:nvSpPr>
-          <p:cNvPr id="2" name="TextBox 1"/>
-          <p:cNvSpPr txBox="1"/>
-          <p:nvPr/>
-        </p:nvSpPr>
-        <p:spPr>
-          <a:xfrm>
-            <a:off x="640080" y="502920"/>
-            <a:ext cx="10058400" cy="365760"/>
-          </a:xfrm>
-          <a:prstGeom prst="rect">
-            <a:avLst/>
-          </a:prstGeom>
-          <a:noFill/>
-        </p:spPr>
-        <p:txBody>
-          <a:bodyPr wrap="square" anchor="t">
-            <a:spAutoFit/>
-          </a:bodyPr>
-          <a:lstStyle/>
-          <a:p>
-            <a:pPr algn="l">
-              <a:lnSpc>
-                <a:spcPct val="100000"/>
-              </a:lnSpc>
-            </a:pPr>
-            <a:r>
-              <a:rPr sz="1300" b="1">
-                <a:solidFill>
-                  <a:srgbClr val="00FF41"/>
-                </a:solidFill>
-                <a:latin typeface="Courier New"/>
-              </a:rPr>
-              <a:t>03.1  ·  YOUR SLIDE (your individual contribution)</a:t>
-            </a:r>
-          </a:p>
-        </p:txBody>
-      </p:sp>
-      <p:sp>
-        <p:nvSpPr>
-          <p:cNvPr id="3" name="Rectangle 2"/>
+          <p:cNvPr id="2" name="Rectangle 1"/>
           <p:cNvSpPr/>
           <p:nvPr/>
         </p:nvSpPr>
         <p:spPr>
           <a:xfrm>
-            <a:off x="640080" y="932688"/>
-            <a:ext cx="822960" cy="73152"/>
+            <a:off x="0" y="0"/>
+            <a:ext cx="256032" cy="6858000"/>
           </a:xfrm>
           <a:prstGeom prst="rect">
             <a:avLst/>
@@ -6119,14 +6525,14 @@
       </p:sp>
       <p:sp>
         <p:nvSpPr>
-          <p:cNvPr id="4" name="TextBox 3"/>
+          <p:cNvPr id="3" name="TextBox 2"/>
           <p:cNvSpPr txBox="1"/>
           <p:nvPr/>
         </p:nvSpPr>
         <p:spPr>
           <a:xfrm>
-            <a:off x="640080" y="1170432"/>
-            <a:ext cx="10972800" cy="914400"/>
+            <a:off x="822960" y="1417320"/>
+            <a:ext cx="2743200" cy="1097280"/>
           </a:xfrm>
           <a:prstGeom prst="rect">
             <a:avLst/>
@@ -6145,27 +6551,27 @@
               </a:lnSpc>
             </a:pPr>
             <a:r>
-              <a:rPr sz="3600" b="1">
-                <a:solidFill>
-                  <a:srgbClr val="F5F7FA"/>
-                </a:solidFill>
-                <a:latin typeface="Arial"/>
-              </a:rPr>
-              <a:t>Emily Tai</a:t>
-            </a:r>
-          </a:p>
-        </p:txBody>
-      </p:sp>
-      <p:sp>
-        <p:nvSpPr>
-          <p:cNvPr id="5" name="TextBox 4"/>
+              <a:rPr sz="6400" b="1">
+                <a:solidFill>
+                  <a:srgbClr val="00FF41"/>
+                </a:solidFill>
+                <a:latin typeface="Courier New"/>
+              </a:rPr>
+              <a:t>04</a:t>
+            </a:r>
+          </a:p>
+        </p:txBody>
+      </p:sp>
+      <p:sp>
+        <p:nvSpPr>
+          <p:cNvPr id="4" name="TextBox 3"/>
           <p:cNvSpPr txBox="1"/>
           <p:nvPr/>
         </p:nvSpPr>
         <p:spPr>
           <a:xfrm>
-            <a:off x="658368" y="2286000"/>
-            <a:ext cx="10881360" cy="2834640"/>
+            <a:off x="841248" y="2487168"/>
+            <a:ext cx="10424160" cy="457200"/>
           </a:xfrm>
           <a:prstGeom prst="rect">
             <a:avLst/>
@@ -6174,175 +6580,6 @@
         </p:spPr>
         <p:txBody>
           <a:bodyPr wrap="square" anchor="t">
-            <a:spAutoFit/>
-          </a:bodyPr>
-          <a:lstStyle/>
-          <a:p>
-            <a:pPr algn="l">
-              <a:lnSpc>
-                <a:spcPct val="134000"/>
-              </a:lnSpc>
-            </a:pPr>
-            <a:r>
-              <a:rPr sz="1900" b="1">
-                <a:solidFill>
-                  <a:srgbClr val="00FF41"/>
-                </a:solidFill>
-                <a:latin typeface="Arial"/>
-              </a:rPr>
-              <a:t>→  </a:t>
-            </a:r>
-            <a:r>
-              <a:rPr sz="1900" b="0">
-                <a:solidFill>
-                  <a:srgbClr val="F5F7FA"/>
-                </a:solidFill>
-                <a:latin typeface="Arial"/>
-              </a:rPr>
-              <a:t>A design intervention someone tried to move THIS value - [ what they did ]</a:t>
-            </a:r>
-          </a:p>
-          <a:p>
-            <a:pPr algn="l">
-              <a:lnSpc>
-                <a:spcPct val="134000"/>
-              </a:lnSpc>
-            </a:pPr>
-            <a:r>
-              <a:rPr sz="1900" b="1">
-                <a:solidFill>
-                  <a:srgbClr val="00FF41"/>
-                </a:solidFill>
-                <a:latin typeface="Arial"/>
-              </a:rPr>
-              <a:t>→  </a:t>
-            </a:r>
-            <a:r>
-              <a:rPr sz="1900" b="0">
-                <a:solidFill>
-                  <a:srgbClr val="F5F7FA"/>
-                </a:solidFill>
-                <a:latin typeface="Arial"/>
-              </a:rPr>
-              <a:t>The result - [ worked / mixed / failed ] - and the real source [ author, year ]</a:t>
-            </a:r>
-          </a:p>
-          <a:p>
-            <a:pPr algn="l">
-              <a:lnSpc>
-                <a:spcPct val="134000"/>
-              </a:lnSpc>
-            </a:pPr>
-            <a:r>
-              <a:rPr sz="1900" b="1">
-                <a:solidFill>
-                  <a:srgbClr val="00FF41"/>
-                </a:solidFill>
-                <a:latin typeface="Arial"/>
-              </a:rPr>
-              <a:t>→  </a:t>
-            </a:r>
-            <a:r>
-              <a:rPr sz="1900" b="0">
-                <a:solidFill>
-                  <a:srgbClr val="F5F7FA"/>
-                </a:solidFill>
-                <a:latin typeface="Arial"/>
-              </a:rPr>
-              <a:t>How you'd test it - [ method ]  (behavior = research it; understanding/affect = quick student check)</a:t>
-            </a:r>
-          </a:p>
-          <a:p>
-            <a:pPr algn="l">
-              <a:lnSpc>
-                <a:spcPct val="134000"/>
-              </a:lnSpc>
-            </a:pPr>
-            <a:r>
-              <a:rPr sz="1900" b="1">
-                <a:solidFill>
-                  <a:srgbClr val="00FF41"/>
-                </a:solidFill>
-                <a:latin typeface="Arial"/>
-              </a:rPr>
-              <a:t>→  </a:t>
-            </a:r>
-            <a:r>
-              <a:rPr sz="1900" b="0">
-                <a:solidFill>
-                  <a:srgbClr val="F5F7FA"/>
-                </a:solidFill>
-                <a:latin typeface="Arial"/>
-              </a:rPr>
-              <a:t>Does it support or challenge our design direction? - [ ___ ]</a:t>
-            </a:r>
-          </a:p>
-        </p:txBody>
-      </p:sp>
-      <p:sp>
-        <p:nvSpPr>
-          <p:cNvPr id="6" name="Rounded Rectangle 5"/>
-          <p:cNvSpPr/>
-          <p:nvPr/>
-        </p:nvSpPr>
-        <p:spPr>
-          <a:xfrm>
-            <a:off x="640080" y="5440680"/>
-            <a:ext cx="10881360" cy="658368"/>
-          </a:xfrm>
-          <a:prstGeom prst="roundRect">
-            <a:avLst/>
-          </a:prstGeom>
-          <a:solidFill>
-            <a:srgbClr val="151B26"/>
-          </a:solidFill>
-          <a:ln w="19050">
-            <a:solidFill>
-              <a:srgbClr val="00FF41"/>
-            </a:solidFill>
-          </a:ln>
-          <a:effectLst/>
-        </p:spPr>
-        <p:style>
-          <a:lnRef idx="1">
-            <a:schemeClr val="accent1"/>
-          </a:lnRef>
-          <a:fillRef idx="3">
-            <a:schemeClr val="accent1"/>
-          </a:fillRef>
-          <a:effectRef idx="2">
-            <a:schemeClr val="accent1"/>
-          </a:effectRef>
-          <a:fontRef idx="minor">
-            <a:schemeClr val="lt1"/>
-          </a:fontRef>
-        </p:style>
-        <p:txBody>
-          <a:bodyPr rtlCol="0" anchor="ctr"/>
-          <a:lstStyle/>
-          <a:p>
-            <a:pPr algn="ctr"/>
-          </a:p>
-        </p:txBody>
-      </p:sp>
-      <p:sp>
-        <p:nvSpPr>
-          <p:cNvPr id="7" name="TextBox 6"/>
-          <p:cNvSpPr txBox="1"/>
-          <p:nvPr/>
-        </p:nvSpPr>
-        <p:spPr>
-          <a:xfrm>
-            <a:off x="914400" y="5440680"/>
-            <a:ext cx="10332720" cy="658368"/>
-          </a:xfrm>
-          <a:prstGeom prst="rect">
-            <a:avLst/>
-          </a:prstGeom>
-          <a:noFill/>
-        </p:spPr>
-        <p:txBody>
-          <a:bodyPr wrap="square" anchor="ctr">
             <a:spAutoFit/>
           </a:bodyPr>
           <a:lstStyle/>
@@ -6353,29 +6590,157 @@
               </a:lnSpc>
             </a:pPr>
             <a:r>
-              <a:rPr sz="1600" b="1">
+              <a:rPr sz="1500" b="1">
                 <a:solidFill>
                   <a:srgbClr val="00FF41"/>
                 </a:solidFill>
-                <a:latin typeface="Arial"/>
-              </a:rPr>
-              <a:t>▸  </a:t>
-            </a:r>
-            <a:r>
-              <a:rPr sz="1500" b="1">
+                <a:latin typeface="Courier New"/>
+              </a:rPr>
+              <a:t>WHAT RELATED RESEARCH FOUND</a:t>
+            </a:r>
+          </a:p>
+        </p:txBody>
+      </p:sp>
+      <p:sp>
+        <p:nvSpPr>
+          <p:cNvPr id="5" name="TextBox 4"/>
+          <p:cNvSpPr txBox="1"/>
+          <p:nvPr/>
+        </p:nvSpPr>
+        <p:spPr>
+          <a:xfrm>
+            <a:off x="804672" y="2971800"/>
+            <a:ext cx="10607040" cy="1097280"/>
+          </a:xfrm>
+          <a:prstGeom prst="rect">
+            <a:avLst/>
+          </a:prstGeom>
+          <a:noFill/>
+        </p:spPr>
+        <p:txBody>
+          <a:bodyPr wrap="square" anchor="t">
+            <a:spAutoFit/>
+          </a:bodyPr>
+          <a:lstStyle/>
+          <a:p>
+            <a:pPr algn="l">
+              <a:lnSpc>
+                <a:spcPct val="103000"/>
+              </a:lnSpc>
+            </a:pPr>
+            <a:r>
+              <a:rPr sz="3800" b="1">
                 <a:solidFill>
                   <a:srgbClr val="F5F7FA"/>
                 </a:solidFill>
                 <a:latin typeface="Arial"/>
               </a:rPr>
-              <a:t>This slide is yours. Add more slides behind it if you need them - keep your name on them.</a:t>
-            </a:r>
-          </a:p>
-        </p:txBody>
-      </p:sp>
-      <p:sp>
-        <p:nvSpPr>
-          <p:cNvPr id="8" name="TextBox 7"/>
+              <a:t>Each member READS one real paper  ·  FigJam: 04 Outlook  ·  the named slides follow</a:t>
+            </a:r>
+          </a:p>
+        </p:txBody>
+      </p:sp>
+      <p:sp>
+        <p:nvSpPr>
+          <p:cNvPr id="6" name="TextBox 5"/>
+          <p:cNvSpPr txBox="1"/>
+          <p:nvPr/>
+        </p:nvSpPr>
+        <p:spPr>
+          <a:xfrm>
+            <a:off x="841248" y="4224528"/>
+            <a:ext cx="10424160" cy="1737360"/>
+          </a:xfrm>
+          <a:prstGeom prst="rect">
+            <a:avLst/>
+          </a:prstGeom>
+          <a:noFill/>
+        </p:spPr>
+        <p:txBody>
+          <a:bodyPr wrap="square" anchor="t">
+            <a:spAutoFit/>
+          </a:bodyPr>
+          <a:lstStyle/>
+          <a:p>
+            <a:pPr algn="l">
+              <a:lnSpc>
+                <a:spcPct val="128000"/>
+              </a:lnSpc>
+            </a:pPr>
+            <a:r>
+              <a:rPr sz="1700" b="1">
+                <a:solidFill>
+                  <a:srgbClr val="00FF41"/>
+                </a:solidFill>
+                <a:latin typeface="Arial"/>
+              </a:rPr>
+              <a:t>→  </a:t>
+            </a:r>
+            <a:r>
+              <a:rPr sz="1700" b="0">
+                <a:solidFill>
+                  <a:srgbClr val="8A94A6"/>
+                </a:solidFill>
+                <a:latin typeface="Arial"/>
+              </a:rPr>
+              <a:t>Each member presents their OWN paper - found via AI academic search (Claude / ChatGPT / Elicit / Semantic Scholar / Scholar Labs), then READ.</a:t>
+            </a:r>
+          </a:p>
+          <a:p>
+            <a:pPr algn="l">
+              <a:lnSpc>
+                <a:spcPct val="128000"/>
+              </a:lnSpc>
+            </a:pPr>
+            <a:r>
+              <a:rPr sz="1700" b="1">
+                <a:solidFill>
+                  <a:srgbClr val="00FF41"/>
+                </a:solidFill>
+                <a:latin typeface="Arial"/>
+              </a:rPr>
+              <a:t>→  </a:t>
+            </a:r>
+            <a:r>
+              <a:rPr sz="1700" b="0">
+                <a:solidFill>
+                  <a:srgbClr val="8A94A6"/>
+                </a:solidFill>
+                <a:latin typeface="Arial"/>
+              </a:rPr>
+              <a:t>Source (author, year)  -  what WORKED  -  what FAILED (avoid this).</a:t>
+            </a:r>
+          </a:p>
+          <a:p>
+            <a:pPr algn="l">
+              <a:lnSpc>
+                <a:spcPct val="128000"/>
+              </a:lnSpc>
+            </a:pPr>
+            <a:r>
+              <a:rPr sz="1700" b="1">
+                <a:solidFill>
+                  <a:srgbClr val="00FF41"/>
+                </a:solidFill>
+                <a:latin typeface="Arial"/>
+              </a:rPr>
+              <a:t>→  </a:t>
+            </a:r>
+            <a:r>
+              <a:rPr sz="1700" b="0">
+                <a:solidFill>
+                  <a:srgbClr val="8A94A6"/>
+                </a:solidFill>
+                <a:latin typeface="Arial"/>
+              </a:rPr>
+              <a:t>Real papers only, actually read - never invent a citation, never rely on an AI summary alone.</a:t>
+            </a:r>
+          </a:p>
+        </p:txBody>
+      </p:sp>
+      <p:sp>
+        <p:nvSpPr>
+          <p:cNvPr id="7" name="TextBox 6"/>
           <p:cNvSpPr txBox="1"/>
           <p:nvPr/>
         </p:nvSpPr>
@@ -6472,7 +6837,7 @@
                 </a:solidFill>
                 <a:latin typeface="Courier New"/>
               </a:rPr>
-              <a:t>03.2  ·  YOUR SLIDE (your individual contribution)</a:t>
+              <a:t>04.1  ·  YOUR PAPER (your individual contribution)</a:t>
             </a:r>
           </a:p>
         </p:txBody>
@@ -6555,7 +6920,7 @@
                 </a:solidFill>
                 <a:latin typeface="Arial"/>
               </a:rPr>
-              <a:t>Kylie Cheung</a:t>
+              <a:t>Emily Tai</a:t>
             </a:r>
           </a:p>
         </p:txBody>
@@ -6603,7 +6968,7 @@
                 </a:solidFill>
                 <a:latin typeface="Arial"/>
               </a:rPr>
-              <a:t>A design intervention someone tried to move THIS value - [ what they did ]</a:t>
+              <a:t>The paper you found + READ - [ author, year, title ]  (AI search to FIND it; then read the actual paper)</a:t>
             </a:r>
           </a:p>
           <a:p>
@@ -6628,7 +6993,7 @@
                 </a:solidFill>
                 <a:latin typeface="Arial"/>
               </a:rPr>
-              <a:t>The result - [ worked / mixed / failed ] - and the real source [ author, year ]</a:t>
+              <a:t>The design intervention they tried to move THIS value - [ what they did ]</a:t>
             </a:r>
           </a:p>
           <a:p>
@@ -6653,7 +7018,7 @@
                 </a:solidFill>
                 <a:latin typeface="Arial"/>
               </a:rPr>
-              <a:t>How you'd test it - [ method ]  (behavior = research it; understanding/affect = quick student check)</a:t>
+              <a:t>What WORKED - [ ___ ]     |     What FAILED / to avoid - [ ___ ]</a:t>
             </a:r>
           </a:p>
           <a:p>
@@ -6772,7 +7137,7 @@
                 </a:solidFill>
                 <a:latin typeface="Arial"/>
               </a:rPr>
-              <a:t>This slide is yours. Add more slides behind it if you need them - keep your name on them.</a:t>
+              <a:t>This slide is yours - the paper you actually read. Add more behind it if you need to - keep your name on them.</a:t>
             </a:r>
           </a:p>
         </p:txBody>
@@ -6876,7 +7241,7 @@
                 </a:solidFill>
                 <a:latin typeface="Courier New"/>
               </a:rPr>
-              <a:t>03.3  ·  YOUR SLIDE (your individual contribution)</a:t>
+              <a:t>04.2  ·  YOUR PAPER (your individual contribution)</a:t>
             </a:r>
           </a:p>
         </p:txBody>
@@ -6959,7 +7324,7 @@
                 </a:solidFill>
                 <a:latin typeface="Arial"/>
               </a:rPr>
-              <a:t>Aria Sharma</a:t>
+              <a:t>Kylie Cheung</a:t>
             </a:r>
           </a:p>
         </p:txBody>
@@ -7007,7 +7372,7 @@
                 </a:solidFill>
                 <a:latin typeface="Arial"/>
               </a:rPr>
-              <a:t>A design intervention someone tried to move THIS value - [ what they did ]</a:t>
+              <a:t>The paper you found + READ - [ author, year, title ]  (AI search to FIND it; then read the actual paper)</a:t>
             </a:r>
           </a:p>
           <a:p>
@@ -7032,7 +7397,7 @@
                 </a:solidFill>
                 <a:latin typeface="Arial"/>
               </a:rPr>
-              <a:t>The result - [ worked / mixed / failed ] - and the real source [ author, year ]</a:t>
+              <a:t>The design intervention they tried to move THIS value - [ what they did ]</a:t>
             </a:r>
           </a:p>
           <a:p>
@@ -7057,7 +7422,7 @@
                 </a:solidFill>
                 <a:latin typeface="Arial"/>
               </a:rPr>
-              <a:t>How you'd test it - [ method ]  (behavior = research it; understanding/affect = quick student check)</a:t>
+              <a:t>What WORKED - [ ___ ]     |     What FAILED / to avoid - [ ___ ]</a:t>
             </a:r>
           </a:p>
           <a:p>
@@ -7176,7 +7541,7 @@
                 </a:solidFill>
                 <a:latin typeface="Arial"/>
               </a:rPr>
-              <a:t>This slide is yours. Add more slides behind it if you need them - keep your name on them.</a:t>
+              <a:t>This slide is yours - the paper you actually read. Add more behind it if you need to - keep your name on them.</a:t>
             </a:r>
           </a:p>
         </p:txBody>
@@ -7248,14 +7613,53 @@
       <p:grpSpPr/>
       <p:sp>
         <p:nvSpPr>
-          <p:cNvPr id="2" name="Rectangle 1"/>
+          <p:cNvPr id="2" name="TextBox 1"/>
+          <p:cNvSpPr txBox="1"/>
+          <p:nvPr/>
+        </p:nvSpPr>
+        <p:spPr>
+          <a:xfrm>
+            <a:off x="640080" y="502920"/>
+            <a:ext cx="10058400" cy="365760"/>
+          </a:xfrm>
+          <a:prstGeom prst="rect">
+            <a:avLst/>
+          </a:prstGeom>
+          <a:noFill/>
+        </p:spPr>
+        <p:txBody>
+          <a:bodyPr wrap="square" anchor="t">
+            <a:spAutoFit/>
+          </a:bodyPr>
+          <a:lstStyle/>
+          <a:p>
+            <a:pPr algn="l">
+              <a:lnSpc>
+                <a:spcPct val="100000"/>
+              </a:lnSpc>
+            </a:pPr>
+            <a:r>
+              <a:rPr sz="1300" b="1">
+                <a:solidFill>
+                  <a:srgbClr val="00FF41"/>
+                </a:solidFill>
+                <a:latin typeface="Courier New"/>
+              </a:rPr>
+              <a:t>04.3  ·  YOUR PAPER (your individual contribution)</a:t>
+            </a:r>
+          </a:p>
+        </p:txBody>
+      </p:sp>
+      <p:sp>
+        <p:nvSpPr>
+          <p:cNvPr id="3" name="Rectangle 2"/>
           <p:cNvSpPr/>
           <p:nvPr/>
         </p:nvSpPr>
         <p:spPr>
           <a:xfrm>
-            <a:off x="0" y="0"/>
-            <a:ext cx="256032" cy="6858000"/>
+            <a:off x="640080" y="932688"/>
+            <a:ext cx="822960" cy="73152"/>
           </a:xfrm>
           <a:prstGeom prst="rect">
             <a:avLst/>
@@ -7292,14 +7696,14 @@
       </p:sp>
       <p:sp>
         <p:nvSpPr>
-          <p:cNvPr id="3" name="TextBox 2"/>
+          <p:cNvPr id="4" name="TextBox 3"/>
           <p:cNvSpPr txBox="1"/>
           <p:nvPr/>
         </p:nvSpPr>
         <p:spPr>
           <a:xfrm>
-            <a:off x="822960" y="1417320"/>
-            <a:ext cx="2743200" cy="1097280"/>
+            <a:off x="640080" y="1170432"/>
+            <a:ext cx="10972800" cy="914400"/>
           </a:xfrm>
           <a:prstGeom prst="rect">
             <a:avLst/>
@@ -7318,27 +7722,27 @@
               </a:lnSpc>
             </a:pPr>
             <a:r>
-              <a:rPr sz="6400" b="1">
-                <a:solidFill>
-                  <a:srgbClr val="00FF41"/>
-                </a:solidFill>
-                <a:latin typeface="Courier New"/>
-              </a:rPr>
-              <a:t>04</a:t>
-            </a:r>
-          </a:p>
-        </p:txBody>
-      </p:sp>
-      <p:sp>
-        <p:nvSpPr>
-          <p:cNvPr id="4" name="TextBox 3"/>
+              <a:rPr sz="3600" b="1">
+                <a:solidFill>
+                  <a:srgbClr val="F5F7FA"/>
+                </a:solidFill>
+                <a:latin typeface="Arial"/>
+              </a:rPr>
+              <a:t>Aria Sharma</a:t>
+            </a:r>
+          </a:p>
+        </p:txBody>
+      </p:sp>
+      <p:sp>
+        <p:nvSpPr>
+          <p:cNvPr id="5" name="TextBox 4"/>
           <p:cNvSpPr txBox="1"/>
           <p:nvPr/>
         </p:nvSpPr>
         <p:spPr>
           <a:xfrm>
-            <a:off x="841248" y="2487168"/>
-            <a:ext cx="10424160" cy="457200"/>
+            <a:off x="658368" y="2286000"/>
+            <a:ext cx="10881360" cy="2834640"/>
           </a:xfrm>
           <a:prstGeom prst="rect">
             <a:avLst/>
@@ -7347,6 +7751,175 @@
         </p:spPr>
         <p:txBody>
           <a:bodyPr wrap="square" anchor="t">
+            <a:spAutoFit/>
+          </a:bodyPr>
+          <a:lstStyle/>
+          <a:p>
+            <a:pPr algn="l">
+              <a:lnSpc>
+                <a:spcPct val="134000"/>
+              </a:lnSpc>
+            </a:pPr>
+            <a:r>
+              <a:rPr sz="1900" b="1">
+                <a:solidFill>
+                  <a:srgbClr val="00FF41"/>
+                </a:solidFill>
+                <a:latin typeface="Arial"/>
+              </a:rPr>
+              <a:t>→  </a:t>
+            </a:r>
+            <a:r>
+              <a:rPr sz="1900" b="0">
+                <a:solidFill>
+                  <a:srgbClr val="F5F7FA"/>
+                </a:solidFill>
+                <a:latin typeface="Arial"/>
+              </a:rPr>
+              <a:t>The paper you found + READ - [ author, year, title ]  (AI search to FIND it; then read the actual paper)</a:t>
+            </a:r>
+          </a:p>
+          <a:p>
+            <a:pPr algn="l">
+              <a:lnSpc>
+                <a:spcPct val="134000"/>
+              </a:lnSpc>
+            </a:pPr>
+            <a:r>
+              <a:rPr sz="1900" b="1">
+                <a:solidFill>
+                  <a:srgbClr val="00FF41"/>
+                </a:solidFill>
+                <a:latin typeface="Arial"/>
+              </a:rPr>
+              <a:t>→  </a:t>
+            </a:r>
+            <a:r>
+              <a:rPr sz="1900" b="0">
+                <a:solidFill>
+                  <a:srgbClr val="F5F7FA"/>
+                </a:solidFill>
+                <a:latin typeface="Arial"/>
+              </a:rPr>
+              <a:t>The design intervention they tried to move THIS value - [ what they did ]</a:t>
+            </a:r>
+          </a:p>
+          <a:p>
+            <a:pPr algn="l">
+              <a:lnSpc>
+                <a:spcPct val="134000"/>
+              </a:lnSpc>
+            </a:pPr>
+            <a:r>
+              <a:rPr sz="1900" b="1">
+                <a:solidFill>
+                  <a:srgbClr val="00FF41"/>
+                </a:solidFill>
+                <a:latin typeface="Arial"/>
+              </a:rPr>
+              <a:t>→  </a:t>
+            </a:r>
+            <a:r>
+              <a:rPr sz="1900" b="0">
+                <a:solidFill>
+                  <a:srgbClr val="F5F7FA"/>
+                </a:solidFill>
+                <a:latin typeface="Arial"/>
+              </a:rPr>
+              <a:t>What WORKED - [ ___ ]     |     What FAILED / to avoid - [ ___ ]</a:t>
+            </a:r>
+          </a:p>
+          <a:p>
+            <a:pPr algn="l">
+              <a:lnSpc>
+                <a:spcPct val="134000"/>
+              </a:lnSpc>
+            </a:pPr>
+            <a:r>
+              <a:rPr sz="1900" b="1">
+                <a:solidFill>
+                  <a:srgbClr val="00FF41"/>
+                </a:solidFill>
+                <a:latin typeface="Arial"/>
+              </a:rPr>
+              <a:t>→  </a:t>
+            </a:r>
+            <a:r>
+              <a:rPr sz="1900" b="0">
+                <a:solidFill>
+                  <a:srgbClr val="F5F7FA"/>
+                </a:solidFill>
+                <a:latin typeface="Arial"/>
+              </a:rPr>
+              <a:t>Does it support or challenge our design direction? - [ ___ ]</a:t>
+            </a:r>
+          </a:p>
+        </p:txBody>
+      </p:sp>
+      <p:sp>
+        <p:nvSpPr>
+          <p:cNvPr id="6" name="Rounded Rectangle 5"/>
+          <p:cNvSpPr/>
+          <p:nvPr/>
+        </p:nvSpPr>
+        <p:spPr>
+          <a:xfrm>
+            <a:off x="640080" y="5440680"/>
+            <a:ext cx="10881360" cy="658368"/>
+          </a:xfrm>
+          <a:prstGeom prst="roundRect">
+            <a:avLst/>
+          </a:prstGeom>
+          <a:solidFill>
+            <a:srgbClr val="151B26"/>
+          </a:solidFill>
+          <a:ln w="19050">
+            <a:solidFill>
+              <a:srgbClr val="00FF41"/>
+            </a:solidFill>
+          </a:ln>
+          <a:effectLst/>
+        </p:spPr>
+        <p:style>
+          <a:lnRef idx="1">
+            <a:schemeClr val="accent1"/>
+          </a:lnRef>
+          <a:fillRef idx="3">
+            <a:schemeClr val="accent1"/>
+          </a:fillRef>
+          <a:effectRef idx="2">
+            <a:schemeClr val="accent1"/>
+          </a:effectRef>
+          <a:fontRef idx="minor">
+            <a:schemeClr val="lt1"/>
+          </a:fontRef>
+        </p:style>
+        <p:txBody>
+          <a:bodyPr rtlCol="0" anchor="ctr"/>
+          <a:lstStyle/>
+          <a:p>
+            <a:pPr algn="ctr"/>
+          </a:p>
+        </p:txBody>
+      </p:sp>
+      <p:sp>
+        <p:nvSpPr>
+          <p:cNvPr id="7" name="TextBox 6"/>
+          <p:cNvSpPr txBox="1"/>
+          <p:nvPr/>
+        </p:nvSpPr>
+        <p:spPr>
+          <a:xfrm>
+            <a:off x="914400" y="5440680"/>
+            <a:ext cx="10332720" cy="658368"/>
+          </a:xfrm>
+          <a:prstGeom prst="rect">
+            <a:avLst/>
+          </a:prstGeom>
+          <a:noFill/>
+        </p:spPr>
+        <p:txBody>
+          <a:bodyPr wrap="square" anchor="ctr">
             <a:spAutoFit/>
           </a:bodyPr>
           <a:lstStyle/>
@@ -7357,157 +7930,29 @@
               </a:lnSpc>
             </a:pPr>
             <a:r>
+              <a:rPr sz="1600" b="1">
+                <a:solidFill>
+                  <a:srgbClr val="00FF41"/>
+                </a:solidFill>
+                <a:latin typeface="Arial"/>
+              </a:rPr>
+              <a:t>▸  </a:t>
+            </a:r>
+            <a:r>
               <a:rPr sz="1500" b="1">
                 <a:solidFill>
-                  <a:srgbClr val="00FF41"/>
-                </a:solidFill>
-                <a:latin typeface="Courier New"/>
-              </a:rPr>
-              <a:t>OUR DESIGN DIRECTIONS</a:t>
-            </a:r>
-          </a:p>
-        </p:txBody>
-      </p:sp>
-      <p:sp>
-        <p:nvSpPr>
-          <p:cNvPr id="5" name="TextBox 4"/>
-          <p:cNvSpPr txBox="1"/>
-          <p:nvPr/>
-        </p:nvSpPr>
-        <p:spPr>
-          <a:xfrm>
-            <a:off x="804672" y="2971800"/>
-            <a:ext cx="10607040" cy="1097280"/>
-          </a:xfrm>
-          <a:prstGeom prst="rect">
-            <a:avLst/>
-          </a:prstGeom>
-          <a:noFill/>
-        </p:spPr>
-        <p:txBody>
-          <a:bodyPr wrap="square" anchor="t">
-            <a:spAutoFit/>
-          </a:bodyPr>
-          <a:lstStyle/>
-          <a:p>
-            <a:pPr algn="l">
-              <a:lnSpc>
-                <a:spcPct val="103000"/>
-              </a:lnSpc>
-            </a:pPr>
-            <a:r>
-              <a:rPr sz="3800" b="1">
-                <a:solidFill>
                   <a:srgbClr val="F5F7FA"/>
                 </a:solidFill>
                 <a:latin typeface="Arial"/>
               </a:rPr>
-              <a:t>Generative - where the evidence points (carry into Wednesday)</a:t>
-            </a:r>
-          </a:p>
-        </p:txBody>
-      </p:sp>
-      <p:sp>
-        <p:nvSpPr>
-          <p:cNvPr id="6" name="TextBox 5"/>
-          <p:cNvSpPr txBox="1"/>
-          <p:nvPr/>
-        </p:nvSpPr>
-        <p:spPr>
-          <a:xfrm>
-            <a:off x="841248" y="4224528"/>
-            <a:ext cx="10424160" cy="1737360"/>
-          </a:xfrm>
-          <a:prstGeom prst="rect">
-            <a:avLst/>
-          </a:prstGeom>
-          <a:noFill/>
-        </p:spPr>
-        <p:txBody>
-          <a:bodyPr wrap="square" anchor="t">
-            <a:spAutoFit/>
-          </a:bodyPr>
-          <a:lstStyle/>
-          <a:p>
-            <a:pPr algn="l">
-              <a:lnSpc>
-                <a:spcPct val="128000"/>
-              </a:lnSpc>
-            </a:pPr>
-            <a:r>
-              <a:rPr sz="1700" b="1">
-                <a:solidFill>
-                  <a:srgbClr val="00FF41"/>
-                </a:solidFill>
-                <a:latin typeface="Arial"/>
-              </a:rPr>
-              <a:t>→  </a:t>
-            </a:r>
-            <a:r>
-              <a:rPr sz="1700" b="0">
-                <a:solidFill>
-                  <a:srgbClr val="8A94A6"/>
-                </a:solidFill>
-                <a:latin typeface="Arial"/>
-              </a:rPr>
-              <a:t>2-3 design directions our research points to.</a:t>
-            </a:r>
-          </a:p>
-          <a:p>
-            <a:pPr algn="l">
-              <a:lnSpc>
-                <a:spcPct val="128000"/>
-              </a:lnSpc>
-            </a:pPr>
-            <a:r>
-              <a:rPr sz="1700" b="1">
-                <a:solidFill>
-                  <a:srgbClr val="00FF41"/>
-                </a:solidFill>
-                <a:latin typeface="Arial"/>
-              </a:rPr>
-              <a:t>→  </a:t>
-            </a:r>
-            <a:r>
-              <a:rPr sz="1700" b="0">
-                <a:solidFill>
-                  <a:srgbClr val="8A94A6"/>
-                </a:solidFill>
-                <a:latin typeface="Arial"/>
-              </a:rPr>
-              <a:t>Which one has the strongest evidence behind it?</a:t>
-            </a:r>
-          </a:p>
-          <a:p>
-            <a:pPr algn="l">
-              <a:lnSpc>
-                <a:spcPct val="128000"/>
-              </a:lnSpc>
-            </a:pPr>
-            <a:r>
-              <a:rPr sz="1700" b="1">
-                <a:solidFill>
-                  <a:srgbClr val="00FF41"/>
-                </a:solidFill>
-                <a:latin typeface="Arial"/>
-              </a:rPr>
-              <a:t>→  </a:t>
-            </a:r>
-            <a:r>
-              <a:rPr sz="1700" b="0">
-                <a:solidFill>
-                  <a:srgbClr val="8A94A6"/>
-                </a:solidFill>
-                <a:latin typeface="Arial"/>
-              </a:rPr>
-              <a:t>What would we still need to verify - and how?</a:t>
-            </a:r>
-          </a:p>
-        </p:txBody>
-      </p:sp>
-      <p:sp>
-        <p:nvSpPr>
-          <p:cNvPr id="7" name="TextBox 6"/>
+              <a:t>This slide is yours - the paper you actually read. Add more behind it if you need to - keep your name on them.</a:t>
+            </a:r>
+          </a:p>
+        </p:txBody>
+      </p:sp>
+      <p:sp>
+        <p:nvSpPr>
+          <p:cNvPr id="8" name="TextBox 7"/>
           <p:cNvSpPr txBox="1"/>
           <p:nvPr/>
         </p:nvSpPr>

--- a/slides/team-decks/Week3-Tue-chezborgar.pptx
+++ b/slides/team-decks/Week3-Tue-chezborgar.pptx
@@ -582,7 +582,7 @@
           <a:lstStyle/>
           <a:p>
             <a:r>
-              <a:t>Section header — the team's own slides go after this one.</a:t>
+              <a:t>Section header (FigJam: VALUE DEFINITION) — the team's own slides go after this one.</a:t>
             </a:r>
           </a:p>
         </p:txBody>
@@ -652,7 +652,7 @@
           <a:lstStyle/>
           <a:p>
             <a:r>
-              <a:t>Section header — the team's own slides go after this one.</a:t>
+              <a:t>Section header (FigJam: BRAINSTORM 1·2·3 + 02) — the team's own slides go after this one.</a:t>
             </a:r>
           </a:p>
         </p:txBody>
@@ -722,7 +722,7 @@
           <a:lstStyle/>
           <a:p>
             <a:r>
-              <a:t>Section header — the team's own slides go after this one.</a:t>
+              <a:t>Section header (FigJam: 03 WHAT WE FOUND) — the team's own slides go after this one.</a:t>
             </a:r>
           </a:p>
         </p:txBody>
@@ -792,7 +792,7 @@
           <a:lstStyle/>
           <a:p>
             <a:r>
-              <a:t>Section header — the team's own slides go after this one.</a:t>
+              <a:t>Section header (FigJam: 04 OUTLOOK) — the team's own slides go after this one.</a:t>
             </a:r>
           </a:p>
         </p:txBody>
@@ -1072,7 +1072,7 @@
           <a:lstStyle/>
           <a:p>
             <a:r>
-              <a:t>Section header — the team's own slides go after this one.</a:t>
+              <a:t>Section header (FigJam: 05 SO WHAT) — the team's own slides go after this one.</a:t>
             </a:r>
           </a:p>
         </p:txBody>
@@ -4178,7 +4178,7 @@
         <p:spPr>
           <a:xfrm>
             <a:off x="804672" y="2103120"/>
-            <a:ext cx="10607040" cy="1737360"/>
+            <a:ext cx="10607040" cy="1554480"/>
           </a:xfrm>
           <a:prstGeom prst="rect">
             <a:avLst/>
@@ -4197,7 +4197,7 @@
               </a:lnSpc>
             </a:pPr>
             <a:r>
-              <a:rPr sz="4600" b="1">
+              <a:rPr sz="4400" b="1">
                 <a:solidFill>
                   <a:srgbClr val="F5F7FA"/>
                 </a:solidFill>
@@ -4255,7 +4255,7 @@
         </p:nvSpPr>
         <p:spPr>
           <a:xfrm>
-            <a:off x="841248" y="4206240"/>
+            <a:off x="841248" y="4224528"/>
             <a:ext cx="10607040" cy="457200"/>
           </a:xfrm>
           <a:prstGeom prst="rect">
@@ -4303,7 +4303,7 @@
         </p:nvSpPr>
         <p:spPr>
           <a:xfrm>
-            <a:off x="841248" y="4709160"/>
+            <a:off x="841248" y="4681728"/>
             <a:ext cx="10424160" cy="457200"/>
           </a:xfrm>
           <a:prstGeom prst="rect">
@@ -4451,8 +4451,8 @@
         </p:nvSpPr>
         <p:spPr>
           <a:xfrm>
-            <a:off x="822960" y="1417320"/>
-            <a:ext cx="2743200" cy="1097280"/>
+            <a:off x="822960" y="566928"/>
+            <a:ext cx="10543032" cy="365760"/>
           </a:xfrm>
           <a:prstGeom prst="rect">
             <a:avLst/>
@@ -4471,13 +4471,13 @@
               </a:lnSpc>
             </a:pPr>
             <a:r>
-              <a:rPr sz="6400" b="1">
+              <a:rPr sz="1300" b="1">
                 <a:solidFill>
                   <a:srgbClr val="00FF41"/>
                 </a:solidFill>
                 <a:latin typeface="Courier New"/>
               </a:rPr>
-              <a:t>05</a:t>
+              <a:t>SECTION 05   ·   FIGJAM: 05 SO WHAT</a:t>
             </a:r>
           </a:p>
         </p:txBody>
@@ -4490,8 +4490,8 @@
         </p:nvSpPr>
         <p:spPr>
           <a:xfrm>
-            <a:off x="841248" y="2487168"/>
-            <a:ext cx="10424160" cy="457200"/>
+            <a:off x="822960" y="1207008"/>
+            <a:ext cx="1737360" cy="1280160"/>
           </a:xfrm>
           <a:prstGeom prst="rect">
             <a:avLst/>
@@ -4510,13 +4510,13 @@
               </a:lnSpc>
             </a:pPr>
             <a:r>
-              <a:rPr sz="1500" b="1">
+              <a:rPr sz="6600" b="1">
                 <a:solidFill>
                   <a:srgbClr val="00FF41"/>
                 </a:solidFill>
                 <a:latin typeface="Courier New"/>
               </a:rPr>
-              <a:t>SO WHAT - OUR NEXT DESIGN DIRECTION</a:t>
+              <a:t>05</a:t>
             </a:r>
           </a:p>
         </p:txBody>
@@ -4529,8 +4529,8 @@
         </p:nvSpPr>
         <p:spPr>
           <a:xfrm>
-            <a:off x="804672" y="2971800"/>
-            <a:ext cx="10607040" cy="1097280"/>
+            <a:off x="2697480" y="1298448"/>
+            <a:ext cx="8686800" cy="1097280"/>
           </a:xfrm>
           <a:prstGeom prst="rect">
             <a:avLst/>
@@ -4549,13 +4549,13 @@
               </a:lnSpc>
             </a:pPr>
             <a:r>
-              <a:rPr sz="3800" b="1">
+              <a:rPr sz="3000" b="1">
                 <a:solidFill>
                   <a:srgbClr val="F5F7FA"/>
                 </a:solidFill>
                 <a:latin typeface="Arial"/>
               </a:rPr>
-              <a:t>Verification opens the next design  ·  FigJam: 05  ·  carry into Wednesday</a:t>
+              <a:t>So what — our next design direction</a:t>
             </a:r>
           </a:p>
         </p:txBody>
@@ -4568,8 +4568,8 @@
         </p:nvSpPr>
         <p:spPr>
           <a:xfrm>
-            <a:off x="841248" y="4224528"/>
-            <a:ext cx="10424160" cy="1737360"/>
+            <a:off x="2697480" y="2395728"/>
+            <a:ext cx="8686800" cy="640080"/>
           </a:xfrm>
           <a:prstGeom prst="rect">
             <a:avLst/>
@@ -4584,61 +4584,133 @@
           <a:p>
             <a:pPr algn="l">
               <a:lnSpc>
-                <a:spcPct val="128000"/>
+                <a:spcPct val="110000"/>
               </a:lnSpc>
             </a:pPr>
             <a:r>
-              <a:rPr sz="1700" b="1">
-                <a:solidFill>
-                  <a:srgbClr val="00FF41"/>
-                </a:solidFill>
-                <a:latin typeface="Arial"/>
-              </a:rPr>
-              <a:t>→  </a:t>
-            </a:r>
-            <a:r>
-              <a:rPr sz="1700" b="0">
+              <a:rPr sz="1600" b="0">
                 <a:solidFill>
                   <a:srgbClr val="8A94A6"/>
                 </a:solidFill>
                 <a:latin typeface="Arial"/>
               </a:rPr>
-              <a:t>If the design does NOT move the value, what WOULD?  Another design that could achieve it.</a:t>
-            </a:r>
-          </a:p>
+              <a:t>If the design doesn't move the value, what would? This starts Wednesday.</a:t>
+            </a:r>
+          </a:p>
+        </p:txBody>
+      </p:sp>
+      <p:sp>
+        <p:nvSpPr>
+          <p:cNvPr id="7" name="Rounded Rectangle 6"/>
+          <p:cNvSpPr/>
+          <p:nvPr/>
+        </p:nvSpPr>
+        <p:spPr>
+          <a:xfrm>
+            <a:off x="822960" y="3310128"/>
+            <a:ext cx="10543032" cy="2606040"/>
+          </a:xfrm>
+          <a:prstGeom prst="roundRect">
+            <a:avLst/>
+          </a:prstGeom>
+          <a:solidFill>
+            <a:srgbClr val="151B26"/>
+          </a:solidFill>
+          <a:ln>
+            <a:noFill/>
+          </a:ln>
+          <a:effectLst/>
+        </p:spPr>
+        <p:style>
+          <a:lnRef idx="1">
+            <a:schemeClr val="accent1"/>
+          </a:lnRef>
+          <a:fillRef idx="3">
+            <a:schemeClr val="accent1"/>
+          </a:fillRef>
+          <a:effectRef idx="2">
+            <a:schemeClr val="accent1"/>
+          </a:effectRef>
+          <a:fontRef idx="minor">
+            <a:schemeClr val="lt1"/>
+          </a:fontRef>
+        </p:style>
+        <p:txBody>
+          <a:bodyPr rtlCol="0" anchor="ctr"/>
+          <a:lstStyle/>
+          <a:p>
+            <a:pPr algn="ctr"/>
+          </a:p>
+        </p:txBody>
+      </p:sp>
+      <p:sp>
+        <p:nvSpPr>
+          <p:cNvPr id="8" name="TextBox 7"/>
+          <p:cNvSpPr txBox="1"/>
+          <p:nvPr/>
+        </p:nvSpPr>
+        <p:spPr>
+          <a:xfrm>
+            <a:off x="1143000" y="3584448"/>
+            <a:ext cx="9966960" cy="365760"/>
+          </a:xfrm>
+          <a:prstGeom prst="rect">
+            <a:avLst/>
+          </a:prstGeom>
+          <a:noFill/>
+        </p:spPr>
+        <p:txBody>
+          <a:bodyPr wrap="square" anchor="t">
+            <a:spAutoFit/>
+          </a:bodyPr>
+          <a:lstStyle/>
           <a:p>
             <a:pPr algn="l">
               <a:lnSpc>
-                <a:spcPct val="128000"/>
+                <a:spcPct val="100000"/>
               </a:lnSpc>
             </a:pPr>
             <a:r>
-              <a:rPr sz="1700" b="1">
+              <a:rPr sz="1200" b="1">
                 <a:solidFill>
                   <a:srgbClr val="00FF41"/>
                 </a:solidFill>
-                <a:latin typeface="Arial"/>
-              </a:rPr>
-              <a:t>→  </a:t>
-            </a:r>
-            <a:r>
-              <a:rPr sz="1700" b="0">
-                <a:solidFill>
-                  <a:srgbClr val="8A94A6"/>
-                </a:solidFill>
-                <a:latin typeface="Arial"/>
-              </a:rPr>
-              <a:t>What should the next cycle discover?</a:t>
-            </a:r>
-          </a:p>
+                <a:latin typeface="Courier New"/>
+              </a:rPr>
+              <a:t>WHAT GOES ON THIS SLIDE  ·  replace the [ … ]</a:t>
+            </a:r>
+          </a:p>
+        </p:txBody>
+      </p:sp>
+      <p:sp>
+        <p:nvSpPr>
+          <p:cNvPr id="9" name="TextBox 8"/>
+          <p:cNvSpPr txBox="1"/>
+          <p:nvPr/>
+        </p:nvSpPr>
+        <p:spPr>
+          <a:xfrm>
+            <a:off x="1143000" y="4133088"/>
+            <a:ext cx="9921240" cy="1554480"/>
+          </a:xfrm>
+          <a:prstGeom prst="rect">
+            <a:avLst/>
+          </a:prstGeom>
+          <a:noFill/>
+        </p:spPr>
+        <p:txBody>
+          <a:bodyPr wrap="square" anchor="t">
+            <a:spAutoFit/>
+          </a:bodyPr>
+          <a:lstStyle/>
           <a:p>
             <a:pPr algn="l">
               <a:lnSpc>
-                <a:spcPct val="128000"/>
+                <a:spcPct val="140000"/>
               </a:lnSpc>
             </a:pPr>
             <a:r>
-              <a:rPr sz="1700" b="1">
+              <a:rPr sz="1800" b="1">
                 <a:solidFill>
                   <a:srgbClr val="00FF41"/>
                 </a:solidFill>
@@ -4647,20 +4719,70 @@
               <a:t>→  </a:t>
             </a:r>
             <a:r>
-              <a:rPr sz="1700" b="0">
-                <a:solidFill>
-                  <a:srgbClr val="8A94A6"/>
-                </a:solidFill>
-                <a:latin typeface="Arial"/>
-              </a:rPr>
-              <a:t>2-3 directions the evidence points to - you carry these into Wednesday.</a:t>
-            </a:r>
-          </a:p>
-        </p:txBody>
-      </p:sp>
-      <p:sp>
-        <p:nvSpPr>
-          <p:cNvPr id="7" name="TextBox 6"/>
+              <a:rPr sz="1800" b="0">
+                <a:solidFill>
+                  <a:srgbClr val="F5F7FA"/>
+                </a:solidFill>
+                <a:latin typeface="Arial"/>
+              </a:rPr>
+              <a:t>Another design that could achieve the value</a:t>
+            </a:r>
+          </a:p>
+          <a:p>
+            <a:pPr algn="l">
+              <a:lnSpc>
+                <a:spcPct val="140000"/>
+              </a:lnSpc>
+            </a:pPr>
+            <a:r>
+              <a:rPr sz="1800" b="1">
+                <a:solidFill>
+                  <a:srgbClr val="00FF41"/>
+                </a:solidFill>
+                <a:latin typeface="Arial"/>
+              </a:rPr>
+              <a:t>→  </a:t>
+            </a:r>
+            <a:r>
+              <a:rPr sz="1800" b="0">
+                <a:solidFill>
+                  <a:srgbClr val="F5F7FA"/>
+                </a:solidFill>
+                <a:latin typeface="Arial"/>
+              </a:rPr>
+              <a:t>What the next cycle should discover</a:t>
+            </a:r>
+          </a:p>
+          <a:p>
+            <a:pPr algn="l">
+              <a:lnSpc>
+                <a:spcPct val="140000"/>
+              </a:lnSpc>
+            </a:pPr>
+            <a:r>
+              <a:rPr sz="1800" b="1">
+                <a:solidFill>
+                  <a:srgbClr val="00FF41"/>
+                </a:solidFill>
+                <a:latin typeface="Arial"/>
+              </a:rPr>
+              <a:t>→  </a:t>
+            </a:r>
+            <a:r>
+              <a:rPr sz="1800" b="0">
+                <a:solidFill>
+                  <a:srgbClr val="F5F7FA"/>
+                </a:solidFill>
+                <a:latin typeface="Arial"/>
+              </a:rPr>
+              <a:t>2–3 directions the evidence points to</a:t>
+            </a:r>
+          </a:p>
+        </p:txBody>
+      </p:sp>
+      <p:sp>
+        <p:nvSpPr>
+          <p:cNvPr id="10" name="TextBox 9"/>
           <p:cNvSpPr txBox="1"/>
           <p:nvPr/>
         </p:nvSpPr>
@@ -4814,8 +4936,8 @@
         </p:nvSpPr>
         <p:spPr>
           <a:xfrm>
-            <a:off x="640080" y="1188720"/>
-            <a:ext cx="10972800" cy="914400"/>
+            <a:off x="822960" y="1188720"/>
+            <a:ext cx="10515600" cy="914400"/>
           </a:xfrm>
           <a:prstGeom prst="rect">
             <a:avLst/>
@@ -4853,8 +4975,8 @@
         </p:nvSpPr>
         <p:spPr>
           <a:xfrm>
-            <a:off x="658368" y="2377440"/>
-            <a:ext cx="10881360" cy="3108960"/>
+            <a:off x="841248" y="2331720"/>
+            <a:ext cx="10515600" cy="3108960"/>
           </a:xfrm>
           <a:prstGeom prst="rect">
             <a:avLst/>
@@ -4869,11 +4991,11 @@
           <a:p>
             <a:pPr algn="l">
               <a:lnSpc>
-                <a:spcPct val="145000"/>
+                <a:spcPct val="150000"/>
               </a:lnSpc>
             </a:pPr>
             <a:r>
-              <a:rPr sz="1700" b="1">
+              <a:rPr sz="1800" b="1">
                 <a:solidFill>
                   <a:srgbClr val="00FF41"/>
                 </a:solidFill>
@@ -4882,7 +5004,7 @@
               <a:t>•  </a:t>
             </a:r>
             <a:r>
-              <a:rPr sz="1700" b="0">
+              <a:rPr sz="1800" b="0">
                 <a:solidFill>
                   <a:srgbClr val="8A94A6"/>
                 </a:solidFill>
@@ -4894,11 +5016,11 @@
           <a:p>
             <a:pPr algn="l">
               <a:lnSpc>
-                <a:spcPct val="145000"/>
+                <a:spcPct val="150000"/>
               </a:lnSpc>
             </a:pPr>
             <a:r>
-              <a:rPr sz="1700" b="1">
+              <a:rPr sz="1800" b="1">
                 <a:solidFill>
                   <a:srgbClr val="00FF41"/>
                 </a:solidFill>
@@ -4907,7 +5029,7 @@
               <a:t>•  </a:t>
             </a:r>
             <a:r>
-              <a:rPr sz="1700" b="0">
+              <a:rPr sz="1800" b="0">
                 <a:solidFill>
                   <a:srgbClr val="8A94A6"/>
                 </a:solidFill>
@@ -4919,11 +5041,11 @@
           <a:p>
             <a:pPr algn="l">
               <a:lnSpc>
-                <a:spcPct val="145000"/>
+                <a:spcPct val="150000"/>
               </a:lnSpc>
             </a:pPr>
             <a:r>
-              <a:rPr sz="1700" b="1">
+              <a:rPr sz="1800" b="1">
                 <a:solidFill>
                   <a:srgbClr val="00FF41"/>
                 </a:solidFill>
@@ -4932,7 +5054,7 @@
               <a:t>•  </a:t>
             </a:r>
             <a:r>
-              <a:rPr sz="1700" b="0">
+              <a:rPr sz="1800" b="0">
                 <a:solidFill>
                   <a:srgbClr val="8A94A6"/>
                 </a:solidFill>
@@ -4944,11 +5066,11 @@
           <a:p>
             <a:pPr algn="l">
               <a:lnSpc>
-                <a:spcPct val="145000"/>
+                <a:spcPct val="150000"/>
               </a:lnSpc>
             </a:pPr>
             <a:r>
-              <a:rPr sz="1700" b="1">
+              <a:rPr sz="1800" b="1">
                 <a:solidFill>
                   <a:srgbClr val="00FF41"/>
                 </a:solidFill>
@@ -4957,7 +5079,7 @@
               <a:t>•  </a:t>
             </a:r>
             <a:r>
-              <a:rPr sz="1700" b="0">
+              <a:rPr sz="1800" b="0">
                 <a:solidFill>
                   <a:srgbClr val="8A94A6"/>
                 </a:solidFill>
@@ -4976,8 +5098,8 @@
         </p:nvSpPr>
         <p:spPr>
           <a:xfrm>
-            <a:off x="658368" y="5715000"/>
-            <a:ext cx="10881360" cy="365760"/>
+            <a:off x="841248" y="5760720"/>
+            <a:ext cx="10515600" cy="365760"/>
           </a:xfrm>
           <a:prstGeom prst="rect">
             <a:avLst/>
@@ -5163,8 +5285,8 @@
         </p:nvSpPr>
         <p:spPr>
           <a:xfrm>
-            <a:off x="640080" y="1188720"/>
-            <a:ext cx="10972800" cy="914400"/>
+            <a:off x="822960" y="1188720"/>
+            <a:ext cx="10515600" cy="914400"/>
           </a:xfrm>
           <a:prstGeom prst="rect">
             <a:avLst/>
@@ -5183,13 +5305,13 @@
               </a:lnSpc>
             </a:pPr>
             <a:r>
-              <a:rPr sz="3200" b="1">
+              <a:rPr sz="3000" b="1">
                 <a:solidFill>
                   <a:srgbClr val="F5F7FA"/>
                 </a:solidFill>
                 <a:latin typeface="Arial"/>
               </a:rPr>
-              <a:t>Keep the headers. Put your slides behind them.</a:t>
+              <a:t>Keep the 5 headers. Put your slides behind them.</a:t>
             </a:r>
           </a:p>
         </p:txBody>
@@ -5202,8 +5324,8 @@
         </p:nvSpPr>
         <p:spPr>
           <a:xfrm>
-            <a:off x="658368" y="2377440"/>
-            <a:ext cx="10881360" cy="3474720"/>
+            <a:off x="841248" y="2331720"/>
+            <a:ext cx="10515600" cy="3749039"/>
           </a:xfrm>
           <a:prstGeom prst="rect">
             <a:avLst/>
@@ -5218,11 +5340,11 @@
           <a:p>
             <a:pPr algn="l">
               <a:lnSpc>
-                <a:spcPct val="130000"/>
+                <a:spcPct val="134000"/>
               </a:lnSpc>
             </a:pPr>
             <a:r>
-              <a:rPr sz="1900" b="1">
+              <a:rPr sz="1800" b="1">
                 <a:solidFill>
                   <a:srgbClr val="00FF41"/>
                 </a:solidFill>
@@ -5231,23 +5353,41 @@
               <a:t>•  </a:t>
             </a:r>
             <a:r>
-              <a:rPr sz="1900" b="0">
+              <a:rPr sz="1800" b="0">
                 <a:solidFill>
                   <a:srgbClr val="F5F7FA"/>
                 </a:solidFill>
                 <a:latin typeface="Arial"/>
               </a:rPr>
-              <a:t>Five section headers follow — they MIRROR the FigJam canvas blocks. The canvas is where you work it out; this deck is where you present it.</a:t>
+              <a:t>These 5 headers </a:t>
+            </a:r>
+            <a:r>
+              <a:rPr sz="1800" b="1">
+                <a:solidFill>
+                  <a:srgbClr val="00FF41"/>
+                </a:solidFill>
+                <a:latin typeface="Arial"/>
+              </a:rPr>
+              <a:t>mirror your FigJam board</a:t>
+            </a:r>
+            <a:r>
+              <a:rPr sz="1800" b="0">
+                <a:solidFill>
+                  <a:srgbClr val="F5F7FA"/>
+                </a:solidFill>
+                <a:latin typeface="Arial"/>
+              </a:rPr>
+              <a:t> — the canvas is where you work it out; this deck is where you present it.</a:t>
             </a:r>
           </a:p>
           <a:p>
             <a:pPr algn="l">
               <a:lnSpc>
-                <a:spcPct val="130000"/>
+                <a:spcPct val="134000"/>
               </a:lnSpc>
             </a:pPr>
             <a:r>
-              <a:rPr sz="1900" b="1">
+              <a:rPr sz="1800" b="1">
                 <a:solidFill>
                   <a:srgbClr val="00FF41"/>
                 </a:solidFill>
@@ -5256,23 +5396,41 @@
               <a:t>•  </a:t>
             </a:r>
             <a:r>
-              <a:rPr sz="1900" b="0">
+              <a:rPr sz="1800" b="0">
                 <a:solidFill>
                   <a:srgbClr val="F5F7FA"/>
                 </a:solidFill>
                 <a:latin typeface="Arial"/>
               </a:rPr>
-              <a:t>Sections 01, 02, 03, 05 are the TEAM's. Section 04 has one named slide per person — the paper you found and READ.</a:t>
+              <a:t>Add your slides </a:t>
+            </a:r>
+            <a:r>
+              <a:rPr sz="1800" b="1">
+                <a:solidFill>
+                  <a:srgbClr val="00FF41"/>
+                </a:solidFill>
+                <a:latin typeface="Arial"/>
+              </a:rPr>
+              <a:t>behind</a:t>
+            </a:r>
+            <a:r>
+              <a:rPr sz="1800" b="0">
+                <a:solidFill>
+                  <a:srgbClr val="F5F7FA"/>
+                </a:solidFill>
+                <a:latin typeface="Arial"/>
+              </a:rPr>
+              <a:t> each header — don't delete the headers.</a:t>
             </a:r>
           </a:p>
           <a:p>
             <a:pPr algn="l">
               <a:lnSpc>
-                <a:spcPct val="130000"/>
+                <a:spcPct val="134000"/>
               </a:lnSpc>
             </a:pPr>
             <a:r>
-              <a:rPr sz="1900" b="1">
+              <a:rPr sz="1800" b="1">
                 <a:solidFill>
                   <a:srgbClr val="00FF41"/>
                 </a:solidFill>
@@ -5281,23 +5439,32 @@
               <a:t>•  </a:t>
             </a:r>
             <a:r>
-              <a:rPr sz="1900" b="0">
+              <a:rPr sz="1800" b="0">
                 <a:solidFill>
                   <a:srgbClr val="F5F7FA"/>
                 </a:solidFill>
                 <a:latin typeface="Arial"/>
               </a:rPr>
-              <a:t>Add your own slides AFTER each header. Don't delete the headers.</a:t>
+              <a:t>Sections 01, 02, 03, 05 are the team's. </a:t>
+            </a:r>
+            <a:r>
+              <a:rPr sz="1800" b="1">
+                <a:solidFill>
+                  <a:srgbClr val="00FF41"/>
+                </a:solidFill>
+                <a:latin typeface="Arial"/>
+              </a:rPr>
+              <a:t>04 = one ‘YOUR PAPER’ slide per person.</a:t>
             </a:r>
           </a:p>
           <a:p>
             <a:pPr algn="l">
               <a:lnSpc>
-                <a:spcPct val="130000"/>
+                <a:spcPct val="134000"/>
               </a:lnSpc>
             </a:pPr>
             <a:r>
-              <a:rPr sz="1900" b="1">
+              <a:rPr sz="1800" b="1">
                 <a:solidFill>
                   <a:srgbClr val="00FF41"/>
                 </a:solidFill>
@@ -5306,23 +5473,23 @@
               <a:t>•  </a:t>
             </a:r>
             <a:r>
-              <a:rPr sz="1900" b="0">
+              <a:rPr sz="1800" b="0">
                 <a:solidFill>
                   <a:srgbClr val="F5F7FA"/>
                 </a:solidFill>
                 <a:latin typeface="Arial"/>
               </a:rPr>
-              <a:t>No full user study today — for '03 What we found', apply your metrics with a partner (speculating is fine).</a:t>
+              <a:t>No full study today — for ‘03 What we found’, check with a partner (speculating is fine).</a:t>
             </a:r>
           </a:p>
           <a:p>
             <a:pPr algn="l">
               <a:lnSpc>
-                <a:spcPct val="130000"/>
+                <a:spcPct val="134000"/>
               </a:lnSpc>
             </a:pPr>
             <a:r>
-              <a:rPr sz="1900" b="1">
+              <a:rPr sz="1800" b="1">
                 <a:solidFill>
                   <a:srgbClr val="00FF41"/>
                 </a:solidFill>
@@ -5331,23 +5498,41 @@
               <a:t>•  </a:t>
             </a:r>
             <a:r>
-              <a:rPr sz="1900" b="0">
+              <a:rPr sz="1800" b="0">
                 <a:solidFill>
                   <a:srgbClr val="F5F7FA"/>
                 </a:solidFill>
                 <a:latin typeface="Arial"/>
               </a:rPr>
-              <a:t>Each person READS one real paper (not just an AI summary) — that's section 04 / the FigJam Outlook.</a:t>
+              <a:t>Each person </a:t>
+            </a:r>
+            <a:r>
+              <a:rPr sz="1800" b="1">
+                <a:solidFill>
+                  <a:srgbClr val="00FF41"/>
+                </a:solidFill>
+                <a:latin typeface="Arial"/>
+              </a:rPr>
+              <a:t>READS one real paper</a:t>
+            </a:r>
+            <a:r>
+              <a:rPr sz="1800" b="0">
+                <a:solidFill>
+                  <a:srgbClr val="F5F7FA"/>
+                </a:solidFill>
+                <a:latin typeface="Arial"/>
+              </a:rPr>
+              <a:t> — not just an AI summary.</a:t>
             </a:r>
           </a:p>
           <a:p>
             <a:pPr algn="l">
               <a:lnSpc>
-                <a:spcPct val="130000"/>
+                <a:spcPct val="134000"/>
               </a:lnSpc>
             </a:pPr>
             <a:r>
-              <a:rPr sz="1900" b="1">
+              <a:rPr sz="1800" b="1">
                 <a:solidFill>
                   <a:srgbClr val="00FF41"/>
                 </a:solidFill>
@@ -5356,23 +5541,41 @@
               <a:t>•  </a:t>
             </a:r>
             <a:r>
-              <a:rPr sz="1900" b="0">
+              <a:rPr sz="1800" b="0">
                 <a:solidFill>
                   <a:srgbClr val="F5F7FA"/>
                 </a:solidFill>
                 <a:latin typeface="Arial"/>
               </a:rPr>
-              <a:t>Real citations only — if you can't find the paper, leave the claim out.</a:t>
+              <a:t>Your reflection goes on the </a:t>
+            </a:r>
+            <a:r>
+              <a:rPr sz="1800" b="1">
+                <a:solidFill>
+                  <a:srgbClr val="00FF41"/>
+                </a:solidFill>
+                <a:latin typeface="Arial"/>
+              </a:rPr>
+              <a:t>FigJam board (block 06)</a:t>
+            </a:r>
+            <a:r>
+              <a:rPr sz="1800" b="0">
+                <a:solidFill>
+                  <a:srgbClr val="F5F7FA"/>
+                </a:solidFill>
+                <a:latin typeface="Arial"/>
+              </a:rPr>
+              <a:t>, not in this deck.</a:t>
             </a:r>
           </a:p>
           <a:p>
             <a:pPr algn="l">
               <a:lnSpc>
-                <a:spcPct val="130000"/>
+                <a:spcPct val="134000"/>
               </a:lnSpc>
             </a:pPr>
             <a:r>
-              <a:rPr sz="1900" b="1">
+              <a:rPr sz="1800" b="1">
                 <a:solidFill>
                   <a:srgbClr val="00FF41"/>
                 </a:solidFill>
@@ -5381,34 +5584,9 @@
               <a:t>•  </a:t>
             </a:r>
             <a:r>
-              <a:rPr sz="1900" b="0">
-                <a:solidFill>
-                  <a:srgbClr val="F5F7FA"/>
-                </a:solidFill>
-                <a:latin typeface="Arial"/>
-              </a:rPr>
-              <a:t>Your reflection is NOT in this deck — it goes in your own lane on the team FigJam canvas (block 06).</a:t>
-            </a:r>
-          </a:p>
-          <a:p>
-            <a:pPr algn="l">
-              <a:lnSpc>
-                <a:spcPct val="130000"/>
-              </a:lnSpc>
-            </a:pPr>
-            <a:r>
-              <a:rPr sz="1900" b="1">
-                <a:solidFill>
-                  <a:srgbClr val="00FF41"/>
-                </a:solidFill>
-                <a:latin typeface="Arial"/>
-              </a:rPr>
-              <a:t>•  </a:t>
-            </a:r>
-            <a:r>
-              <a:rPr sz="1900" b="0">
-                <a:solidFill>
-                  <a:srgbClr val="F5F7FA"/>
+              <a:rPr sz="1800" b="0">
+                <a:solidFill>
+                  <a:srgbClr val="8A94A6"/>
                 </a:solidFill>
                 <a:latin typeface="Arial"/>
               </a:rPr>
@@ -5534,8 +5712,8 @@
         </p:nvSpPr>
         <p:spPr>
           <a:xfrm>
-            <a:off x="822960" y="1417320"/>
-            <a:ext cx="2743200" cy="1097280"/>
+            <a:off x="822960" y="566928"/>
+            <a:ext cx="10543032" cy="365760"/>
           </a:xfrm>
           <a:prstGeom prst="rect">
             <a:avLst/>
@@ -5554,13 +5732,13 @@
               </a:lnSpc>
             </a:pPr>
             <a:r>
-              <a:rPr sz="6400" b="1">
+              <a:rPr sz="1300" b="1">
                 <a:solidFill>
                   <a:srgbClr val="00FF41"/>
                 </a:solidFill>
                 <a:latin typeface="Courier New"/>
               </a:rPr>
-              <a:t>01</a:t>
+              <a:t>SECTION 01   ·   FIGJAM: VALUE DEFINITION</a:t>
             </a:r>
           </a:p>
         </p:txBody>
@@ -5573,8 +5751,8 @@
         </p:nvSpPr>
         <p:spPr>
           <a:xfrm>
-            <a:off x="841248" y="2487168"/>
-            <a:ext cx="10424160" cy="457200"/>
+            <a:off x="822960" y="1207008"/>
+            <a:ext cx="1737360" cy="1280160"/>
           </a:xfrm>
           <a:prstGeom prst="rect">
             <a:avLst/>
@@ -5593,13 +5771,13 @@
               </a:lnSpc>
             </a:pPr>
             <a:r>
-              <a:rPr sz="1500" b="1">
+              <a:rPr sz="6600" b="1">
                 <a:solidFill>
                   <a:srgbClr val="00FF41"/>
                 </a:solidFill>
                 <a:latin typeface="Courier New"/>
               </a:rPr>
-              <a:t>THE VALUE &amp; HOW WE DEFINE IT</a:t>
+              <a:t>01</a:t>
             </a:r>
           </a:p>
         </p:txBody>
@@ -5612,8 +5790,8 @@
         </p:nvSpPr>
         <p:spPr>
           <a:xfrm>
-            <a:off x="804672" y="2971800"/>
-            <a:ext cx="10607040" cy="1097280"/>
+            <a:off x="2697480" y="1298448"/>
+            <a:ext cx="8686800" cy="1097280"/>
           </a:xfrm>
           <a:prstGeom prst="rect">
             <a:avLst/>
@@ -5632,13 +5810,13 @@
               </a:lnSpc>
             </a:pPr>
             <a:r>
-              <a:rPr sz="3800" b="1">
+              <a:rPr sz="3000" b="1">
                 <a:solidFill>
                   <a:srgbClr val="F5F7FA"/>
                 </a:solidFill>
                 <a:latin typeface="Arial"/>
               </a:rPr>
-              <a:t>Operationalize the value  ·  FigJam: Value Definition</a:t>
+              <a:t>The value &amp; how we define it</a:t>
             </a:r>
           </a:p>
         </p:txBody>
@@ -5651,8 +5829,8 @@
         </p:nvSpPr>
         <p:spPr>
           <a:xfrm>
-            <a:off x="841248" y="4224528"/>
-            <a:ext cx="10424160" cy="1737360"/>
+            <a:off x="2697480" y="2395728"/>
+            <a:ext cx="8686800" cy="640080"/>
           </a:xfrm>
           <a:prstGeom prst="rect">
             <a:avLst/>
@@ -5667,61 +5845,133 @@
           <a:p>
             <a:pPr algn="l">
               <a:lnSpc>
-                <a:spcPct val="128000"/>
+                <a:spcPct val="110000"/>
               </a:lnSpc>
             </a:pPr>
             <a:r>
-              <a:rPr sz="1700" b="1">
-                <a:solidFill>
-                  <a:srgbClr val="00FF41"/>
-                </a:solidFill>
-                <a:latin typeface="Arial"/>
-              </a:rPr>
-              <a:t>→  </a:t>
-            </a:r>
-            <a:r>
-              <a:rPr sz="1700" b="0">
+              <a:rPr sz="1600" b="0">
                 <a:solidFill>
                   <a:srgbClr val="8A94A6"/>
                 </a:solidFill>
                 <a:latin typeface="Arial"/>
               </a:rPr>
-              <a:t>[ our app, in one line ]  -  and the value it claims.</a:t>
-            </a:r>
-          </a:p>
+              <a:t>Name the value, and pin down what it concretely means for your app.</a:t>
+            </a:r>
+          </a:p>
+        </p:txBody>
+      </p:sp>
+      <p:sp>
+        <p:nvSpPr>
+          <p:cNvPr id="7" name="Rounded Rectangle 6"/>
+          <p:cNvSpPr/>
+          <p:nvPr/>
+        </p:nvSpPr>
+        <p:spPr>
+          <a:xfrm>
+            <a:off x="822960" y="3310128"/>
+            <a:ext cx="10543032" cy="2606040"/>
+          </a:xfrm>
+          <a:prstGeom prst="roundRect">
+            <a:avLst/>
+          </a:prstGeom>
+          <a:solidFill>
+            <a:srgbClr val="151B26"/>
+          </a:solidFill>
+          <a:ln>
+            <a:noFill/>
+          </a:ln>
+          <a:effectLst/>
+        </p:spPr>
+        <p:style>
+          <a:lnRef idx="1">
+            <a:schemeClr val="accent1"/>
+          </a:lnRef>
+          <a:fillRef idx="3">
+            <a:schemeClr val="accent1"/>
+          </a:fillRef>
+          <a:effectRef idx="2">
+            <a:schemeClr val="accent1"/>
+          </a:effectRef>
+          <a:fontRef idx="minor">
+            <a:schemeClr val="lt1"/>
+          </a:fontRef>
+        </p:style>
+        <p:txBody>
+          <a:bodyPr rtlCol="0" anchor="ctr"/>
+          <a:lstStyle/>
+          <a:p>
+            <a:pPr algn="ctr"/>
+          </a:p>
+        </p:txBody>
+      </p:sp>
+      <p:sp>
+        <p:nvSpPr>
+          <p:cNvPr id="8" name="TextBox 7"/>
+          <p:cNvSpPr txBox="1"/>
+          <p:nvPr/>
+        </p:nvSpPr>
+        <p:spPr>
+          <a:xfrm>
+            <a:off x="1143000" y="3584448"/>
+            <a:ext cx="9966960" cy="365760"/>
+          </a:xfrm>
+          <a:prstGeom prst="rect">
+            <a:avLst/>
+          </a:prstGeom>
+          <a:noFill/>
+        </p:spPr>
+        <p:txBody>
+          <a:bodyPr wrap="square" anchor="t">
+            <a:spAutoFit/>
+          </a:bodyPr>
+          <a:lstStyle/>
           <a:p>
             <a:pPr algn="l">
               <a:lnSpc>
-                <a:spcPct val="128000"/>
+                <a:spcPct val="100000"/>
               </a:lnSpc>
             </a:pPr>
             <a:r>
-              <a:rPr sz="1700" b="1">
+              <a:rPr sz="1200" b="1">
                 <a:solidFill>
                   <a:srgbClr val="00FF41"/>
                 </a:solidFill>
-                <a:latin typeface="Arial"/>
-              </a:rPr>
-              <a:t>→  </a:t>
-            </a:r>
-            <a:r>
-              <a:rPr sz="1700" b="0">
-                <a:solidFill>
-                  <a:srgbClr val="8A94A6"/>
-                </a:solidFill>
-                <a:latin typeface="Arial"/>
-              </a:rPr>
-              <a:t>How do we operationalize / define the value?  (privacy as control vs. security vs. contextual integrity)</a:t>
-            </a:r>
-          </a:p>
+                <a:latin typeface="Courier New"/>
+              </a:rPr>
+              <a:t>WHAT GOES ON THIS SLIDE  ·  replace the [ … ]</a:t>
+            </a:r>
+          </a:p>
+        </p:txBody>
+      </p:sp>
+      <p:sp>
+        <p:nvSpPr>
+          <p:cNvPr id="9" name="TextBox 8"/>
+          <p:cNvSpPr txBox="1"/>
+          <p:nvPr/>
+        </p:nvSpPr>
+        <p:spPr>
+          <a:xfrm>
+            <a:off x="1143000" y="4133088"/>
+            <a:ext cx="9921240" cy="1554480"/>
+          </a:xfrm>
+          <a:prstGeom prst="rect">
+            <a:avLst/>
+          </a:prstGeom>
+          <a:noFill/>
+        </p:spPr>
+        <p:txBody>
+          <a:bodyPr wrap="square" anchor="t">
+            <a:spAutoFit/>
+          </a:bodyPr>
+          <a:lstStyle/>
           <a:p>
             <a:pPr algn="l">
               <a:lnSpc>
-                <a:spcPct val="128000"/>
+                <a:spcPct val="140000"/>
               </a:lnSpc>
             </a:pPr>
             <a:r>
-              <a:rPr sz="1700" b="1">
+              <a:rPr sz="1800" b="1">
                 <a:solidFill>
                   <a:srgbClr val="00FF41"/>
                 </a:solidFill>
@@ -5730,20 +5980,70 @@
               <a:t>→  </a:t>
             </a:r>
             <a:r>
-              <a:rPr sz="1700" b="0">
-                <a:solidFill>
-                  <a:srgbClr val="8A94A6"/>
-                </a:solidFill>
-                <a:latin typeface="Arial"/>
-              </a:rPr>
-              <a:t>If it is present, users will DO [ ___ ] / UNDERSTAND [ ___ ] / FEEL [ ___ ].</a:t>
-            </a:r>
-          </a:p>
-        </p:txBody>
-      </p:sp>
-      <p:sp>
-        <p:nvSpPr>
-          <p:cNvPr id="7" name="TextBox 6"/>
+              <a:rPr sz="1800" b="0">
+                <a:solidFill>
+                  <a:srgbClr val="F5F7FA"/>
+                </a:solidFill>
+                <a:latin typeface="Arial"/>
+              </a:rPr>
+              <a:t>[ our app in one line ] — and the value it claims</a:t>
+            </a:r>
+          </a:p>
+          <a:p>
+            <a:pPr algn="l">
+              <a:lnSpc>
+                <a:spcPct val="140000"/>
+              </a:lnSpc>
+            </a:pPr>
+            <a:r>
+              <a:rPr sz="1800" b="1">
+                <a:solidFill>
+                  <a:srgbClr val="00FF41"/>
+                </a:solidFill>
+                <a:latin typeface="Arial"/>
+              </a:rPr>
+              <a:t>→  </a:t>
+            </a:r>
+            <a:r>
+              <a:rPr sz="1800" b="0">
+                <a:solidFill>
+                  <a:srgbClr val="F5F7FA"/>
+                </a:solidFill>
+                <a:latin typeface="Arial"/>
+              </a:rPr>
+              <a:t>How we define it (privacy as control vs. security vs. contextual integrity)</a:t>
+            </a:r>
+          </a:p>
+          <a:p>
+            <a:pPr algn="l">
+              <a:lnSpc>
+                <a:spcPct val="140000"/>
+              </a:lnSpc>
+            </a:pPr>
+            <a:r>
+              <a:rPr sz="1800" b="1">
+                <a:solidFill>
+                  <a:srgbClr val="00FF41"/>
+                </a:solidFill>
+                <a:latin typeface="Arial"/>
+              </a:rPr>
+              <a:t>→  </a:t>
+            </a:r>
+            <a:r>
+              <a:rPr sz="1800" b="0">
+                <a:solidFill>
+                  <a:srgbClr val="F5F7FA"/>
+                </a:solidFill>
+                <a:latin typeface="Arial"/>
+              </a:rPr>
+              <a:t>If it's present, users will DO / UNDERSTAND / FEEL [ … ]</a:t>
+            </a:r>
+          </a:p>
+        </p:txBody>
+      </p:sp>
+      <p:sp>
+        <p:nvSpPr>
+          <p:cNvPr id="10" name="TextBox 9"/>
           <p:cNvSpPr txBox="1"/>
           <p:nvPr/>
         </p:nvSpPr>
@@ -5858,8 +6158,8 @@
         </p:nvSpPr>
         <p:spPr>
           <a:xfrm>
-            <a:off x="822960" y="1417320"/>
-            <a:ext cx="2743200" cy="1097280"/>
+            <a:off x="822960" y="566928"/>
+            <a:ext cx="10543032" cy="365760"/>
           </a:xfrm>
           <a:prstGeom prst="rect">
             <a:avLst/>
@@ -5878,13 +6178,13 @@
               </a:lnSpc>
             </a:pPr>
             <a:r>
-              <a:rPr sz="6400" b="1">
+              <a:rPr sz="1300" b="1">
                 <a:solidFill>
                   <a:srgbClr val="00FF41"/>
                 </a:solidFill>
                 <a:latin typeface="Courier New"/>
               </a:rPr>
-              <a:t>02</a:t>
+              <a:t>SECTION 02   ·   FIGJAM: BRAINSTORM 1·2·3 + 02</a:t>
             </a:r>
           </a:p>
         </p:txBody>
@@ -5897,8 +6197,8 @@
         </p:nvSpPr>
         <p:spPr>
           <a:xfrm>
-            <a:off x="841248" y="2487168"/>
-            <a:ext cx="10424160" cy="457200"/>
+            <a:off x="822960" y="1207008"/>
+            <a:ext cx="1737360" cy="1280160"/>
           </a:xfrm>
           <a:prstGeom prst="rect">
             <a:avLst/>
@@ -5917,13 +6217,13 @@
               </a:lnSpc>
             </a:pPr>
             <a:r>
-              <a:rPr sz="1500" b="1">
+              <a:rPr sz="6600" b="1">
                 <a:solidFill>
                   <a:srgbClr val="00FF41"/>
                 </a:solidFill>
                 <a:latin typeface="Courier New"/>
               </a:rPr>
-              <a:t>HOW WOULD WE VERIFY IT?</a:t>
+              <a:t>02</a:t>
             </a:r>
           </a:p>
         </p:txBody>
@@ -5936,8 +6236,8 @@
         </p:nvSpPr>
         <p:spPr>
           <a:xfrm>
-            <a:off x="804672" y="2971800"/>
-            <a:ext cx="10607040" cy="1097280"/>
+            <a:off x="2697480" y="1298448"/>
+            <a:ext cx="8686800" cy="1097280"/>
           </a:xfrm>
           <a:prstGeom prst="rect">
             <a:avLst/>
@@ -5956,13 +6256,13 @@
               </a:lnSpc>
             </a:pPr>
             <a:r>
-              <a:rPr sz="3800" b="1">
+              <a:rPr sz="3000" b="1">
                 <a:solidFill>
                   <a:srgbClr val="F5F7FA"/>
                 </a:solidFill>
                 <a:latin typeface="Arial"/>
               </a:rPr>
-              <a:t>A method per lens + how others measure it  ·  FigJam: Brainstorm 1-2-3 + 02</a:t>
+              <a:t>How would we verify it?</a:t>
             </a:r>
           </a:p>
         </p:txBody>
@@ -5975,8 +6275,8 @@
         </p:nvSpPr>
         <p:spPr>
           <a:xfrm>
-            <a:off x="841248" y="4224528"/>
-            <a:ext cx="10424160" cy="1737360"/>
+            <a:off x="2697480" y="2395728"/>
+            <a:ext cx="8686800" cy="640080"/>
           </a:xfrm>
           <a:prstGeom prst="rect">
             <a:avLst/>
@@ -5991,61 +6291,133 @@
           <a:p>
             <a:pPr algn="l">
               <a:lnSpc>
-                <a:spcPct val="128000"/>
+                <a:spcPct val="110000"/>
               </a:lnSpc>
             </a:pPr>
             <a:r>
-              <a:rPr sz="1700" b="1">
-                <a:solidFill>
-                  <a:srgbClr val="00FF41"/>
-                </a:solidFill>
-                <a:latin typeface="Arial"/>
-              </a:rPr>
-              <a:t>→  </a:t>
-            </a:r>
-            <a:r>
-              <a:rPr sz="1700" b="0">
+              <a:rPr sz="1600" b="0">
                 <a:solidFill>
                   <a:srgbClr val="8A94A6"/>
                 </a:solidFill>
                 <a:latin typeface="Arial"/>
               </a:rPr>
-              <a:t>BEHAVIOR - do users ACT differently?  -&gt;  [ method + metric ].</a:t>
-            </a:r>
-          </a:p>
+              <a:t>One way to check each lens — and how researchers measure it.</a:t>
+            </a:r>
+          </a:p>
+        </p:txBody>
+      </p:sp>
+      <p:sp>
+        <p:nvSpPr>
+          <p:cNvPr id="7" name="Rounded Rectangle 6"/>
+          <p:cNvSpPr/>
+          <p:nvPr/>
+        </p:nvSpPr>
+        <p:spPr>
+          <a:xfrm>
+            <a:off x="822960" y="3310128"/>
+            <a:ext cx="10543032" cy="2606040"/>
+          </a:xfrm>
+          <a:prstGeom prst="roundRect">
+            <a:avLst/>
+          </a:prstGeom>
+          <a:solidFill>
+            <a:srgbClr val="151B26"/>
+          </a:solidFill>
+          <a:ln>
+            <a:noFill/>
+          </a:ln>
+          <a:effectLst/>
+        </p:spPr>
+        <p:style>
+          <a:lnRef idx="1">
+            <a:schemeClr val="accent1"/>
+          </a:lnRef>
+          <a:fillRef idx="3">
+            <a:schemeClr val="accent1"/>
+          </a:fillRef>
+          <a:effectRef idx="2">
+            <a:schemeClr val="accent1"/>
+          </a:effectRef>
+          <a:fontRef idx="minor">
+            <a:schemeClr val="lt1"/>
+          </a:fontRef>
+        </p:style>
+        <p:txBody>
+          <a:bodyPr rtlCol="0" anchor="ctr"/>
+          <a:lstStyle/>
+          <a:p>
+            <a:pPr algn="ctr"/>
+          </a:p>
+        </p:txBody>
+      </p:sp>
+      <p:sp>
+        <p:nvSpPr>
+          <p:cNvPr id="8" name="TextBox 7"/>
+          <p:cNvSpPr txBox="1"/>
+          <p:nvPr/>
+        </p:nvSpPr>
+        <p:spPr>
+          <a:xfrm>
+            <a:off x="1143000" y="3584448"/>
+            <a:ext cx="9966960" cy="365760"/>
+          </a:xfrm>
+          <a:prstGeom prst="rect">
+            <a:avLst/>
+          </a:prstGeom>
+          <a:noFill/>
+        </p:spPr>
+        <p:txBody>
+          <a:bodyPr wrap="square" anchor="t">
+            <a:spAutoFit/>
+          </a:bodyPr>
+          <a:lstStyle/>
           <a:p>
             <a:pPr algn="l">
               <a:lnSpc>
-                <a:spcPct val="128000"/>
+                <a:spcPct val="100000"/>
               </a:lnSpc>
             </a:pPr>
             <a:r>
-              <a:rPr sz="1700" b="1">
+              <a:rPr sz="1200" b="1">
                 <a:solidFill>
                   <a:srgbClr val="00FF41"/>
                 </a:solidFill>
-                <a:latin typeface="Arial"/>
-              </a:rPr>
-              <a:t>→  </a:t>
-            </a:r>
-            <a:r>
-              <a:rPr sz="1700" b="0">
-                <a:solidFill>
-                  <a:srgbClr val="8A94A6"/>
-                </a:solidFill>
-                <a:latin typeface="Arial"/>
-              </a:rPr>
-              <a:t>UNDERSTANDING - do they GRASP the value?  -&gt;  [ method + metric ].</a:t>
-            </a:r>
-          </a:p>
+                <a:latin typeface="Courier New"/>
+              </a:rPr>
+              <a:t>WHAT GOES ON THIS SLIDE  ·  replace the [ … ]</a:t>
+            </a:r>
+          </a:p>
+        </p:txBody>
+      </p:sp>
+      <p:sp>
+        <p:nvSpPr>
+          <p:cNvPr id="9" name="TextBox 8"/>
+          <p:cNvSpPr txBox="1"/>
+          <p:nvPr/>
+        </p:nvSpPr>
+        <p:spPr>
+          <a:xfrm>
+            <a:off x="1143000" y="4133088"/>
+            <a:ext cx="9921240" cy="1554480"/>
+          </a:xfrm>
+          <a:prstGeom prst="rect">
+            <a:avLst/>
+          </a:prstGeom>
+          <a:noFill/>
+        </p:spPr>
+        <p:txBody>
+          <a:bodyPr wrap="square" anchor="t">
+            <a:spAutoFit/>
+          </a:bodyPr>
+          <a:lstStyle/>
           <a:p>
             <a:pPr algn="l">
               <a:lnSpc>
-                <a:spcPct val="128000"/>
+                <a:spcPct val="140000"/>
               </a:lnSpc>
             </a:pPr>
             <a:r>
-              <a:rPr sz="1700" b="1">
+              <a:rPr sz="1800" b="1">
                 <a:solidFill>
                   <a:srgbClr val="00FF41"/>
                 </a:solidFill>
@@ -6054,23 +6426,23 @@
               <a:t>→  </a:t>
             </a:r>
             <a:r>
-              <a:rPr sz="1700" b="0">
-                <a:solidFill>
-                  <a:srgbClr val="8A94A6"/>
-                </a:solidFill>
-                <a:latin typeface="Arial"/>
-              </a:rPr>
-              <a:t>AFFECT - do they FEEL differently?  -&gt;  [ method + metric ].</a:t>
+              <a:rPr sz="1800" b="0">
+                <a:solidFill>
+                  <a:srgbClr val="F5F7FA"/>
+                </a:solidFill>
+                <a:latin typeface="Arial"/>
+              </a:rPr>
+              <a:t>BEHAVIOR: do users ACT differently? → [ method + metric ]</a:t>
             </a:r>
           </a:p>
           <a:p>
             <a:pPr algn="l">
               <a:lnSpc>
-                <a:spcPct val="128000"/>
+                <a:spcPct val="140000"/>
               </a:lnSpc>
             </a:pPr>
             <a:r>
-              <a:rPr sz="1700" b="1">
+              <a:rPr sz="1800" b="1">
                 <a:solidFill>
                   <a:srgbClr val="00FF41"/>
                 </a:solidFill>
@@ -6079,20 +6451,45 @@
               <a:t>→  </a:t>
             </a:r>
             <a:r>
-              <a:rPr sz="1700" b="0">
-                <a:solidFill>
-                  <a:srgbClr val="8A94A6"/>
-                </a:solidFill>
-                <a:latin typeface="Arial"/>
-              </a:rPr>
-              <a:t>How do OTHERS measure it, and which INSTRUMENT would we borrow?  (UEQ / HRI / METUX / slop)</a:t>
-            </a:r>
-          </a:p>
-        </p:txBody>
-      </p:sp>
-      <p:sp>
-        <p:nvSpPr>
-          <p:cNvPr id="7" name="TextBox 6"/>
+              <a:rPr sz="1800" b="0">
+                <a:solidFill>
+                  <a:srgbClr val="F5F7FA"/>
+                </a:solidFill>
+                <a:latin typeface="Arial"/>
+              </a:rPr>
+              <a:t>UNDERSTANDING / AFFECT: do they GRASP / FEEL it? → [ method + metric ]</a:t>
+            </a:r>
+          </a:p>
+          <a:p>
+            <a:pPr algn="l">
+              <a:lnSpc>
+                <a:spcPct val="140000"/>
+              </a:lnSpc>
+            </a:pPr>
+            <a:r>
+              <a:rPr sz="1800" b="1">
+                <a:solidFill>
+                  <a:srgbClr val="00FF41"/>
+                </a:solidFill>
+                <a:latin typeface="Arial"/>
+              </a:rPr>
+              <a:t>→  </a:t>
+            </a:r>
+            <a:r>
+              <a:rPr sz="1800" b="0">
+                <a:solidFill>
+                  <a:srgbClr val="F5F7FA"/>
+                </a:solidFill>
+                <a:latin typeface="Arial"/>
+              </a:rPr>
+              <a:t>An instrument we'd borrow: UEQ / HRI / METUX / slop</a:t>
+            </a:r>
+          </a:p>
+        </p:txBody>
+      </p:sp>
+      <p:sp>
+        <p:nvSpPr>
+          <p:cNvPr id="10" name="TextBox 9"/>
           <p:cNvSpPr txBox="1"/>
           <p:nvPr/>
         </p:nvSpPr>
@@ -6207,8 +6604,8 @@
         </p:nvSpPr>
         <p:spPr>
           <a:xfrm>
-            <a:off x="822960" y="1417320"/>
-            <a:ext cx="2743200" cy="1097280"/>
+            <a:off x="822960" y="566928"/>
+            <a:ext cx="10543032" cy="365760"/>
           </a:xfrm>
           <a:prstGeom prst="rect">
             <a:avLst/>
@@ -6227,13 +6624,13 @@
               </a:lnSpc>
             </a:pPr>
             <a:r>
-              <a:rPr sz="6400" b="1">
+              <a:rPr sz="1300" b="1">
                 <a:solidFill>
                   <a:srgbClr val="00FF41"/>
                 </a:solidFill>
                 <a:latin typeface="Courier New"/>
               </a:rPr>
-              <a:t>03</a:t>
+              <a:t>SECTION 03   ·   FIGJAM: 03 WHAT WE FOUND</a:t>
             </a:r>
           </a:p>
         </p:txBody>
@@ -6246,8 +6643,8 @@
         </p:nvSpPr>
         <p:spPr>
           <a:xfrm>
-            <a:off x="841248" y="2487168"/>
-            <a:ext cx="10424160" cy="457200"/>
+            <a:off x="822960" y="1207008"/>
+            <a:ext cx="1737360" cy="1280160"/>
           </a:xfrm>
           <a:prstGeom prst="rect">
             <a:avLst/>
@@ -6266,13 +6663,13 @@
               </a:lnSpc>
             </a:pPr>
             <a:r>
-              <a:rPr sz="1500" b="1">
+              <a:rPr sz="6600" b="1">
                 <a:solidFill>
                   <a:srgbClr val="00FF41"/>
                 </a:solidFill>
                 <a:latin typeface="Courier New"/>
               </a:rPr>
-              <a:t>WHAT WE FOUND</a:t>
+              <a:t>03</a:t>
             </a:r>
           </a:p>
         </p:txBody>
@@ -6285,8 +6682,8 @@
         </p:nvSpPr>
         <p:spPr>
           <a:xfrm>
-            <a:off x="804672" y="2971800"/>
-            <a:ext cx="10607040" cy="1097280"/>
+            <a:off x="2697480" y="1298448"/>
+            <a:ext cx="8686800" cy="1097280"/>
           </a:xfrm>
           <a:prstGeom prst="rect">
             <a:avLst/>
@@ -6305,13 +6702,13 @@
               </a:lnSpc>
             </a:pPr>
             <a:r>
-              <a:rPr sz="3800" b="1">
+              <a:rPr sz="3000" b="1">
                 <a:solidFill>
                   <a:srgbClr val="F5F7FA"/>
                 </a:solidFill>
                 <a:latin typeface="Arial"/>
               </a:rPr>
-              <a:t>Run the check - speculate with a partner if needed  ·  FigJam: 03</a:t>
+              <a:t>What we found</a:t>
             </a:r>
           </a:p>
         </p:txBody>
@@ -6324,8 +6721,8 @@
         </p:nvSpPr>
         <p:spPr>
           <a:xfrm>
-            <a:off x="841248" y="4224528"/>
-            <a:ext cx="10424160" cy="1737360"/>
+            <a:off x="2697480" y="2395728"/>
+            <a:ext cx="8686800" cy="640080"/>
           </a:xfrm>
           <a:prstGeom prst="rect">
             <a:avLst/>
@@ -6340,61 +6737,133 @@
           <a:p>
             <a:pPr algn="l">
               <a:lnSpc>
-                <a:spcPct val="128000"/>
+                <a:spcPct val="110000"/>
               </a:lnSpc>
             </a:pPr>
             <a:r>
-              <a:rPr sz="1700" b="1">
-                <a:solidFill>
-                  <a:srgbClr val="00FF41"/>
-                </a:solidFill>
-                <a:latin typeface="Arial"/>
-              </a:rPr>
-              <a:t>→  </a:t>
-            </a:r>
-            <a:r>
-              <a:rPr sz="1700" b="0">
+              <a:rPr sz="1600" b="0">
                 <a:solidFill>
                   <a:srgbClr val="8A94A6"/>
                 </a:solidFill>
                 <a:latin typeface="Arial"/>
               </a:rPr>
-              <a:t>Apply your metrics with a partner - it is fine to SPECULATE today; real verification takes time.</a:t>
-            </a:r>
-          </a:p>
+              <a:t>A quick partner check — speculating is fine; a real study takes time.</a:t>
+            </a:r>
+          </a:p>
+        </p:txBody>
+      </p:sp>
+      <p:sp>
+        <p:nvSpPr>
+          <p:cNvPr id="7" name="Rounded Rectangle 6"/>
+          <p:cNvSpPr/>
+          <p:nvPr/>
+        </p:nvSpPr>
+        <p:spPr>
+          <a:xfrm>
+            <a:off x="822960" y="3310128"/>
+            <a:ext cx="10543032" cy="2606040"/>
+          </a:xfrm>
+          <a:prstGeom prst="roundRect">
+            <a:avLst/>
+          </a:prstGeom>
+          <a:solidFill>
+            <a:srgbClr val="151B26"/>
+          </a:solidFill>
+          <a:ln>
+            <a:noFill/>
+          </a:ln>
+          <a:effectLst/>
+        </p:spPr>
+        <p:style>
+          <a:lnRef idx="1">
+            <a:schemeClr val="accent1"/>
+          </a:lnRef>
+          <a:fillRef idx="3">
+            <a:schemeClr val="accent1"/>
+          </a:fillRef>
+          <a:effectRef idx="2">
+            <a:schemeClr val="accent1"/>
+          </a:effectRef>
+          <a:fontRef idx="minor">
+            <a:schemeClr val="lt1"/>
+          </a:fontRef>
+        </p:style>
+        <p:txBody>
+          <a:bodyPr rtlCol="0" anchor="ctr"/>
+          <a:lstStyle/>
+          <a:p>
+            <a:pPr algn="ctr"/>
+          </a:p>
+        </p:txBody>
+      </p:sp>
+      <p:sp>
+        <p:nvSpPr>
+          <p:cNvPr id="8" name="TextBox 7"/>
+          <p:cNvSpPr txBox="1"/>
+          <p:nvPr/>
+        </p:nvSpPr>
+        <p:spPr>
+          <a:xfrm>
+            <a:off x="1143000" y="3584448"/>
+            <a:ext cx="9966960" cy="365760"/>
+          </a:xfrm>
+          <a:prstGeom prst="rect">
+            <a:avLst/>
+          </a:prstGeom>
+          <a:noFill/>
+        </p:spPr>
+        <p:txBody>
+          <a:bodyPr wrap="square" anchor="t">
+            <a:spAutoFit/>
+          </a:bodyPr>
+          <a:lstStyle/>
           <a:p>
             <a:pPr algn="l">
               <a:lnSpc>
-                <a:spcPct val="128000"/>
+                <a:spcPct val="100000"/>
               </a:lnSpc>
             </a:pPr>
             <a:r>
-              <a:rPr sz="1700" b="1">
+              <a:rPr sz="1200" b="1">
                 <a:solidFill>
                   <a:srgbClr val="00FF41"/>
                 </a:solidFill>
-                <a:latin typeface="Arial"/>
-              </a:rPr>
-              <a:t>→  </a:t>
-            </a:r>
-            <a:r>
-              <a:rPr sz="1700" b="0">
-                <a:solidFill>
-                  <a:srgbClr val="8A94A6"/>
-                </a:solidFill>
-                <a:latin typeface="Arial"/>
-              </a:rPr>
-              <a:t>BEHAVIOR: do they ACT differently?   UNDERSTANDING: do they GRASP it?   AFFECT: do they FEEL differently?</a:t>
-            </a:r>
-          </a:p>
+                <a:latin typeface="Courier New"/>
+              </a:rPr>
+              <a:t>WHAT GOES ON THIS SLIDE  ·  replace the [ … ]</a:t>
+            </a:r>
+          </a:p>
+        </p:txBody>
+      </p:sp>
+      <p:sp>
+        <p:nvSpPr>
+          <p:cNvPr id="9" name="TextBox 8"/>
+          <p:cNvSpPr txBox="1"/>
+          <p:nvPr/>
+        </p:nvSpPr>
+        <p:spPr>
+          <a:xfrm>
+            <a:off x="1143000" y="4133088"/>
+            <a:ext cx="9921240" cy="1554480"/>
+          </a:xfrm>
+          <a:prstGeom prst="rect">
+            <a:avLst/>
+          </a:prstGeom>
+          <a:noFill/>
+        </p:spPr>
+        <p:txBody>
+          <a:bodyPr wrap="square" anchor="t">
+            <a:spAutoFit/>
+          </a:bodyPr>
+          <a:lstStyle/>
           <a:p>
             <a:pPr algn="l">
               <a:lnSpc>
-                <a:spcPct val="128000"/>
+                <a:spcPct val="140000"/>
               </a:lnSpc>
             </a:pPr>
             <a:r>
-              <a:rPr sz="1700" b="1">
+              <a:rPr sz="1800" b="1">
                 <a:solidFill>
                   <a:srgbClr val="00FF41"/>
                 </a:solidFill>
@@ -6403,20 +6872,70 @@
               <a:t>→  </a:t>
             </a:r>
             <a:r>
-              <a:rPr sz="1700" b="0">
-                <a:solidFill>
-                  <a:srgbClr val="8A94A6"/>
-                </a:solidFill>
-                <a:latin typeface="Arial"/>
-              </a:rPr>
-              <a:t>Green = it works.  Red = it does not.  Does the design move the value - for whom, and who is left out?</a:t>
-            </a:r>
-          </a:p>
-        </p:txBody>
-      </p:sp>
-      <p:sp>
-        <p:nvSpPr>
-          <p:cNvPr id="7" name="TextBox 6"/>
+              <a:rPr sz="1800" b="0">
+                <a:solidFill>
+                  <a:srgbClr val="F5F7FA"/>
+                </a:solidFill>
+                <a:latin typeface="Arial"/>
+              </a:rPr>
+              <a:t>Do they ACT / GRASP / FEEL differently? [ what we saw ]</a:t>
+            </a:r>
+          </a:p>
+          <a:p>
+            <a:pPr algn="l">
+              <a:lnSpc>
+                <a:spcPct val="140000"/>
+              </a:lnSpc>
+            </a:pPr>
+            <a:r>
+              <a:rPr sz="1800" b="1">
+                <a:solidFill>
+                  <a:srgbClr val="00FF41"/>
+                </a:solidFill>
+                <a:latin typeface="Arial"/>
+              </a:rPr>
+              <a:t>→  </a:t>
+            </a:r>
+            <a:r>
+              <a:rPr sz="1800" b="0">
+                <a:solidFill>
+                  <a:srgbClr val="F5F7FA"/>
+                </a:solidFill>
+                <a:latin typeface="Arial"/>
+              </a:rPr>
+              <a:t>Green = it works   ·   Red = it doesn't</a:t>
+            </a:r>
+          </a:p>
+          <a:p>
+            <a:pPr algn="l">
+              <a:lnSpc>
+                <a:spcPct val="140000"/>
+              </a:lnSpc>
+            </a:pPr>
+            <a:r>
+              <a:rPr sz="1800" b="1">
+                <a:solidFill>
+                  <a:srgbClr val="00FF41"/>
+                </a:solidFill>
+                <a:latin typeface="Arial"/>
+              </a:rPr>
+              <a:t>→  </a:t>
+            </a:r>
+            <a:r>
+              <a:rPr sz="1800" b="0">
+                <a:solidFill>
+                  <a:srgbClr val="F5F7FA"/>
+                </a:solidFill>
+                <a:latin typeface="Arial"/>
+              </a:rPr>
+              <a:t>Does it move the value — for whom, and who's left out?</a:t>
+            </a:r>
+          </a:p>
+        </p:txBody>
+      </p:sp>
+      <p:sp>
+        <p:nvSpPr>
+          <p:cNvPr id="10" name="TextBox 9"/>
           <p:cNvSpPr txBox="1"/>
           <p:nvPr/>
         </p:nvSpPr>
@@ -6531,8 +7050,8 @@
         </p:nvSpPr>
         <p:spPr>
           <a:xfrm>
-            <a:off x="822960" y="1417320"/>
-            <a:ext cx="2743200" cy="1097280"/>
+            <a:off x="822960" y="566928"/>
+            <a:ext cx="10543032" cy="365760"/>
           </a:xfrm>
           <a:prstGeom prst="rect">
             <a:avLst/>
@@ -6551,13 +7070,13 @@
               </a:lnSpc>
             </a:pPr>
             <a:r>
-              <a:rPr sz="6400" b="1">
+              <a:rPr sz="1300" b="1">
                 <a:solidFill>
                   <a:srgbClr val="00FF41"/>
                 </a:solidFill>
                 <a:latin typeface="Courier New"/>
               </a:rPr>
-              <a:t>04</a:t>
+              <a:t>SECTION 04   ·   FIGJAM: 04 OUTLOOK</a:t>
             </a:r>
           </a:p>
         </p:txBody>
@@ -6570,8 +7089,8 @@
         </p:nvSpPr>
         <p:spPr>
           <a:xfrm>
-            <a:off x="841248" y="2487168"/>
-            <a:ext cx="10424160" cy="457200"/>
+            <a:off x="822960" y="1207008"/>
+            <a:ext cx="1737360" cy="1280160"/>
           </a:xfrm>
           <a:prstGeom prst="rect">
             <a:avLst/>
@@ -6590,13 +7109,13 @@
               </a:lnSpc>
             </a:pPr>
             <a:r>
-              <a:rPr sz="1500" b="1">
+              <a:rPr sz="6600" b="1">
                 <a:solidFill>
                   <a:srgbClr val="00FF41"/>
                 </a:solidFill>
                 <a:latin typeface="Courier New"/>
               </a:rPr>
-              <a:t>WHAT RELATED RESEARCH FOUND</a:t>
+              <a:t>04</a:t>
             </a:r>
           </a:p>
         </p:txBody>
@@ -6609,8 +7128,8 @@
         </p:nvSpPr>
         <p:spPr>
           <a:xfrm>
-            <a:off x="804672" y="2971800"/>
-            <a:ext cx="10607040" cy="1097280"/>
+            <a:off x="2697480" y="1298448"/>
+            <a:ext cx="8686800" cy="1097280"/>
           </a:xfrm>
           <a:prstGeom prst="rect">
             <a:avLst/>
@@ -6629,13 +7148,13 @@
               </a:lnSpc>
             </a:pPr>
             <a:r>
-              <a:rPr sz="3800" b="1">
+              <a:rPr sz="3000" b="1">
                 <a:solidFill>
                   <a:srgbClr val="F5F7FA"/>
                 </a:solidFill>
                 <a:latin typeface="Arial"/>
               </a:rPr>
-              <a:t>Each member READS one real paper  ·  FigJam: 04 Outlook  ·  the named slides follow</a:t>
+              <a:t>What related research found</a:t>
             </a:r>
           </a:p>
         </p:txBody>
@@ -6648,8 +7167,8 @@
         </p:nvSpPr>
         <p:spPr>
           <a:xfrm>
-            <a:off x="841248" y="4224528"/>
-            <a:ext cx="10424160" cy="1737360"/>
+            <a:off x="2697480" y="2395728"/>
+            <a:ext cx="8686800" cy="640080"/>
           </a:xfrm>
           <a:prstGeom prst="rect">
             <a:avLst/>
@@ -6664,61 +7183,133 @@
           <a:p>
             <a:pPr algn="l">
               <a:lnSpc>
-                <a:spcPct val="128000"/>
+                <a:spcPct val="110000"/>
               </a:lnSpc>
             </a:pPr>
             <a:r>
-              <a:rPr sz="1700" b="1">
-                <a:solidFill>
-                  <a:srgbClr val="00FF41"/>
-                </a:solidFill>
-                <a:latin typeface="Arial"/>
-              </a:rPr>
-              <a:t>→  </a:t>
-            </a:r>
-            <a:r>
-              <a:rPr sz="1700" b="0">
+              <a:rPr sz="1600" b="0">
                 <a:solidFill>
                   <a:srgbClr val="8A94A6"/>
                 </a:solidFill>
                 <a:latin typeface="Arial"/>
               </a:rPr>
-              <a:t>Each member presents their OWN paper - found via AI academic search (Claude / ChatGPT / Elicit / Semantic Scholar / Scholar Labs), then READ.</a:t>
-            </a:r>
-          </a:p>
+              <a:t>Each member reads one real paper — a named slide each follows this header.</a:t>
+            </a:r>
+          </a:p>
+        </p:txBody>
+      </p:sp>
+      <p:sp>
+        <p:nvSpPr>
+          <p:cNvPr id="7" name="Rounded Rectangle 6"/>
+          <p:cNvSpPr/>
+          <p:nvPr/>
+        </p:nvSpPr>
+        <p:spPr>
+          <a:xfrm>
+            <a:off x="822960" y="3310128"/>
+            <a:ext cx="10543032" cy="2606040"/>
+          </a:xfrm>
+          <a:prstGeom prst="roundRect">
+            <a:avLst/>
+          </a:prstGeom>
+          <a:solidFill>
+            <a:srgbClr val="151B26"/>
+          </a:solidFill>
+          <a:ln>
+            <a:noFill/>
+          </a:ln>
+          <a:effectLst/>
+        </p:spPr>
+        <p:style>
+          <a:lnRef idx="1">
+            <a:schemeClr val="accent1"/>
+          </a:lnRef>
+          <a:fillRef idx="3">
+            <a:schemeClr val="accent1"/>
+          </a:fillRef>
+          <a:effectRef idx="2">
+            <a:schemeClr val="accent1"/>
+          </a:effectRef>
+          <a:fontRef idx="minor">
+            <a:schemeClr val="lt1"/>
+          </a:fontRef>
+        </p:style>
+        <p:txBody>
+          <a:bodyPr rtlCol="0" anchor="ctr"/>
+          <a:lstStyle/>
+          <a:p>
+            <a:pPr algn="ctr"/>
+          </a:p>
+        </p:txBody>
+      </p:sp>
+      <p:sp>
+        <p:nvSpPr>
+          <p:cNvPr id="8" name="TextBox 7"/>
+          <p:cNvSpPr txBox="1"/>
+          <p:nvPr/>
+        </p:nvSpPr>
+        <p:spPr>
+          <a:xfrm>
+            <a:off x="1143000" y="3584448"/>
+            <a:ext cx="9966960" cy="365760"/>
+          </a:xfrm>
+          <a:prstGeom prst="rect">
+            <a:avLst/>
+          </a:prstGeom>
+          <a:noFill/>
+        </p:spPr>
+        <p:txBody>
+          <a:bodyPr wrap="square" anchor="t">
+            <a:spAutoFit/>
+          </a:bodyPr>
+          <a:lstStyle/>
           <a:p>
             <a:pPr algn="l">
               <a:lnSpc>
-                <a:spcPct val="128000"/>
+                <a:spcPct val="100000"/>
               </a:lnSpc>
             </a:pPr>
             <a:r>
-              <a:rPr sz="1700" b="1">
+              <a:rPr sz="1200" b="1">
                 <a:solidFill>
                   <a:srgbClr val="00FF41"/>
                 </a:solidFill>
-                <a:latin typeface="Arial"/>
-              </a:rPr>
-              <a:t>→  </a:t>
-            </a:r>
-            <a:r>
-              <a:rPr sz="1700" b="0">
-                <a:solidFill>
-                  <a:srgbClr val="8A94A6"/>
-                </a:solidFill>
-                <a:latin typeface="Arial"/>
-              </a:rPr>
-              <a:t>Source (author, year)  -  what WORKED  -  what FAILED (avoid this).</a:t>
-            </a:r>
-          </a:p>
+                <a:latin typeface="Courier New"/>
+              </a:rPr>
+              <a:t>WHAT GOES ON THIS SLIDE  ·  replace the [ … ]</a:t>
+            </a:r>
+          </a:p>
+        </p:txBody>
+      </p:sp>
+      <p:sp>
+        <p:nvSpPr>
+          <p:cNvPr id="9" name="TextBox 8"/>
+          <p:cNvSpPr txBox="1"/>
+          <p:nvPr/>
+        </p:nvSpPr>
+        <p:spPr>
+          <a:xfrm>
+            <a:off x="1143000" y="4133088"/>
+            <a:ext cx="9921240" cy="1554480"/>
+          </a:xfrm>
+          <a:prstGeom prst="rect">
+            <a:avLst/>
+          </a:prstGeom>
+          <a:noFill/>
+        </p:spPr>
+        <p:txBody>
+          <a:bodyPr wrap="square" anchor="t">
+            <a:spAutoFit/>
+          </a:bodyPr>
+          <a:lstStyle/>
           <a:p>
             <a:pPr algn="l">
               <a:lnSpc>
-                <a:spcPct val="128000"/>
+                <a:spcPct val="140000"/>
               </a:lnSpc>
             </a:pPr>
             <a:r>
-              <a:rPr sz="1700" b="1">
+              <a:rPr sz="1800" b="1">
                 <a:solidFill>
                   <a:srgbClr val="00FF41"/>
                 </a:solidFill>
@@ -6727,20 +7318,70 @@
               <a:t>→  </a:t>
             </a:r>
             <a:r>
-              <a:rPr sz="1700" b="0">
-                <a:solidFill>
-                  <a:srgbClr val="8A94A6"/>
-                </a:solidFill>
-                <a:latin typeface="Arial"/>
-              </a:rPr>
-              <a:t>Real papers only, actually read - never invent a citation, never rely on an AI summary alone.</a:t>
-            </a:r>
-          </a:p>
-        </p:txBody>
-      </p:sp>
-      <p:sp>
-        <p:nvSpPr>
-          <p:cNvPr id="7" name="TextBox 6"/>
+              <a:rPr sz="1800" b="0">
+                <a:solidFill>
+                  <a:srgbClr val="F5F7FA"/>
+                </a:solidFill>
+                <a:latin typeface="Arial"/>
+              </a:rPr>
+              <a:t>Find via AI search (Claude · ChatGPT · Elicit · Semantic Scholar · Scholar Labs), then READ it</a:t>
+            </a:r>
+          </a:p>
+          <a:p>
+            <a:pPr algn="l">
+              <a:lnSpc>
+                <a:spcPct val="140000"/>
+              </a:lnSpc>
+            </a:pPr>
+            <a:r>
+              <a:rPr sz="1800" b="1">
+                <a:solidFill>
+                  <a:srgbClr val="00FF41"/>
+                </a:solidFill>
+                <a:latin typeface="Arial"/>
+              </a:rPr>
+              <a:t>→  </a:t>
+            </a:r>
+            <a:r>
+              <a:rPr sz="1800" b="0">
+                <a:solidFill>
+                  <a:srgbClr val="F5F7FA"/>
+                </a:solidFill>
+                <a:latin typeface="Arial"/>
+              </a:rPr>
+              <a:t>Source (author, year) · what WORKED · what FAILED</a:t>
+            </a:r>
+          </a:p>
+          <a:p>
+            <a:pPr algn="l">
+              <a:lnSpc>
+                <a:spcPct val="140000"/>
+              </a:lnSpc>
+            </a:pPr>
+            <a:r>
+              <a:rPr sz="1800" b="1">
+                <a:solidFill>
+                  <a:srgbClr val="00FF41"/>
+                </a:solidFill>
+                <a:latin typeface="Arial"/>
+              </a:rPr>
+              <a:t>→  </a:t>
+            </a:r>
+            <a:r>
+              <a:rPr sz="1800" b="0">
+                <a:solidFill>
+                  <a:srgbClr val="F5F7FA"/>
+                </a:solidFill>
+                <a:latin typeface="Arial"/>
+              </a:rPr>
+              <a:t>Real papers only — never invent a citation</a:t>
+            </a:r>
+          </a:p>
+        </p:txBody>
+      </p:sp>
+      <p:sp>
+        <p:nvSpPr>
+          <p:cNvPr id="10" name="TextBox 9"/>
           <p:cNvSpPr txBox="1"/>
           <p:nvPr/>
         </p:nvSpPr>
@@ -6837,7 +7478,7 @@
                 </a:solidFill>
                 <a:latin typeface="Courier New"/>
               </a:rPr>
-              <a:t>04.1  ·  YOUR PAPER (your individual contribution)</a:t>
+              <a:t>04.1   ·   YOUR PAPER  (your individual contribution)</a:t>
             </a:r>
           </a:p>
         </p:txBody>
@@ -6894,8 +7535,8 @@
         </p:nvSpPr>
         <p:spPr>
           <a:xfrm>
-            <a:off x="640080" y="1170432"/>
-            <a:ext cx="10972800" cy="914400"/>
+            <a:off x="822960" y="1207008"/>
+            <a:ext cx="10515600" cy="914400"/>
           </a:xfrm>
           <a:prstGeom prst="rect">
             <a:avLst/>
@@ -6933,8 +7574,8 @@
         </p:nvSpPr>
         <p:spPr>
           <a:xfrm>
-            <a:off x="658368" y="2286000"/>
-            <a:ext cx="10881360" cy="2834640"/>
+            <a:off x="841248" y="2084831"/>
+            <a:ext cx="10424160" cy="457200"/>
           </a:xfrm>
           <a:prstGeom prst="rect">
             <a:avLst/>
@@ -6949,101 +7590,17 @@
           <a:p>
             <a:pPr algn="l">
               <a:lnSpc>
-                <a:spcPct val="134000"/>
+                <a:spcPct val="100000"/>
               </a:lnSpc>
             </a:pPr>
             <a:r>
-              <a:rPr sz="1900" b="1">
-                <a:solidFill>
-                  <a:srgbClr val="00FF41"/>
-                </a:solidFill>
-                <a:latin typeface="Arial"/>
-              </a:rPr>
-              <a:t>→  </a:t>
-            </a:r>
-            <a:r>
-              <a:rPr sz="1900" b="0">
-                <a:solidFill>
-                  <a:srgbClr val="F5F7FA"/>
-                </a:solidFill>
-                <a:latin typeface="Arial"/>
-              </a:rPr>
-              <a:t>The paper you found + READ - [ author, year, title ]  (AI search to FIND it; then read the actual paper)</a:t>
-            </a:r>
-          </a:p>
-          <a:p>
-            <a:pPr algn="l">
-              <a:lnSpc>
-                <a:spcPct val="134000"/>
-              </a:lnSpc>
-            </a:pPr>
-            <a:r>
-              <a:rPr sz="1900" b="1">
-                <a:solidFill>
-                  <a:srgbClr val="00FF41"/>
-                </a:solidFill>
-                <a:latin typeface="Arial"/>
-              </a:rPr>
-              <a:t>→  </a:t>
-            </a:r>
-            <a:r>
-              <a:rPr sz="1900" b="0">
-                <a:solidFill>
-                  <a:srgbClr val="F5F7FA"/>
-                </a:solidFill>
-                <a:latin typeface="Arial"/>
-              </a:rPr>
-              <a:t>The design intervention they tried to move THIS value - [ what they did ]</a:t>
-            </a:r>
-          </a:p>
-          <a:p>
-            <a:pPr algn="l">
-              <a:lnSpc>
-                <a:spcPct val="134000"/>
-              </a:lnSpc>
-            </a:pPr>
-            <a:r>
-              <a:rPr sz="1900" b="1">
-                <a:solidFill>
-                  <a:srgbClr val="00FF41"/>
-                </a:solidFill>
-                <a:latin typeface="Arial"/>
-              </a:rPr>
-              <a:t>→  </a:t>
-            </a:r>
-            <a:r>
-              <a:rPr sz="1900" b="0">
-                <a:solidFill>
-                  <a:srgbClr val="F5F7FA"/>
-                </a:solidFill>
-                <a:latin typeface="Arial"/>
-              </a:rPr>
-              <a:t>What WORKED - [ ___ ]     |     What FAILED / to avoid - [ ___ ]</a:t>
-            </a:r>
-          </a:p>
-          <a:p>
-            <a:pPr algn="l">
-              <a:lnSpc>
-                <a:spcPct val="134000"/>
-              </a:lnSpc>
-            </a:pPr>
-            <a:r>
-              <a:rPr sz="1900" b="1">
-                <a:solidFill>
-                  <a:srgbClr val="00FF41"/>
-                </a:solidFill>
-                <a:latin typeface="Arial"/>
-              </a:rPr>
-              <a:t>→  </a:t>
-            </a:r>
-            <a:r>
-              <a:rPr sz="1900" b="0">
-                <a:solidFill>
-                  <a:srgbClr val="F5F7FA"/>
-                </a:solidFill>
-                <a:latin typeface="Arial"/>
-              </a:rPr>
-              <a:t>Does it support or challenge our design direction? - [ ___ ]</a:t>
+              <a:rPr sz="1600" b="0">
+                <a:solidFill>
+                  <a:srgbClr val="8A94A6"/>
+                </a:solidFill>
+                <a:latin typeface="Arial"/>
+              </a:rPr>
+              <a:t>The paper you found via AI search — and actually READ (not just the AI summary).</a:t>
             </a:r>
           </a:p>
         </p:txBody>
@@ -7056,8 +7613,8 @@
         </p:nvSpPr>
         <p:spPr>
           <a:xfrm>
-            <a:off x="640080" y="5440680"/>
-            <a:ext cx="10881360" cy="658368"/>
+            <a:off x="822960" y="2743200"/>
+            <a:ext cx="10543032" cy="2606040"/>
           </a:xfrm>
           <a:prstGeom prst="roundRect">
             <a:avLst/>
@@ -7065,10 +7622,8 @@
           <a:solidFill>
             <a:srgbClr val="151B26"/>
           </a:solidFill>
-          <a:ln w="19050">
-            <a:solidFill>
-              <a:srgbClr val="00FF41"/>
-            </a:solidFill>
+          <a:ln>
+            <a:noFill/>
           </a:ln>
           <a:effectLst/>
         </p:spPr>
@@ -7102,8 +7657,8 @@
         </p:nvSpPr>
         <p:spPr>
           <a:xfrm>
-            <a:off x="914400" y="5440680"/>
-            <a:ext cx="10332720" cy="658368"/>
+            <a:off x="1143000" y="3127248"/>
+            <a:ext cx="9921240" cy="1965960"/>
           </a:xfrm>
           <a:prstGeom prst="rect">
             <a:avLst/>
@@ -7111,7 +7666,105 @@
           <a:noFill/>
         </p:spPr>
         <p:txBody>
-          <a:bodyPr wrap="square" anchor="ctr">
+          <a:bodyPr wrap="square" anchor="t">
+            <a:spAutoFit/>
+          </a:bodyPr>
+          <a:lstStyle/>
+          <a:p>
+            <a:pPr algn="l">
+              <a:lnSpc>
+                <a:spcPct val="150000"/>
+              </a:lnSpc>
+            </a:pPr>
+            <a:r>
+              <a:rPr sz="1900" b="1">
+                <a:solidFill>
+                  <a:srgbClr val="00FF41"/>
+                </a:solidFill>
+                <a:latin typeface="Arial"/>
+              </a:rPr>
+              <a:t>→  </a:t>
+            </a:r>
+            <a:r>
+              <a:rPr sz="1900" b="0">
+                <a:solidFill>
+                  <a:srgbClr val="F5F7FA"/>
+                </a:solidFill>
+                <a:latin typeface="Arial"/>
+              </a:rPr>
+              <a:t>The paper — [ author, year, title ]</a:t>
+            </a:r>
+          </a:p>
+          <a:p>
+            <a:pPr algn="l">
+              <a:lnSpc>
+                <a:spcPct val="150000"/>
+              </a:lnSpc>
+            </a:pPr>
+            <a:r>
+              <a:rPr sz="1900" b="1">
+                <a:solidFill>
+                  <a:srgbClr val="00FF41"/>
+                </a:solidFill>
+                <a:latin typeface="Arial"/>
+              </a:rPr>
+              <a:t>→  </a:t>
+            </a:r>
+            <a:r>
+              <a:rPr sz="1900" b="0">
+                <a:solidFill>
+                  <a:srgbClr val="F5F7FA"/>
+                </a:solidFill>
+                <a:latin typeface="Arial"/>
+              </a:rPr>
+              <a:t>What WORKED — [ … ]     |     What FAILED / to avoid — [ … ]</a:t>
+            </a:r>
+          </a:p>
+          <a:p>
+            <a:pPr algn="l">
+              <a:lnSpc>
+                <a:spcPct val="150000"/>
+              </a:lnSpc>
+            </a:pPr>
+            <a:r>
+              <a:rPr sz="1900" b="1">
+                <a:solidFill>
+                  <a:srgbClr val="00FF41"/>
+                </a:solidFill>
+                <a:latin typeface="Arial"/>
+              </a:rPr>
+              <a:t>→  </a:t>
+            </a:r>
+            <a:r>
+              <a:rPr sz="1900" b="0">
+                <a:solidFill>
+                  <a:srgbClr val="F5F7FA"/>
+                </a:solidFill>
+                <a:latin typeface="Arial"/>
+              </a:rPr>
+              <a:t>Supports or challenges our design direction? — [ … ]</a:t>
+            </a:r>
+          </a:p>
+        </p:txBody>
+      </p:sp>
+      <p:sp>
+        <p:nvSpPr>
+          <p:cNvPr id="8" name="TextBox 7"/>
+          <p:cNvSpPr txBox="1"/>
+          <p:nvPr/>
+        </p:nvSpPr>
+        <p:spPr>
+          <a:xfrm>
+            <a:off x="822960" y="5623560"/>
+            <a:ext cx="10515600" cy="365760"/>
+          </a:xfrm>
+          <a:prstGeom prst="rect">
+            <a:avLst/>
+          </a:prstGeom>
+          <a:noFill/>
+        </p:spPr>
+        <p:txBody>
+          <a:bodyPr wrap="square" anchor="t">
             <a:spAutoFit/>
           </a:bodyPr>
           <a:lstStyle/>
@@ -7122,29 +7775,20 @@
               </a:lnSpc>
             </a:pPr>
             <a:r>
-              <a:rPr sz="1600" b="1">
-                <a:solidFill>
-                  <a:srgbClr val="00FF41"/>
-                </a:solidFill>
-                <a:latin typeface="Arial"/>
-              </a:rPr>
-              <a:t>▸  </a:t>
-            </a:r>
-            <a:r>
-              <a:rPr sz="1500" b="1">
-                <a:solidFill>
-                  <a:srgbClr val="F5F7FA"/>
-                </a:solidFill>
-                <a:latin typeface="Arial"/>
-              </a:rPr>
-              <a:t>This slide is yours - the paper you actually read. Add more behind it if you need to - keep your name on them.</a:t>
-            </a:r>
-          </a:p>
-        </p:txBody>
-      </p:sp>
-      <p:sp>
-        <p:nvSpPr>
-          <p:cNvPr id="8" name="TextBox 7"/>
+              <a:rPr sz="1300" b="0">
+                <a:solidFill>
+                  <a:srgbClr val="5A6474"/>
+                </a:solidFill>
+                <a:latin typeface="Courier New"/>
+              </a:rPr>
+              <a:t>▸  This slide is yours — add more behind it if you need to, keep your name on them.</a:t>
+            </a:r>
+          </a:p>
+        </p:txBody>
+      </p:sp>
+      <p:sp>
+        <p:nvSpPr>
+          <p:cNvPr id="9" name="TextBox 8"/>
           <p:cNvSpPr txBox="1"/>
           <p:nvPr/>
         </p:nvSpPr>
@@ -7241,7 +7885,7 @@
                 </a:solidFill>
                 <a:latin typeface="Courier New"/>
               </a:rPr>
-              <a:t>04.2  ·  YOUR PAPER (your individual contribution)</a:t>
+              <a:t>04.2   ·   YOUR PAPER  (your individual contribution)</a:t>
             </a:r>
           </a:p>
         </p:txBody>
@@ -7298,8 +7942,8 @@
         </p:nvSpPr>
         <p:spPr>
           <a:xfrm>
-            <a:off x="640080" y="1170432"/>
-            <a:ext cx="10972800" cy="914400"/>
+            <a:off x="822960" y="1207008"/>
+            <a:ext cx="10515600" cy="914400"/>
           </a:xfrm>
           <a:prstGeom prst="rect">
             <a:avLst/>
@@ -7337,8 +7981,8 @@
         </p:nvSpPr>
         <p:spPr>
           <a:xfrm>
-            <a:off x="658368" y="2286000"/>
-            <a:ext cx="10881360" cy="2834640"/>
+            <a:off x="841248" y="2084831"/>
+            <a:ext cx="10424160" cy="457200"/>
           </a:xfrm>
           <a:prstGeom prst="rect">
             <a:avLst/>
@@ -7353,101 +7997,17 @@
           <a:p>
             <a:pPr algn="l">
               <a:lnSpc>
-                <a:spcPct val="134000"/>
+                <a:spcPct val="100000"/>
               </a:lnSpc>
             </a:pPr>
             <a:r>
-              <a:rPr sz="1900" b="1">
-                <a:solidFill>
-                  <a:srgbClr val="00FF41"/>
-                </a:solidFill>
-                <a:latin typeface="Arial"/>
-              </a:rPr>
-              <a:t>→  </a:t>
-            </a:r>
-            <a:r>
-              <a:rPr sz="1900" b="0">
-                <a:solidFill>
-                  <a:srgbClr val="F5F7FA"/>
-                </a:solidFill>
-                <a:latin typeface="Arial"/>
-              </a:rPr>
-              <a:t>The paper you found + READ - [ author, year, title ]  (AI search to FIND it; then read the actual paper)</a:t>
-            </a:r>
-          </a:p>
-          <a:p>
-            <a:pPr algn="l">
-              <a:lnSpc>
-                <a:spcPct val="134000"/>
-              </a:lnSpc>
-            </a:pPr>
-            <a:r>
-              <a:rPr sz="1900" b="1">
-                <a:solidFill>
-                  <a:srgbClr val="00FF41"/>
-                </a:solidFill>
-                <a:latin typeface="Arial"/>
-              </a:rPr>
-              <a:t>→  </a:t>
-            </a:r>
-            <a:r>
-              <a:rPr sz="1900" b="0">
-                <a:solidFill>
-                  <a:srgbClr val="F5F7FA"/>
-                </a:solidFill>
-                <a:latin typeface="Arial"/>
-              </a:rPr>
-              <a:t>The design intervention they tried to move THIS value - [ what they did ]</a:t>
-            </a:r>
-          </a:p>
-          <a:p>
-            <a:pPr algn="l">
-              <a:lnSpc>
-                <a:spcPct val="134000"/>
-              </a:lnSpc>
-            </a:pPr>
-            <a:r>
-              <a:rPr sz="1900" b="1">
-                <a:solidFill>
-                  <a:srgbClr val="00FF41"/>
-                </a:solidFill>
-                <a:latin typeface="Arial"/>
-              </a:rPr>
-              <a:t>→  </a:t>
-            </a:r>
-            <a:r>
-              <a:rPr sz="1900" b="0">
-                <a:solidFill>
-                  <a:srgbClr val="F5F7FA"/>
-                </a:solidFill>
-                <a:latin typeface="Arial"/>
-              </a:rPr>
-              <a:t>What WORKED - [ ___ ]     |     What FAILED / to avoid - [ ___ ]</a:t>
-            </a:r>
-          </a:p>
-          <a:p>
-            <a:pPr algn="l">
-              <a:lnSpc>
-                <a:spcPct val="134000"/>
-              </a:lnSpc>
-            </a:pPr>
-            <a:r>
-              <a:rPr sz="1900" b="1">
-                <a:solidFill>
-                  <a:srgbClr val="00FF41"/>
-                </a:solidFill>
-                <a:latin typeface="Arial"/>
-              </a:rPr>
-              <a:t>→  </a:t>
-            </a:r>
-            <a:r>
-              <a:rPr sz="1900" b="0">
-                <a:solidFill>
-                  <a:srgbClr val="F5F7FA"/>
-                </a:solidFill>
-                <a:latin typeface="Arial"/>
-              </a:rPr>
-              <a:t>Does it support or challenge our design direction? - [ ___ ]</a:t>
+              <a:rPr sz="1600" b="0">
+                <a:solidFill>
+                  <a:srgbClr val="8A94A6"/>
+                </a:solidFill>
+                <a:latin typeface="Arial"/>
+              </a:rPr>
+              <a:t>The paper you found via AI search — and actually READ (not just the AI summary).</a:t>
             </a:r>
           </a:p>
         </p:txBody>
@@ -7460,8 +8020,8 @@
         </p:nvSpPr>
         <p:spPr>
           <a:xfrm>
-            <a:off x="640080" y="5440680"/>
-            <a:ext cx="10881360" cy="658368"/>
+            <a:off x="822960" y="2743200"/>
+            <a:ext cx="10543032" cy="2606040"/>
           </a:xfrm>
           <a:prstGeom prst="roundRect">
             <a:avLst/>
@@ -7469,10 +8029,8 @@
           <a:solidFill>
             <a:srgbClr val="151B26"/>
           </a:solidFill>
-          <a:ln w="19050">
-            <a:solidFill>
-              <a:srgbClr val="00FF41"/>
-            </a:solidFill>
+          <a:ln>
+            <a:noFill/>
           </a:ln>
           <a:effectLst/>
         </p:spPr>
@@ -7506,8 +8064,8 @@
         </p:nvSpPr>
         <p:spPr>
           <a:xfrm>
-            <a:off x="914400" y="5440680"/>
-            <a:ext cx="10332720" cy="658368"/>
+            <a:off x="1143000" y="3127248"/>
+            <a:ext cx="9921240" cy="1965960"/>
           </a:xfrm>
           <a:prstGeom prst="rect">
             <a:avLst/>
@@ -7515,7 +8073,105 @@
           <a:noFill/>
         </p:spPr>
         <p:txBody>
-          <a:bodyPr wrap="square" anchor="ctr">
+          <a:bodyPr wrap="square" anchor="t">
+            <a:spAutoFit/>
+          </a:bodyPr>
+          <a:lstStyle/>
+          <a:p>
+            <a:pPr algn="l">
+              <a:lnSpc>
+                <a:spcPct val="150000"/>
+              </a:lnSpc>
+            </a:pPr>
+            <a:r>
+              <a:rPr sz="1900" b="1">
+                <a:solidFill>
+                  <a:srgbClr val="00FF41"/>
+                </a:solidFill>
+                <a:latin typeface="Arial"/>
+              </a:rPr>
+              <a:t>→  </a:t>
+            </a:r>
+            <a:r>
+              <a:rPr sz="1900" b="0">
+                <a:solidFill>
+                  <a:srgbClr val="F5F7FA"/>
+                </a:solidFill>
+                <a:latin typeface="Arial"/>
+              </a:rPr>
+              <a:t>The paper — [ author, year, title ]</a:t>
+            </a:r>
+          </a:p>
+          <a:p>
+            <a:pPr algn="l">
+              <a:lnSpc>
+                <a:spcPct val="150000"/>
+              </a:lnSpc>
+            </a:pPr>
+            <a:r>
+              <a:rPr sz="1900" b="1">
+                <a:solidFill>
+                  <a:srgbClr val="00FF41"/>
+                </a:solidFill>
+                <a:latin typeface="Arial"/>
+              </a:rPr>
+              <a:t>→  </a:t>
+            </a:r>
+            <a:r>
+              <a:rPr sz="1900" b="0">
+                <a:solidFill>
+                  <a:srgbClr val="F5F7FA"/>
+                </a:solidFill>
+                <a:latin typeface="Arial"/>
+              </a:rPr>
+              <a:t>What WORKED — [ … ]     |     What FAILED / to avoid — [ … ]</a:t>
+            </a:r>
+          </a:p>
+          <a:p>
+            <a:pPr algn="l">
+              <a:lnSpc>
+                <a:spcPct val="150000"/>
+              </a:lnSpc>
+            </a:pPr>
+            <a:r>
+              <a:rPr sz="1900" b="1">
+                <a:solidFill>
+                  <a:srgbClr val="00FF41"/>
+                </a:solidFill>
+                <a:latin typeface="Arial"/>
+              </a:rPr>
+              <a:t>→  </a:t>
+            </a:r>
+            <a:r>
+              <a:rPr sz="1900" b="0">
+                <a:solidFill>
+                  <a:srgbClr val="F5F7FA"/>
+                </a:solidFill>
+                <a:latin typeface="Arial"/>
+              </a:rPr>
+              <a:t>Supports or challenges our design direction? — [ … ]</a:t>
+            </a:r>
+          </a:p>
+        </p:txBody>
+      </p:sp>
+      <p:sp>
+        <p:nvSpPr>
+          <p:cNvPr id="8" name="TextBox 7"/>
+          <p:cNvSpPr txBox="1"/>
+          <p:nvPr/>
+        </p:nvSpPr>
+        <p:spPr>
+          <a:xfrm>
+            <a:off x="822960" y="5623560"/>
+            <a:ext cx="10515600" cy="365760"/>
+          </a:xfrm>
+          <a:prstGeom prst="rect">
+            <a:avLst/>
+          </a:prstGeom>
+          <a:noFill/>
+        </p:spPr>
+        <p:txBody>
+          <a:bodyPr wrap="square" anchor="t">
             <a:spAutoFit/>
           </a:bodyPr>
           <a:lstStyle/>
@@ -7526,29 +8182,20 @@
               </a:lnSpc>
             </a:pPr>
             <a:r>
-              <a:rPr sz="1600" b="1">
-                <a:solidFill>
-                  <a:srgbClr val="00FF41"/>
-                </a:solidFill>
-                <a:latin typeface="Arial"/>
-              </a:rPr>
-              <a:t>▸  </a:t>
-            </a:r>
-            <a:r>
-              <a:rPr sz="1500" b="1">
-                <a:solidFill>
-                  <a:srgbClr val="F5F7FA"/>
-                </a:solidFill>
-                <a:latin typeface="Arial"/>
-              </a:rPr>
-              <a:t>This slide is yours - the paper you actually read. Add more behind it if you need to - keep your name on them.</a:t>
-            </a:r>
-          </a:p>
-        </p:txBody>
-      </p:sp>
-      <p:sp>
-        <p:nvSpPr>
-          <p:cNvPr id="8" name="TextBox 7"/>
+              <a:rPr sz="1300" b="0">
+                <a:solidFill>
+                  <a:srgbClr val="5A6474"/>
+                </a:solidFill>
+                <a:latin typeface="Courier New"/>
+              </a:rPr>
+              <a:t>▸  This slide is yours — add more behind it if you need to, keep your name on them.</a:t>
+            </a:r>
+          </a:p>
+        </p:txBody>
+      </p:sp>
+      <p:sp>
+        <p:nvSpPr>
+          <p:cNvPr id="9" name="TextBox 8"/>
           <p:cNvSpPr txBox="1"/>
           <p:nvPr/>
         </p:nvSpPr>
@@ -7645,7 +8292,7 @@
                 </a:solidFill>
                 <a:latin typeface="Courier New"/>
               </a:rPr>
-              <a:t>04.3  ·  YOUR PAPER (your individual contribution)</a:t>
+              <a:t>04.3   ·   YOUR PAPER  (your individual contribution)</a:t>
             </a:r>
           </a:p>
         </p:txBody>
@@ -7702,8 +8349,8 @@
         </p:nvSpPr>
         <p:spPr>
           <a:xfrm>
-            <a:off x="640080" y="1170432"/>
-            <a:ext cx="10972800" cy="914400"/>
+            <a:off x="822960" y="1207008"/>
+            <a:ext cx="10515600" cy="914400"/>
           </a:xfrm>
           <a:prstGeom prst="rect">
             <a:avLst/>
@@ -7741,8 +8388,8 @@
         </p:nvSpPr>
         <p:spPr>
           <a:xfrm>
-            <a:off x="658368" y="2286000"/>
-            <a:ext cx="10881360" cy="2834640"/>
+            <a:off x="841248" y="2084831"/>
+            <a:ext cx="10424160" cy="457200"/>
           </a:xfrm>
           <a:prstGeom prst="rect">
             <a:avLst/>
@@ -7757,101 +8404,17 @@
           <a:p>
             <a:pPr algn="l">
               <a:lnSpc>
-                <a:spcPct val="134000"/>
+                <a:spcPct val="100000"/>
               </a:lnSpc>
             </a:pPr>
             <a:r>
-              <a:rPr sz="1900" b="1">
-                <a:solidFill>
-                  <a:srgbClr val="00FF41"/>
-                </a:solidFill>
-                <a:latin typeface="Arial"/>
-              </a:rPr>
-              <a:t>→  </a:t>
-            </a:r>
-            <a:r>
-              <a:rPr sz="1900" b="0">
-                <a:solidFill>
-                  <a:srgbClr val="F5F7FA"/>
-                </a:solidFill>
-                <a:latin typeface="Arial"/>
-              </a:rPr>
-              <a:t>The paper you found + READ - [ author, year, title ]  (AI search to FIND it; then read the actual paper)</a:t>
-            </a:r>
-          </a:p>
-          <a:p>
-            <a:pPr algn="l">
-              <a:lnSpc>
-                <a:spcPct val="134000"/>
-              </a:lnSpc>
-            </a:pPr>
-            <a:r>
-              <a:rPr sz="1900" b="1">
-                <a:solidFill>
-                  <a:srgbClr val="00FF41"/>
-                </a:solidFill>
-                <a:latin typeface="Arial"/>
-              </a:rPr>
-              <a:t>→  </a:t>
-            </a:r>
-            <a:r>
-              <a:rPr sz="1900" b="0">
-                <a:solidFill>
-                  <a:srgbClr val="F5F7FA"/>
-                </a:solidFill>
-                <a:latin typeface="Arial"/>
-              </a:rPr>
-              <a:t>The design intervention they tried to move THIS value - [ what they did ]</a:t>
-            </a:r>
-          </a:p>
-          <a:p>
-            <a:pPr algn="l">
-              <a:lnSpc>
-                <a:spcPct val="134000"/>
-              </a:lnSpc>
-            </a:pPr>
-            <a:r>
-              <a:rPr sz="1900" b="1">
-                <a:solidFill>
-                  <a:srgbClr val="00FF41"/>
-                </a:solidFill>
-                <a:latin typeface="Arial"/>
-              </a:rPr>
-              <a:t>→  </a:t>
-            </a:r>
-            <a:r>
-              <a:rPr sz="1900" b="0">
-                <a:solidFill>
-                  <a:srgbClr val="F5F7FA"/>
-                </a:solidFill>
-                <a:latin typeface="Arial"/>
-              </a:rPr>
-              <a:t>What WORKED - [ ___ ]     |     What FAILED / to avoid - [ ___ ]</a:t>
-            </a:r>
-          </a:p>
-          <a:p>
-            <a:pPr algn="l">
-              <a:lnSpc>
-                <a:spcPct val="134000"/>
-              </a:lnSpc>
-            </a:pPr>
-            <a:r>
-              <a:rPr sz="1900" b="1">
-                <a:solidFill>
-                  <a:srgbClr val="00FF41"/>
-                </a:solidFill>
-                <a:latin typeface="Arial"/>
-              </a:rPr>
-              <a:t>→  </a:t>
-            </a:r>
-            <a:r>
-              <a:rPr sz="1900" b="0">
-                <a:solidFill>
-                  <a:srgbClr val="F5F7FA"/>
-                </a:solidFill>
-                <a:latin typeface="Arial"/>
-              </a:rPr>
-              <a:t>Does it support or challenge our design direction? - [ ___ ]</a:t>
+              <a:rPr sz="1600" b="0">
+                <a:solidFill>
+                  <a:srgbClr val="8A94A6"/>
+                </a:solidFill>
+                <a:latin typeface="Arial"/>
+              </a:rPr>
+              <a:t>The paper you found via AI search — and actually READ (not just the AI summary).</a:t>
             </a:r>
           </a:p>
         </p:txBody>
@@ -7864,8 +8427,8 @@
         </p:nvSpPr>
         <p:spPr>
           <a:xfrm>
-            <a:off x="640080" y="5440680"/>
-            <a:ext cx="10881360" cy="658368"/>
+            <a:off x="822960" y="2743200"/>
+            <a:ext cx="10543032" cy="2606040"/>
           </a:xfrm>
           <a:prstGeom prst="roundRect">
             <a:avLst/>
@@ -7873,10 +8436,8 @@
           <a:solidFill>
             <a:srgbClr val="151B26"/>
           </a:solidFill>
-          <a:ln w="19050">
-            <a:solidFill>
-              <a:srgbClr val="00FF41"/>
-            </a:solidFill>
+          <a:ln>
+            <a:noFill/>
           </a:ln>
           <a:effectLst/>
         </p:spPr>
@@ -7910,8 +8471,8 @@
         </p:nvSpPr>
         <p:spPr>
           <a:xfrm>
-            <a:off x="914400" y="5440680"/>
-            <a:ext cx="10332720" cy="658368"/>
+            <a:off x="1143000" y="3127248"/>
+            <a:ext cx="9921240" cy="1965960"/>
           </a:xfrm>
           <a:prstGeom prst="rect">
             <a:avLst/>
@@ -7919,7 +8480,105 @@
           <a:noFill/>
         </p:spPr>
         <p:txBody>
-          <a:bodyPr wrap="square" anchor="ctr">
+          <a:bodyPr wrap="square" anchor="t">
+            <a:spAutoFit/>
+          </a:bodyPr>
+          <a:lstStyle/>
+          <a:p>
+            <a:pPr algn="l">
+              <a:lnSpc>
+                <a:spcPct val="150000"/>
+              </a:lnSpc>
+            </a:pPr>
+            <a:r>
+              <a:rPr sz="1900" b="1">
+                <a:solidFill>
+                  <a:srgbClr val="00FF41"/>
+                </a:solidFill>
+                <a:latin typeface="Arial"/>
+              </a:rPr>
+              <a:t>→  </a:t>
+            </a:r>
+            <a:r>
+              <a:rPr sz="1900" b="0">
+                <a:solidFill>
+                  <a:srgbClr val="F5F7FA"/>
+                </a:solidFill>
+                <a:latin typeface="Arial"/>
+              </a:rPr>
+              <a:t>The paper — [ author, year, title ]</a:t>
+            </a:r>
+          </a:p>
+          <a:p>
+            <a:pPr algn="l">
+              <a:lnSpc>
+                <a:spcPct val="150000"/>
+              </a:lnSpc>
+            </a:pPr>
+            <a:r>
+              <a:rPr sz="1900" b="1">
+                <a:solidFill>
+                  <a:srgbClr val="00FF41"/>
+                </a:solidFill>
+                <a:latin typeface="Arial"/>
+              </a:rPr>
+              <a:t>→  </a:t>
+            </a:r>
+            <a:r>
+              <a:rPr sz="1900" b="0">
+                <a:solidFill>
+                  <a:srgbClr val="F5F7FA"/>
+                </a:solidFill>
+                <a:latin typeface="Arial"/>
+              </a:rPr>
+              <a:t>What WORKED — [ … ]     |     What FAILED / to avoid — [ … ]</a:t>
+            </a:r>
+          </a:p>
+          <a:p>
+            <a:pPr algn="l">
+              <a:lnSpc>
+                <a:spcPct val="150000"/>
+              </a:lnSpc>
+            </a:pPr>
+            <a:r>
+              <a:rPr sz="1900" b="1">
+                <a:solidFill>
+                  <a:srgbClr val="00FF41"/>
+                </a:solidFill>
+                <a:latin typeface="Arial"/>
+              </a:rPr>
+              <a:t>→  </a:t>
+            </a:r>
+            <a:r>
+              <a:rPr sz="1900" b="0">
+                <a:solidFill>
+                  <a:srgbClr val="F5F7FA"/>
+                </a:solidFill>
+                <a:latin typeface="Arial"/>
+              </a:rPr>
+              <a:t>Supports or challenges our design direction? — [ … ]</a:t>
+            </a:r>
+          </a:p>
+        </p:txBody>
+      </p:sp>
+      <p:sp>
+        <p:nvSpPr>
+          <p:cNvPr id="8" name="TextBox 7"/>
+          <p:cNvSpPr txBox="1"/>
+          <p:nvPr/>
+        </p:nvSpPr>
+        <p:spPr>
+          <a:xfrm>
+            <a:off x="822960" y="5623560"/>
+            <a:ext cx="10515600" cy="365760"/>
+          </a:xfrm>
+          <a:prstGeom prst="rect">
+            <a:avLst/>
+          </a:prstGeom>
+          <a:noFill/>
+        </p:spPr>
+        <p:txBody>
+          <a:bodyPr wrap="square" anchor="t">
             <a:spAutoFit/>
           </a:bodyPr>
           <a:lstStyle/>
@@ -7930,29 +8589,20 @@
               </a:lnSpc>
             </a:pPr>
             <a:r>
-              <a:rPr sz="1600" b="1">
-                <a:solidFill>
-                  <a:srgbClr val="00FF41"/>
-                </a:solidFill>
-                <a:latin typeface="Arial"/>
-              </a:rPr>
-              <a:t>▸  </a:t>
-            </a:r>
-            <a:r>
-              <a:rPr sz="1500" b="1">
-                <a:solidFill>
-                  <a:srgbClr val="F5F7FA"/>
-                </a:solidFill>
-                <a:latin typeface="Arial"/>
-              </a:rPr>
-              <a:t>This slide is yours - the paper you actually read. Add more behind it if you need to - keep your name on them.</a:t>
-            </a:r>
-          </a:p>
-        </p:txBody>
-      </p:sp>
-      <p:sp>
-        <p:nvSpPr>
-          <p:cNvPr id="8" name="TextBox 7"/>
+              <a:rPr sz="1300" b="0">
+                <a:solidFill>
+                  <a:srgbClr val="5A6474"/>
+                </a:solidFill>
+                <a:latin typeface="Courier New"/>
+              </a:rPr>
+              <a:t>▸  This slide is yours — add more behind it if you need to, keep your name on them.</a:t>
+            </a:r>
+          </a:p>
+        </p:txBody>
+      </p:sp>
+      <p:sp>
+        <p:nvSpPr>
+          <p:cNvPr id="9" name="TextBox 8"/>
           <p:cNvSpPr txBox="1"/>
           <p:nvPr/>
         </p:nvSpPr>
